--- a/courses/popl26/slides/lec01-overview.pptx
+++ b/courses/popl26/slides/lec01-overview.pptx
@@ -5,7 +5,7 @@
     <p:sldMasterId id="2147483649" r:id="rId1"/>
   </p:sldMasterIdLst>
   <p:handoutMasterIdLst>
-    <p:handoutMasterId r:id="rId19"/>
+    <p:handoutMasterId r:id="rId18"/>
   </p:handoutMasterIdLst>
   <p:sldIdLst>
     <p:sldId id="256" r:id="rId2"/>
@@ -18,13 +18,12 @@
     <p:sldId id="312" r:id="rId9"/>
     <p:sldId id="287" r:id="rId10"/>
     <p:sldId id="313" r:id="rId11"/>
-    <p:sldId id="314" r:id="rId12"/>
-    <p:sldId id="288" r:id="rId13"/>
-    <p:sldId id="305" r:id="rId14"/>
-    <p:sldId id="315" r:id="rId15"/>
-    <p:sldId id="295" r:id="rId16"/>
-    <p:sldId id="303" r:id="rId17"/>
-    <p:sldId id="304" r:id="rId18"/>
+    <p:sldId id="288" r:id="rId12"/>
+    <p:sldId id="305" r:id="rId13"/>
+    <p:sldId id="315" r:id="rId14"/>
+    <p:sldId id="295" r:id="rId15"/>
+    <p:sldId id="303" r:id="rId16"/>
+    <p:sldId id="304" r:id="rId17"/>
   </p:sldIdLst>
   <p:sldSz cx="9144000" cy="6858000" type="screen4x3"/>
   <p:notesSz cx="7099300" cy="10234613"/>
@@ -5239,7 +5238,7 @@
               <a:rPr lang="en-US" altLang="zh-CN" sz="2400" dirty="0">
                 <a:hlinkClick r:id="rId2"/>
               </a:rPr>
-              <a:t>https://csslab-ustc.github.io/courses/popl/</a:t>
+              <a:t>https://csslab-ustc.github.io/courses/popl26/</a:t>
             </a:r>
             <a:endParaRPr lang="en-US" altLang="zh-CN" sz="2400" dirty="0"/>
           </a:p>
@@ -5261,155 +5260,97 @@
                   <a:srgbClr val="000000"/>
                 </a:solidFill>
               </a:rPr>
-              <a:t>People:</a:t>
-            </a:r>
-          </a:p>
-          <a:p>
-            <a:pPr lvl="1">
+              <a:t>Schedule</a:t>
+            </a:r>
+            <a:r>
+              <a:rPr lang="zh-CN" altLang="en-US" dirty="0">
+                <a:solidFill>
+                  <a:srgbClr val="000000"/>
+                </a:solidFill>
+              </a:rPr>
+              <a:t> </a:t>
+            </a:r>
+            <a:endParaRPr lang="en-US" altLang="zh-CN" dirty="0">
+              <a:solidFill>
+                <a:srgbClr val="000000"/>
+              </a:solidFill>
+            </a:endParaRPr>
+          </a:p>
+          <a:p>
+            <a:pPr lvl="0">
               <a:buClr>
                 <a:srgbClr val="3333CC"/>
               </a:buClr>
             </a:pPr>
             <a:r>
-              <a:rPr lang="en-US" altLang="zh-CN" sz="2400" dirty="0" err="1">
+              <a:rPr lang="en-US" altLang="zh-CN" dirty="0">
                 <a:solidFill>
                   <a:srgbClr val="000000"/>
                 </a:solidFill>
               </a:rPr>
-              <a:t>Baojian</a:t>
-            </a:r>
-            <a:r>
-              <a:rPr lang="zh-CN" altLang="en-US" sz="2400" dirty="0">
+              <a:t>Readings</a:t>
+            </a:r>
+          </a:p>
+          <a:p>
+            <a:pPr lvl="0">
+              <a:buClr>
+                <a:srgbClr val="3333CC"/>
+              </a:buClr>
+            </a:pPr>
+            <a:r>
+              <a:rPr lang="en-US" altLang="zh-CN" dirty="0">
                 <a:solidFill>
                   <a:srgbClr val="000000"/>
                 </a:solidFill>
               </a:rPr>
-              <a:t> </a:t>
-            </a:r>
-            <a:r>
-              <a:rPr lang="en-US" altLang="zh-CN" sz="2400" dirty="0">
+              <a:t>Assignments</a:t>
+            </a:r>
+          </a:p>
+          <a:p>
+            <a:pPr lvl="0">
+              <a:buClr>
+                <a:srgbClr val="3333CC"/>
+              </a:buClr>
+            </a:pPr>
+            <a:r>
+              <a:rPr lang="en-US" altLang="zh-CN" dirty="0">
                 <a:solidFill>
                   <a:srgbClr val="000000"/>
                 </a:solidFill>
               </a:rPr>
-              <a:t>Hua</a:t>
-            </a:r>
-            <a:r>
-              <a:rPr lang="zh-CN" altLang="en-US" sz="2400" dirty="0">
+              <a:t>…</a:t>
+            </a:r>
+          </a:p>
+          <a:p>
+            <a:pPr lvl="0">
+              <a:buClr>
+                <a:srgbClr val="3333CC"/>
+              </a:buClr>
+            </a:pPr>
+            <a:r>
+              <a:rPr lang="en-US" altLang="zh-CN" dirty="0">
                 <a:solidFill>
                   <a:srgbClr val="000000"/>
                 </a:solidFill>
               </a:rPr>
-              <a:t> </a:t>
-            </a:r>
-            <a:r>
-              <a:rPr lang="en-US" altLang="zh-CN" sz="2400" dirty="0">
+              <a:t>Check</a:t>
+            </a:r>
+            <a:r>
+              <a:rPr lang="zh-CN" altLang="en-US" dirty="0">
                 <a:solidFill>
                   <a:srgbClr val="000000"/>
                 </a:solidFill>
               </a:rPr>
-              <a:t>(PI)</a:t>
-            </a:r>
-          </a:p>
-          <a:p>
-            <a:pPr lvl="1">
-              <a:buClr>
-                <a:srgbClr val="3333CC"/>
-              </a:buClr>
-            </a:pPr>
-            <a:r>
-              <a:rPr lang="en-US" altLang="zh-CN" sz="2400" dirty="0">
+              <a:t> </a:t>
+            </a:r>
+            <a:r>
+              <a:rPr lang="en-US" altLang="zh-CN" dirty="0">
                 <a:solidFill>
                   <a:srgbClr val="000000"/>
                 </a:solidFill>
               </a:rPr>
-              <a:t>Shuang</a:t>
-            </a:r>
-            <a:r>
-              <a:rPr lang="zh-CN" altLang="en-US" sz="2400" dirty="0">
-                <a:solidFill>
-                  <a:srgbClr val="000000"/>
-                </a:solidFill>
-              </a:rPr>
-              <a:t> </a:t>
-            </a:r>
-            <a:r>
-              <a:rPr lang="en-US" altLang="zh-CN" sz="2400" dirty="0">
-                <a:solidFill>
-                  <a:srgbClr val="000000"/>
-                </a:solidFill>
-              </a:rPr>
-              <a:t>Hu</a:t>
-            </a:r>
-            <a:r>
-              <a:rPr lang="zh-CN" altLang="en-US" sz="2400" dirty="0">
-                <a:solidFill>
-                  <a:srgbClr val="000000"/>
-                </a:solidFill>
-              </a:rPr>
-              <a:t> </a:t>
-            </a:r>
-            <a:r>
-              <a:rPr lang="en-US" altLang="zh-CN" sz="2400" dirty="0">
-                <a:solidFill>
-                  <a:srgbClr val="000000"/>
-                </a:solidFill>
-              </a:rPr>
-              <a:t>(TA)</a:t>
-            </a:r>
-            <a:endParaRPr lang="en-US" altLang="zh-CN" sz="2400" dirty="0"/>
-          </a:p>
-          <a:p>
-            <a:pPr lvl="1">
-              <a:buClr>
-                <a:srgbClr val="3333CC"/>
-              </a:buClr>
-            </a:pPr>
-            <a:r>
-              <a:rPr lang="en-US" altLang="zh-CN" sz="2400" dirty="0" err="1">
-                <a:solidFill>
-                  <a:srgbClr val="000000"/>
-                </a:solidFill>
-              </a:rPr>
-              <a:t>Wenlong</a:t>
-            </a:r>
-            <a:r>
-              <a:rPr lang="zh-CN" altLang="en-US" sz="2400" dirty="0">
-                <a:solidFill>
-                  <a:srgbClr val="000000"/>
-                </a:solidFill>
-              </a:rPr>
-              <a:t> </a:t>
-            </a:r>
-            <a:r>
-              <a:rPr lang="en-US" altLang="zh-CN" sz="2400" dirty="0">
-                <a:solidFill>
-                  <a:srgbClr val="000000"/>
-                </a:solidFill>
-              </a:rPr>
-              <a:t>Zheng</a:t>
-            </a:r>
-            <a:r>
-              <a:rPr lang="zh-CN" altLang="en-US" sz="2400" dirty="0">
-                <a:solidFill>
-                  <a:srgbClr val="000000"/>
-                </a:solidFill>
-              </a:rPr>
-              <a:t> </a:t>
-            </a:r>
-            <a:r>
-              <a:rPr lang="en-US" altLang="zh-CN" sz="2400" dirty="0">
-                <a:solidFill>
-                  <a:srgbClr val="000000"/>
-                </a:solidFill>
-              </a:rPr>
-              <a:t>(TA)</a:t>
-            </a:r>
-          </a:p>
-          <a:p>
-            <a:pPr marL="0" indent="0">
-              <a:buNone/>
-            </a:pPr>
+              <a:t>frequently</a:t>
+            </a:r>
             <a:endParaRPr lang="en-US" altLang="zh-CN" sz="2400" dirty="0"/>
           </a:p>
           <a:p>
@@ -5452,10 +5393,10 @@
       </p:grpSpPr>
       <p:sp>
         <p:nvSpPr>
-          <p:cNvPr id="92162" name="Rectangle 2">
-            <a:extLst>
-              <a:ext uri="{FF2B5EF4-FFF2-40B4-BE49-F238E27FC236}">
-                <a16:creationId xmlns:a16="http://schemas.microsoft.com/office/drawing/2014/main" id="{0A5A60BF-10C8-9D43-8EF6-A81549643A73}"/>
+          <p:cNvPr id="84994" name="Rectangle 2">
+            <a:extLst>
+              <a:ext uri="{FF2B5EF4-FFF2-40B4-BE49-F238E27FC236}">
+                <a16:creationId xmlns:a16="http://schemas.microsoft.com/office/drawing/2014/main" id="{06000299-7DAD-6742-BAB5-7AB2D780ABE4}"/>
               </a:ext>
             </a:extLst>
           </p:cNvPr>
@@ -5472,18 +5413,18 @@
           <a:lstStyle/>
           <a:p>
             <a:r>
-              <a:rPr lang="en-US" altLang="zh-CN" dirty="0"/>
-              <a:t>Resources</a:t>
-            </a:r>
-          </a:p>
-        </p:txBody>
-      </p:sp>
-      <p:sp>
-        <p:nvSpPr>
-          <p:cNvPr id="92163" name="Rectangle 3">
-            <a:extLst>
-              <a:ext uri="{FF2B5EF4-FFF2-40B4-BE49-F238E27FC236}">
-                <a16:creationId xmlns:a16="http://schemas.microsoft.com/office/drawing/2014/main" id="{5AA507DA-1851-2647-B0D8-1528A061BAEA}"/>
+              <a:rPr lang="en-US" altLang="zh-CN"/>
+              <a:t>Structure of this course</a:t>
+            </a:r>
+          </a:p>
+        </p:txBody>
+      </p:sp>
+      <p:sp>
+        <p:nvSpPr>
+          <p:cNvPr id="84995" name="Rectangle 3">
+            <a:extLst>
+              <a:ext uri="{FF2B5EF4-FFF2-40B4-BE49-F238E27FC236}">
+                <a16:creationId xmlns:a16="http://schemas.microsoft.com/office/drawing/2014/main" id="{78BA9AF9-453B-2A4E-BC9F-7A33CD04B8F3}"/>
               </a:ext>
             </a:extLst>
           </p:cNvPr>
@@ -5500,225 +5441,138 @@
           <a:lstStyle/>
           <a:p>
             <a:r>
-              <a:rPr lang="en-US" altLang="zh-CN" dirty="0"/>
-              <a:t>Course</a:t>
-            </a:r>
-            <a:r>
-              <a:rPr lang="zh-CN" altLang="en-US" dirty="0"/>
-              <a:t> </a:t>
-            </a:r>
-            <a:r>
-              <a:rPr lang="en-US" altLang="zh-CN" dirty="0"/>
-              <a:t>page:</a:t>
-            </a:r>
-          </a:p>
-          <a:p>
-            <a:pPr marL="0" indent="0">
-              <a:buNone/>
-            </a:pPr>
-            <a:r>
-              <a:rPr lang="en-US" altLang="zh-CN" sz="2400" dirty="0">
-                <a:hlinkClick r:id="rId2"/>
-              </a:rPr>
-              <a:t>https://csslab-ustc.github.io/courses/popl/</a:t>
-            </a:r>
-            <a:endParaRPr lang="en-US" altLang="zh-CN" sz="2400" dirty="0"/>
-          </a:p>
-          <a:p>
-            <a:pPr marL="0" indent="0">
-              <a:buNone/>
-            </a:pPr>
-            <a:endParaRPr lang="en-US" altLang="zh-CN" sz="2400" dirty="0"/>
-          </a:p>
-          <a:p>
-            <a:pPr lvl="0">
-              <a:buClr>
-                <a:srgbClr val="3333CC"/>
-              </a:buClr>
-            </a:pPr>
-            <a:r>
-              <a:rPr lang="en-US" altLang="zh-CN" dirty="0">
+              <a:rPr lang="en-US" altLang="zh-CN" i="1" dirty="0">
                 <a:solidFill>
-                  <a:srgbClr val="000000"/>
+                  <a:srgbClr val="0000FF"/>
                 </a:solidFill>
               </a:rPr>
-              <a:t>Schedule</a:t>
-            </a:r>
-            <a:r>
-              <a:rPr lang="zh-CN" altLang="en-US" dirty="0">
+              <a:t>Lectures</a:t>
+            </a:r>
+          </a:p>
+          <a:p>
+            <a:pPr lvl="1"/>
+            <a:r>
+              <a:rPr lang="en-US" altLang="zh-CN" dirty="0"/>
+              <a:t>On blackboard lecture, few slides</a:t>
+            </a:r>
+          </a:p>
+          <a:p>
+            <a:r>
+              <a:rPr lang="en-US" altLang="zh-CN" i="1" dirty="0">
                 <a:solidFill>
-                  <a:srgbClr val="000000"/>
+                  <a:srgbClr val="0000FF"/>
                 </a:solidFill>
               </a:rPr>
-              <a:t> </a:t>
-            </a:r>
-            <a:endParaRPr lang="en-US" altLang="zh-CN" dirty="0">
-              <a:solidFill>
-                <a:srgbClr val="000000"/>
-              </a:solidFill>
-            </a:endParaRPr>
-          </a:p>
-          <a:p>
-            <a:pPr lvl="0">
-              <a:buClr>
-                <a:srgbClr val="3333CC"/>
-              </a:buClr>
-            </a:pPr>
-            <a:r>
-              <a:rPr lang="en-US" altLang="zh-CN" dirty="0">
+              <a:t>Programming</a:t>
+            </a:r>
+            <a:r>
+              <a:rPr lang="zh-CN" altLang="en-US" i="1" dirty="0">
                 <a:solidFill>
-                  <a:srgbClr val="000000"/>
+                  <a:srgbClr val="0000FF"/>
                 </a:solidFill>
               </a:rPr>
-              <a:t>Readings</a:t>
-            </a:r>
-          </a:p>
-          <a:p>
-            <a:pPr lvl="0">
-              <a:buClr>
-                <a:srgbClr val="3333CC"/>
-              </a:buClr>
-            </a:pPr>
-            <a:r>
-              <a:rPr lang="en-US" altLang="zh-CN" dirty="0">
+              <a:t> </a:t>
+            </a:r>
+            <a:r>
+              <a:rPr lang="en-US" altLang="zh-CN" i="1" dirty="0">
                 <a:solidFill>
-                  <a:srgbClr val="000000"/>
+                  <a:srgbClr val="0000FF"/>
                 </a:solidFill>
               </a:rPr>
-              <a:t>Assignments</a:t>
-            </a:r>
-          </a:p>
-          <a:p>
-            <a:pPr lvl="0">
-              <a:buClr>
-                <a:srgbClr val="3333CC"/>
-              </a:buClr>
-            </a:pPr>
-            <a:r>
-              <a:rPr lang="en-US" altLang="zh-CN" dirty="0">
+              <a:t>assignments</a:t>
+            </a:r>
+          </a:p>
+          <a:p>
+            <a:pPr lvl="1"/>
+            <a:r>
+              <a:rPr lang="en-US" altLang="zh-CN" dirty="0"/>
+              <a:t>8</a:t>
+            </a:r>
+            <a:r>
+              <a:rPr lang="zh-CN" altLang="en-US" dirty="0"/>
+              <a:t> </a:t>
+            </a:r>
+            <a:r>
+              <a:rPr lang="en-US" altLang="zh-CN" dirty="0"/>
+              <a:t>PAs</a:t>
+            </a:r>
+            <a:r>
+              <a:rPr lang="zh-CN" altLang="en-US" dirty="0"/>
+              <a:t> </a:t>
+            </a:r>
+            <a:r>
+              <a:rPr lang="en-US" altLang="zh-CN" dirty="0"/>
+              <a:t>planned</a:t>
+            </a:r>
+            <a:r>
+              <a:rPr lang="zh-CN" altLang="en-US" dirty="0"/>
+              <a:t> </a:t>
+            </a:r>
+            <a:r>
+              <a:rPr lang="en-US" altLang="zh-CN" dirty="0"/>
+              <a:t>(see</a:t>
+            </a:r>
+            <a:r>
+              <a:rPr lang="zh-CN" altLang="en-US" dirty="0"/>
+              <a:t> </a:t>
+            </a:r>
+            <a:r>
+              <a:rPr lang="en-US" altLang="zh-CN" dirty="0"/>
+              <a:t>course</a:t>
+            </a:r>
+            <a:r>
+              <a:rPr lang="zh-CN" altLang="en-US" dirty="0"/>
+              <a:t> </a:t>
+            </a:r>
+            <a:r>
+              <a:rPr lang="en-US" altLang="zh-CN" dirty="0"/>
+              <a:t>website)</a:t>
+            </a:r>
+          </a:p>
+          <a:p>
+            <a:r>
+              <a:rPr lang="en-US" altLang="zh-CN" i="1" dirty="0">
                 <a:solidFill>
-                  <a:srgbClr val="000000"/>
+                  <a:srgbClr val="0000FF"/>
                 </a:solidFill>
               </a:rPr>
-              <a:t>Piazza</a:t>
-            </a:r>
-            <a:r>
-              <a:rPr lang="zh-CN" altLang="en-US" dirty="0">
-                <a:solidFill>
-                  <a:srgbClr val="000000"/>
-                </a:solidFill>
-              </a:rPr>
-              <a:t> </a:t>
-            </a:r>
-            <a:r>
-              <a:rPr lang="en-US" altLang="zh-CN" dirty="0">
-                <a:solidFill>
-                  <a:srgbClr val="000000"/>
-                </a:solidFill>
-              </a:rPr>
+              <a:t>Test</a:t>
+            </a:r>
+          </a:p>
+          <a:p>
+            <a:pPr lvl="1"/>
+            <a:r>
+              <a:rPr lang="en-US" altLang="zh-CN" dirty="0"/>
+              <a:t>Middle</a:t>
+            </a:r>
+            <a:r>
+              <a:rPr lang="zh-CN" altLang="en-US" dirty="0"/>
+              <a:t> </a:t>
+            </a:r>
+            <a:r>
+              <a:rPr lang="en-US" altLang="zh-CN" dirty="0"/>
               <a:t>and</a:t>
             </a:r>
             <a:r>
-              <a:rPr lang="zh-CN" altLang="en-US" dirty="0">
-                <a:solidFill>
-                  <a:srgbClr val="000000"/>
-                </a:solidFill>
-              </a:rPr>
-              <a:t> </a:t>
-            </a:r>
-            <a:r>
-              <a:rPr lang="en-US" altLang="zh-CN" dirty="0">
-                <a:solidFill>
-                  <a:srgbClr val="000000"/>
-                </a:solidFill>
-              </a:rPr>
-              <a:t>QQ</a:t>
-            </a:r>
-            <a:r>
-              <a:rPr lang="zh-CN" altLang="en-US" dirty="0">
-                <a:solidFill>
-                  <a:srgbClr val="000000"/>
-                </a:solidFill>
-              </a:rPr>
-              <a:t> </a:t>
-            </a:r>
-            <a:r>
-              <a:rPr lang="en-US" altLang="zh-CN" dirty="0">
-                <a:solidFill>
-                  <a:srgbClr val="000000"/>
-                </a:solidFill>
-              </a:rPr>
-              <a:t>groups</a:t>
-            </a:r>
-          </a:p>
-          <a:p>
-            <a:pPr lvl="0">
-              <a:buClr>
-                <a:srgbClr val="3333CC"/>
-              </a:buClr>
-            </a:pPr>
-            <a:r>
-              <a:rPr lang="en-US" altLang="zh-CN" dirty="0">
-                <a:solidFill>
-                  <a:srgbClr val="000000"/>
-                </a:solidFill>
-              </a:rPr>
-              <a:t>…</a:t>
-            </a:r>
-          </a:p>
-          <a:p>
-            <a:pPr lvl="0">
-              <a:buClr>
-                <a:srgbClr val="3333CC"/>
-              </a:buClr>
-            </a:pPr>
-            <a:r>
-              <a:rPr lang="en-US" altLang="zh-CN" dirty="0">
-                <a:solidFill>
-                  <a:srgbClr val="000000"/>
-                </a:solidFill>
-              </a:rPr>
-              <a:t>Check</a:t>
-            </a:r>
-            <a:r>
-              <a:rPr lang="zh-CN" altLang="en-US" dirty="0">
-                <a:solidFill>
-                  <a:srgbClr val="000000"/>
-                </a:solidFill>
-              </a:rPr>
-              <a:t> </a:t>
-            </a:r>
-            <a:r>
-              <a:rPr lang="en-US" altLang="zh-CN" dirty="0">
-                <a:solidFill>
-                  <a:srgbClr val="000000"/>
-                </a:solidFill>
-              </a:rPr>
-              <a:t>frequently</a:t>
-            </a:r>
-          </a:p>
-          <a:p>
-            <a:pPr lvl="0">
-              <a:buClr>
-                <a:srgbClr val="3333CC"/>
-              </a:buClr>
-            </a:pPr>
-            <a:endParaRPr lang="en-US" altLang="zh-CN" sz="2400" dirty="0"/>
-          </a:p>
-          <a:p>
-            <a:pPr marL="0" indent="0">
-              <a:buNone/>
-            </a:pPr>
-            <a:endParaRPr lang="en-US" altLang="zh-CN" dirty="0"/>
+              <a:rPr lang="zh-CN" altLang="en-US" dirty="0"/>
+              <a:t> </a:t>
+            </a:r>
+            <a:r>
+              <a:rPr lang="en-US" altLang="zh-CN" dirty="0"/>
+              <a:t>final</a:t>
+            </a:r>
+            <a:r>
+              <a:rPr lang="zh-CN" altLang="en-US" dirty="0"/>
+              <a:t> </a:t>
+            </a:r>
+            <a:r>
+              <a:rPr lang="en-US" altLang="zh-CN" dirty="0"/>
+              <a:t>(Tentative)</a:t>
+            </a:r>
           </a:p>
         </p:txBody>
       </p:sp>
     </p:spTree>
-    <p:extLst>
-      <p:ext uri="{BB962C8B-B14F-4D97-AF65-F5344CB8AC3E}">
-        <p14:creationId xmlns:p14="http://schemas.microsoft.com/office/powerpoint/2010/main" val="3884301960"/>
-      </p:ext>
-    </p:extLst>
   </p:cSld>
   <p:clrMapOvr>
     <a:masterClrMapping/>
@@ -5727,237 +5581,6 @@
 </file>
 
 <file path=ppt/slides/slide12.xml><?xml version="1.0" encoding="utf-8"?>
-<p:sld xmlns:a="http://schemas.openxmlformats.org/drawingml/2006/main" xmlns:r="http://schemas.openxmlformats.org/officeDocument/2006/relationships" xmlns:p="http://schemas.openxmlformats.org/presentationml/2006/main">
-  <p:cSld>
-    <p:spTree>
-      <p:nvGrpSpPr>
-        <p:cNvPr id="1" name=""/>
-        <p:cNvGrpSpPr/>
-        <p:nvPr/>
-      </p:nvGrpSpPr>
-      <p:grpSpPr>
-        <a:xfrm>
-          <a:off x="0" y="0"/>
-          <a:ext cx="0" cy="0"/>
-          <a:chOff x="0" y="0"/>
-          <a:chExt cx="0" cy="0"/>
-        </a:xfrm>
-      </p:grpSpPr>
-      <p:sp>
-        <p:nvSpPr>
-          <p:cNvPr id="84994" name="Rectangle 2">
-            <a:extLst>
-              <a:ext uri="{FF2B5EF4-FFF2-40B4-BE49-F238E27FC236}">
-                <a16:creationId xmlns:a16="http://schemas.microsoft.com/office/drawing/2014/main" id="{06000299-7DAD-6742-BAB5-7AB2D780ABE4}"/>
-              </a:ext>
-            </a:extLst>
-          </p:cNvPr>
-          <p:cNvSpPr>
-            <a:spLocks noGrp="1" noChangeArrowheads="1"/>
-          </p:cNvSpPr>
-          <p:nvPr>
-            <p:ph type="title"/>
-          </p:nvPr>
-        </p:nvSpPr>
-        <p:spPr/>
-        <p:txBody>
-          <a:bodyPr/>
-          <a:lstStyle/>
-          <a:p>
-            <a:r>
-              <a:rPr lang="en-US" altLang="zh-CN"/>
-              <a:t>Structure of this course</a:t>
-            </a:r>
-          </a:p>
-        </p:txBody>
-      </p:sp>
-      <p:sp>
-        <p:nvSpPr>
-          <p:cNvPr id="84995" name="Rectangle 3">
-            <a:extLst>
-              <a:ext uri="{FF2B5EF4-FFF2-40B4-BE49-F238E27FC236}">
-                <a16:creationId xmlns:a16="http://schemas.microsoft.com/office/drawing/2014/main" id="{78BA9AF9-453B-2A4E-BC9F-7A33CD04B8F3}"/>
-              </a:ext>
-            </a:extLst>
-          </p:cNvPr>
-          <p:cNvSpPr>
-            <a:spLocks noGrp="1" noChangeArrowheads="1"/>
-          </p:cNvSpPr>
-          <p:nvPr>
-            <p:ph type="body" idx="1"/>
-          </p:nvPr>
-        </p:nvSpPr>
-        <p:spPr/>
-        <p:txBody>
-          <a:bodyPr/>
-          <a:lstStyle/>
-          <a:p>
-            <a:r>
-              <a:rPr lang="en-US" altLang="zh-CN" i="1" dirty="0">
-                <a:solidFill>
-                  <a:srgbClr val="0000FF"/>
-                </a:solidFill>
-              </a:rPr>
-              <a:t>Lectures</a:t>
-            </a:r>
-          </a:p>
-          <a:p>
-            <a:pPr lvl="1"/>
-            <a:r>
-              <a:rPr lang="en-US" altLang="zh-CN" dirty="0"/>
-              <a:t>On blackboard lecture, few slides</a:t>
-            </a:r>
-          </a:p>
-          <a:p>
-            <a:r>
-              <a:rPr lang="en-US" altLang="zh-CN" i="1" dirty="0">
-                <a:solidFill>
-                  <a:srgbClr val="0000FF"/>
-                </a:solidFill>
-              </a:rPr>
-              <a:t>Assignments</a:t>
-            </a:r>
-          </a:p>
-          <a:p>
-            <a:pPr lvl="1"/>
-            <a:r>
-              <a:rPr lang="en-US" altLang="zh-CN" dirty="0"/>
-              <a:t>On</a:t>
-            </a:r>
-            <a:r>
-              <a:rPr lang="zh-CN" altLang="en-US" dirty="0"/>
-              <a:t> </a:t>
-            </a:r>
-            <a:r>
-              <a:rPr lang="en-US" altLang="zh-CN" dirty="0"/>
-              <a:t>paper</a:t>
-            </a:r>
-          </a:p>
-          <a:p>
-            <a:r>
-              <a:rPr lang="en-US" altLang="zh-CN" i="1" dirty="0">
-                <a:solidFill>
-                  <a:srgbClr val="0000FF"/>
-                </a:solidFill>
-              </a:rPr>
-              <a:t>Programming</a:t>
-            </a:r>
-            <a:r>
-              <a:rPr lang="zh-CN" altLang="en-US" i="1" dirty="0">
-                <a:solidFill>
-                  <a:srgbClr val="0000FF"/>
-                </a:solidFill>
-              </a:rPr>
-              <a:t> </a:t>
-            </a:r>
-            <a:r>
-              <a:rPr lang="en-US" altLang="zh-CN" i="1" dirty="0">
-                <a:solidFill>
-                  <a:srgbClr val="0000FF"/>
-                </a:solidFill>
-              </a:rPr>
-              <a:t>assignments</a:t>
-            </a:r>
-          </a:p>
-          <a:p>
-            <a:pPr lvl="1"/>
-            <a:r>
-              <a:rPr lang="en-US" altLang="zh-CN" dirty="0"/>
-              <a:t>10</a:t>
-            </a:r>
-            <a:r>
-              <a:rPr lang="zh-CN" altLang="en-US" dirty="0"/>
-              <a:t> </a:t>
-            </a:r>
-            <a:r>
-              <a:rPr lang="en-US" altLang="zh-CN" dirty="0"/>
-              <a:t>PAs</a:t>
-            </a:r>
-            <a:r>
-              <a:rPr lang="zh-CN" altLang="en-US" dirty="0"/>
-              <a:t> </a:t>
-            </a:r>
-            <a:r>
-              <a:rPr lang="en-US" altLang="zh-CN" dirty="0"/>
-              <a:t>planned</a:t>
-            </a:r>
-            <a:r>
-              <a:rPr lang="zh-CN" altLang="en-US" dirty="0"/>
-              <a:t> </a:t>
-            </a:r>
-            <a:r>
-              <a:rPr lang="en-US" altLang="zh-CN" dirty="0"/>
-              <a:t>(see</a:t>
-            </a:r>
-            <a:r>
-              <a:rPr lang="zh-CN" altLang="en-US" dirty="0"/>
-              <a:t> </a:t>
-            </a:r>
-            <a:r>
-              <a:rPr lang="en-US" altLang="zh-CN" dirty="0"/>
-              <a:t>course</a:t>
-            </a:r>
-            <a:r>
-              <a:rPr lang="zh-CN" altLang="en-US" dirty="0"/>
-              <a:t> </a:t>
-            </a:r>
-            <a:r>
-              <a:rPr lang="en-US" altLang="zh-CN" dirty="0"/>
-              <a:t>website)</a:t>
-            </a:r>
-          </a:p>
-          <a:p>
-            <a:r>
-              <a:rPr lang="en-US" altLang="zh-CN" i="1" dirty="0">
-                <a:solidFill>
-                  <a:srgbClr val="0000FF"/>
-                </a:solidFill>
-              </a:rPr>
-              <a:t>Test</a:t>
-            </a:r>
-          </a:p>
-          <a:p>
-            <a:pPr lvl="1"/>
-            <a:r>
-              <a:rPr lang="en-US" altLang="zh-CN" dirty="0"/>
-              <a:t>Middle</a:t>
-            </a:r>
-            <a:r>
-              <a:rPr lang="zh-CN" altLang="en-US" dirty="0"/>
-              <a:t> </a:t>
-            </a:r>
-            <a:r>
-              <a:rPr lang="en-US" altLang="zh-CN" dirty="0"/>
-              <a:t>and</a:t>
-            </a:r>
-            <a:r>
-              <a:rPr lang="zh-CN" altLang="en-US" dirty="0"/>
-              <a:t> </a:t>
-            </a:r>
-            <a:r>
-              <a:rPr lang="en-US" altLang="zh-CN" dirty="0"/>
-              <a:t>final</a:t>
-            </a:r>
-            <a:r>
-              <a:rPr lang="zh-CN" altLang="en-US" dirty="0"/>
-              <a:t> </a:t>
-            </a:r>
-            <a:r>
-              <a:rPr lang="en-US" altLang="zh-CN" dirty="0"/>
-              <a:t>(Tentative)</a:t>
-            </a:r>
-          </a:p>
-        </p:txBody>
-      </p:sp>
-    </p:spTree>
-  </p:cSld>
-  <p:clrMapOvr>
-    <a:masterClrMapping/>
-  </p:clrMapOvr>
-</p:sld>
-</file>
-
-<file path=ppt/slides/slide13.xml><?xml version="1.0" encoding="utf-8"?>
 <p:sld xmlns:a="http://schemas.openxmlformats.org/drawingml/2006/main" xmlns:r="http://schemas.openxmlformats.org/officeDocument/2006/relationships" xmlns:p="http://schemas.openxmlformats.org/presentationml/2006/main">
   <p:cSld>
     <p:spTree>
@@ -6182,6 +5805,280 @@
 </p:sld>
 </file>
 
+<file path=ppt/slides/slide13.xml><?xml version="1.0" encoding="utf-8"?>
+<p:sld xmlns:a="http://schemas.openxmlformats.org/drawingml/2006/main" xmlns:r="http://schemas.openxmlformats.org/officeDocument/2006/relationships" xmlns:p="http://schemas.openxmlformats.org/presentationml/2006/main">
+  <p:cSld>
+    <p:spTree>
+      <p:nvGrpSpPr>
+        <p:cNvPr id="1" name=""/>
+        <p:cNvGrpSpPr/>
+        <p:nvPr/>
+      </p:nvGrpSpPr>
+      <p:grpSpPr>
+        <a:xfrm>
+          <a:off x="0" y="0"/>
+          <a:ext cx="0" cy="0"/>
+          <a:chOff x="0" y="0"/>
+          <a:chExt cx="0" cy="0"/>
+        </a:xfrm>
+      </p:grpSpPr>
+      <p:sp>
+        <p:nvSpPr>
+          <p:cNvPr id="84994" name="Rectangle 2">
+            <a:extLst>
+              <a:ext uri="{FF2B5EF4-FFF2-40B4-BE49-F238E27FC236}">
+                <a16:creationId xmlns:a16="http://schemas.microsoft.com/office/drawing/2014/main" id="{06000299-7DAD-6742-BAB5-7AB2D780ABE4}"/>
+              </a:ext>
+            </a:extLst>
+          </p:cNvPr>
+          <p:cNvSpPr>
+            <a:spLocks noGrp="1" noChangeArrowheads="1"/>
+          </p:cNvSpPr>
+          <p:nvPr>
+            <p:ph type="title"/>
+          </p:nvPr>
+        </p:nvSpPr>
+        <p:spPr/>
+        <p:txBody>
+          <a:bodyPr/>
+          <a:lstStyle/>
+          <a:p>
+            <a:r>
+              <a:rPr lang="en-US" altLang="zh-CN" dirty="0"/>
+              <a:t>Programming</a:t>
+            </a:r>
+            <a:r>
+              <a:rPr lang="zh-CN" altLang="en-US" dirty="0"/>
+              <a:t> </a:t>
+            </a:r>
+            <a:r>
+              <a:rPr lang="en-US" altLang="zh-CN" dirty="0"/>
+              <a:t>assignments</a:t>
+            </a:r>
+          </a:p>
+        </p:txBody>
+      </p:sp>
+      <p:sp>
+        <p:nvSpPr>
+          <p:cNvPr id="84995" name="Rectangle 3">
+            <a:extLst>
+              <a:ext uri="{FF2B5EF4-FFF2-40B4-BE49-F238E27FC236}">
+                <a16:creationId xmlns:a16="http://schemas.microsoft.com/office/drawing/2014/main" id="{78BA9AF9-453B-2A4E-BC9F-7A33CD04B8F3}"/>
+              </a:ext>
+            </a:extLst>
+          </p:cNvPr>
+          <p:cNvSpPr>
+            <a:spLocks noGrp="1" noChangeArrowheads="1"/>
+          </p:cNvSpPr>
+          <p:nvPr>
+            <p:ph type="body" idx="1"/>
+          </p:nvPr>
+        </p:nvSpPr>
+        <p:spPr/>
+        <p:txBody>
+          <a:bodyPr/>
+          <a:lstStyle/>
+          <a:p>
+            <a:r>
+              <a:rPr lang="en-US" altLang="zh-CN" dirty="0">
+                <a:solidFill>
+                  <a:srgbClr val="0000FF"/>
+                </a:solidFill>
+              </a:rPr>
+              <a:t>Language</a:t>
+            </a:r>
+            <a:r>
+              <a:rPr lang="zh-CN" altLang="en-US" dirty="0">
+                <a:solidFill>
+                  <a:srgbClr val="0000FF"/>
+                </a:solidFill>
+              </a:rPr>
+              <a:t> </a:t>
+            </a:r>
+            <a:r>
+              <a:rPr lang="en-US" altLang="zh-CN" dirty="0">
+                <a:solidFill>
+                  <a:srgbClr val="0000FF"/>
+                </a:solidFill>
+              </a:rPr>
+              <a:t>used:</a:t>
+            </a:r>
+            <a:r>
+              <a:rPr lang="zh-CN" altLang="en-US" dirty="0">
+                <a:solidFill>
+                  <a:srgbClr val="0000FF"/>
+                </a:solidFill>
+              </a:rPr>
+              <a:t> </a:t>
+            </a:r>
+            <a:r>
+              <a:rPr lang="en-US" altLang="zh-CN" dirty="0">
+                <a:solidFill>
+                  <a:srgbClr val="0000FF"/>
+                </a:solidFill>
+              </a:rPr>
+              <a:t>Cuda</a:t>
+            </a:r>
+          </a:p>
+          <a:p>
+            <a:pPr lvl="1"/>
+            <a:r>
+              <a:rPr lang="en-US" altLang="zh-CN" dirty="0"/>
+              <a:t>A</a:t>
+            </a:r>
+            <a:r>
+              <a:rPr lang="zh-CN" altLang="en-US" dirty="0"/>
+              <a:t> </a:t>
+            </a:r>
+            <a:r>
+              <a:rPr lang="en-US" altLang="zh-CN" dirty="0"/>
+              <a:t>production</a:t>
+            </a:r>
+            <a:r>
+              <a:rPr lang="zh-CN" altLang="en-US" dirty="0"/>
+              <a:t> </a:t>
+            </a:r>
+            <a:r>
+              <a:rPr lang="en-US" altLang="zh-CN" dirty="0"/>
+              <a:t>quality</a:t>
+            </a:r>
+            <a:r>
+              <a:rPr lang="zh-CN" altLang="en-US" dirty="0"/>
+              <a:t> </a:t>
+            </a:r>
+            <a:r>
+              <a:rPr lang="en-US" altLang="zh-CN" dirty="0"/>
+              <a:t>functional</a:t>
+            </a:r>
+            <a:r>
+              <a:rPr lang="zh-CN" altLang="en-US" dirty="0"/>
+              <a:t> </a:t>
+            </a:r>
+            <a:r>
+              <a:rPr lang="en-US" altLang="zh-CN" dirty="0"/>
+              <a:t>language</a:t>
+            </a:r>
+          </a:p>
+          <a:p>
+            <a:r>
+              <a:rPr lang="en-US" altLang="zh-CN" dirty="0">
+                <a:solidFill>
+                  <a:srgbClr val="0000FF"/>
+                </a:solidFill>
+              </a:rPr>
+              <a:t>Assignments</a:t>
+            </a:r>
+          </a:p>
+          <a:p>
+            <a:pPr lvl="1"/>
+            <a:r>
+              <a:rPr lang="en-US" altLang="zh-CN" dirty="0">
+                <a:solidFill>
+                  <a:srgbClr val="0000FF"/>
+                </a:solidFill>
+              </a:rPr>
+              <a:t>Arithmetic</a:t>
+            </a:r>
+          </a:p>
+          <a:p>
+            <a:pPr lvl="1"/>
+            <a:r>
+              <a:rPr lang="en-US" altLang="zh-CN" dirty="0">
+                <a:solidFill>
+                  <a:srgbClr val="0000FF"/>
+                </a:solidFill>
+              </a:rPr>
+              <a:t>Lambda</a:t>
+            </a:r>
+            <a:r>
+              <a:rPr lang="zh-CN" altLang="en-US" dirty="0">
+                <a:solidFill>
+                  <a:srgbClr val="0000FF"/>
+                </a:solidFill>
+              </a:rPr>
+              <a:t> </a:t>
+            </a:r>
+            <a:r>
+              <a:rPr lang="en-US" altLang="zh-CN" dirty="0">
+                <a:solidFill>
+                  <a:srgbClr val="0000FF"/>
+                </a:solidFill>
+              </a:rPr>
+              <a:t>calculus</a:t>
+            </a:r>
+          </a:p>
+          <a:p>
+            <a:pPr lvl="1"/>
+            <a:r>
+              <a:rPr lang="en-US" altLang="zh-CN" dirty="0">
+                <a:solidFill>
+                  <a:srgbClr val="0000FF"/>
+                </a:solidFill>
+              </a:rPr>
+              <a:t>Polymorphism</a:t>
+            </a:r>
+          </a:p>
+          <a:p>
+            <a:pPr lvl="1"/>
+            <a:r>
+              <a:rPr lang="en-US" altLang="zh-CN" dirty="0">
+                <a:solidFill>
+                  <a:srgbClr val="0000FF"/>
+                </a:solidFill>
+              </a:rPr>
+              <a:t>Type</a:t>
+            </a:r>
+            <a:r>
+              <a:rPr lang="zh-CN" altLang="en-US" dirty="0">
+                <a:solidFill>
+                  <a:srgbClr val="0000FF"/>
+                </a:solidFill>
+              </a:rPr>
+              <a:t> </a:t>
+            </a:r>
+            <a:r>
+              <a:rPr lang="en-US" altLang="zh-CN" dirty="0">
+                <a:solidFill>
+                  <a:srgbClr val="0000FF"/>
+                </a:solidFill>
+              </a:rPr>
+              <a:t>inference</a:t>
+            </a:r>
+          </a:p>
+          <a:p>
+            <a:pPr lvl="1"/>
+            <a:r>
+              <a:rPr lang="en-US" altLang="zh-CN" dirty="0">
+                <a:solidFill>
+                  <a:srgbClr val="0000FF"/>
+                </a:solidFill>
+              </a:rPr>
+              <a:t>…</a:t>
+            </a:r>
+          </a:p>
+          <a:p>
+            <a:pPr lvl="1"/>
+            <a:endParaRPr lang="en-US" altLang="zh-CN" i="1" dirty="0">
+              <a:solidFill>
+                <a:srgbClr val="0000FF"/>
+              </a:solidFill>
+            </a:endParaRPr>
+          </a:p>
+        </p:txBody>
+      </p:sp>
+    </p:spTree>
+    <p:extLst>
+      <p:ext uri="{BB962C8B-B14F-4D97-AF65-F5344CB8AC3E}">
+        <p14:creationId xmlns:p14="http://schemas.microsoft.com/office/powerpoint/2010/main" val="48302392"/>
+      </p:ext>
+    </p:extLst>
+  </p:cSld>
+  <p:clrMapOvr>
+    <a:masterClrMapping/>
+  </p:clrMapOvr>
+</p:sld>
+</file>
+
 <file path=ppt/slides/slide14.xml><?xml version="1.0" encoding="utf-8"?>
 <p:sld xmlns:a="http://schemas.openxmlformats.org/drawingml/2006/main" xmlns:r="http://schemas.openxmlformats.org/officeDocument/2006/relationships" xmlns:p="http://schemas.openxmlformats.org/presentationml/2006/main">
   <p:cSld>
@@ -6201,10 +6098,10 @@
       </p:grpSpPr>
       <p:sp>
         <p:nvSpPr>
-          <p:cNvPr id="84994" name="Rectangle 2">
-            <a:extLst>
-              <a:ext uri="{FF2B5EF4-FFF2-40B4-BE49-F238E27FC236}">
-                <a16:creationId xmlns:a16="http://schemas.microsoft.com/office/drawing/2014/main" id="{06000299-7DAD-6742-BAB5-7AB2D780ABE4}"/>
+          <p:cNvPr id="92162" name="Rectangle 2">
+            <a:extLst>
+              <a:ext uri="{FF2B5EF4-FFF2-40B4-BE49-F238E27FC236}">
+                <a16:creationId xmlns:a16="http://schemas.microsoft.com/office/drawing/2014/main" id="{0A5A60BF-10C8-9D43-8EF6-A81549643A73}"/>
               </a:ext>
             </a:extLst>
           </p:cNvPr>
@@ -6222,25 +6119,25 @@
           <a:p>
             <a:r>
               <a:rPr lang="en-US" altLang="zh-CN" dirty="0"/>
-              <a:t>Programming</a:t>
-            </a:r>
-            <a:r>
-              <a:rPr lang="zh-CN" altLang="en-US" dirty="0"/>
-              <a:t> </a:t>
-            </a:r>
-            <a:r>
-              <a:rPr lang="en-US" altLang="zh-CN" dirty="0"/>
-              <a:t>assignments</a:t>
-            </a:r>
-          </a:p>
-        </p:txBody>
-      </p:sp>
-      <p:sp>
-        <p:nvSpPr>
-          <p:cNvPr id="84995" name="Rectangle 3">
-            <a:extLst>
-              <a:ext uri="{FF2B5EF4-FFF2-40B4-BE49-F238E27FC236}">
-                <a16:creationId xmlns:a16="http://schemas.microsoft.com/office/drawing/2014/main" id="{78BA9AF9-453B-2A4E-BC9F-7A33CD04B8F3}"/>
+              <a:t>Grading</a:t>
+            </a:r>
+            <a:r>
+              <a:rPr lang="zh-CN" altLang="en-US" dirty="0"/>
+              <a:t> </a:t>
+            </a:r>
+            <a:r>
+              <a:rPr lang="en-US" altLang="zh-CN" dirty="0"/>
+              <a:t>(Tentative)</a:t>
+            </a:r>
+          </a:p>
+        </p:txBody>
+      </p:sp>
+      <p:sp>
+        <p:nvSpPr>
+          <p:cNvPr id="92163" name="Rectangle 3">
+            <a:extLst>
+              <a:ext uri="{FF2B5EF4-FFF2-40B4-BE49-F238E27FC236}">
+                <a16:creationId xmlns:a16="http://schemas.microsoft.com/office/drawing/2014/main" id="{5AA507DA-1851-2647-B0D8-1528A061BAEA}"/>
               </a:ext>
             </a:extLst>
           </p:cNvPr>
@@ -6257,233 +6154,36 @@
           <a:lstStyle/>
           <a:p>
             <a:r>
-              <a:rPr lang="en-US" altLang="zh-CN" dirty="0">
-                <a:solidFill>
-                  <a:srgbClr val="0000FF"/>
-                </a:solidFill>
-              </a:rPr>
-              <a:t>Language</a:t>
-            </a:r>
-            <a:r>
-              <a:rPr lang="zh-CN" altLang="en-US" dirty="0">
-                <a:solidFill>
-                  <a:srgbClr val="0000FF"/>
-                </a:solidFill>
-              </a:rPr>
-              <a:t> </a:t>
-            </a:r>
-            <a:r>
-              <a:rPr lang="en-US" altLang="zh-CN" dirty="0">
-                <a:solidFill>
-                  <a:srgbClr val="0000FF"/>
-                </a:solidFill>
-              </a:rPr>
-              <a:t>used:</a:t>
-            </a:r>
-            <a:r>
-              <a:rPr lang="zh-CN" altLang="en-US" dirty="0">
-                <a:solidFill>
-                  <a:srgbClr val="0000FF"/>
-                </a:solidFill>
-              </a:rPr>
-              <a:t> </a:t>
-            </a:r>
-            <a:r>
-              <a:rPr lang="en-US" altLang="zh-CN" dirty="0" err="1">
-                <a:solidFill>
-                  <a:srgbClr val="0000FF"/>
-                </a:solidFill>
-              </a:rPr>
-              <a:t>OCaml</a:t>
-            </a:r>
-            <a:endParaRPr lang="en-US" altLang="zh-CN" dirty="0">
-              <a:solidFill>
-                <a:srgbClr val="0000FF"/>
-              </a:solidFill>
-            </a:endParaRPr>
-          </a:p>
-          <a:p>
-            <a:pPr lvl="1"/>
-            <a:r>
-              <a:rPr lang="en-US" altLang="zh-CN" dirty="0"/>
-              <a:t>A</a:t>
-            </a:r>
-            <a:r>
-              <a:rPr lang="zh-CN" altLang="en-US" dirty="0"/>
-              <a:t> </a:t>
-            </a:r>
-            <a:r>
-              <a:rPr lang="en-US" altLang="zh-CN" dirty="0"/>
-              <a:t>production</a:t>
-            </a:r>
-            <a:r>
-              <a:rPr lang="zh-CN" altLang="en-US" dirty="0"/>
-              <a:t> </a:t>
-            </a:r>
-            <a:r>
-              <a:rPr lang="en-US" altLang="zh-CN" dirty="0"/>
-              <a:t>quality</a:t>
-            </a:r>
-            <a:r>
-              <a:rPr lang="zh-CN" altLang="en-US" dirty="0"/>
-              <a:t> </a:t>
-            </a:r>
-            <a:r>
-              <a:rPr lang="en-US" altLang="zh-CN" dirty="0"/>
-              <a:t>functional</a:t>
-            </a:r>
-            <a:r>
-              <a:rPr lang="zh-CN" altLang="en-US" dirty="0"/>
-              <a:t> </a:t>
-            </a:r>
-            <a:r>
-              <a:rPr lang="en-US" altLang="zh-CN" dirty="0"/>
-              <a:t>language</a:t>
-            </a:r>
-          </a:p>
-          <a:p>
-            <a:r>
-              <a:rPr lang="en-US" altLang="zh-CN" dirty="0">
-                <a:solidFill>
-                  <a:srgbClr val="0000FF"/>
-                </a:solidFill>
-              </a:rPr>
-              <a:t>Assignments</a:t>
-            </a:r>
-          </a:p>
-          <a:p>
-            <a:pPr lvl="1"/>
-            <a:r>
-              <a:rPr lang="en-US" altLang="zh-CN" dirty="0">
-                <a:solidFill>
-                  <a:srgbClr val="0000FF"/>
-                </a:solidFill>
-              </a:rPr>
-              <a:t>Arithmetic</a:t>
-            </a:r>
-          </a:p>
-          <a:p>
-            <a:pPr lvl="1"/>
-            <a:r>
-              <a:rPr lang="en-US" altLang="zh-CN" dirty="0">
-                <a:solidFill>
-                  <a:srgbClr val="0000FF"/>
-                </a:solidFill>
-              </a:rPr>
-              <a:t>Lambda</a:t>
-            </a:r>
-            <a:r>
-              <a:rPr lang="zh-CN" altLang="en-US" dirty="0">
-                <a:solidFill>
-                  <a:srgbClr val="0000FF"/>
-                </a:solidFill>
-              </a:rPr>
-              <a:t> </a:t>
-            </a:r>
-            <a:r>
-              <a:rPr lang="en-US" altLang="zh-CN" dirty="0">
-                <a:solidFill>
-                  <a:srgbClr val="0000FF"/>
-                </a:solidFill>
-              </a:rPr>
-              <a:t>calculus</a:t>
-            </a:r>
-          </a:p>
-          <a:p>
-            <a:pPr lvl="1"/>
-            <a:r>
-              <a:rPr lang="en-US" altLang="zh-CN" dirty="0">
-                <a:solidFill>
-                  <a:srgbClr val="0000FF"/>
-                </a:solidFill>
-              </a:rPr>
-              <a:t>Polymorphism</a:t>
-            </a:r>
-          </a:p>
-          <a:p>
-            <a:pPr lvl="1"/>
-            <a:r>
-              <a:rPr lang="en-US" altLang="zh-CN" dirty="0">
-                <a:solidFill>
-                  <a:srgbClr val="0000FF"/>
-                </a:solidFill>
-              </a:rPr>
-              <a:t>Type</a:t>
-            </a:r>
-            <a:r>
-              <a:rPr lang="zh-CN" altLang="en-US" dirty="0">
-                <a:solidFill>
-                  <a:srgbClr val="0000FF"/>
-                </a:solidFill>
-              </a:rPr>
-              <a:t> </a:t>
-            </a:r>
-            <a:r>
-              <a:rPr lang="en-US" altLang="zh-CN" dirty="0">
-                <a:solidFill>
-                  <a:srgbClr val="0000FF"/>
-                </a:solidFill>
-              </a:rPr>
-              <a:t>inference</a:t>
-            </a:r>
-          </a:p>
-          <a:p>
-            <a:pPr lvl="1"/>
-            <a:r>
-              <a:rPr lang="en-US" altLang="zh-CN" dirty="0">
-                <a:solidFill>
-                  <a:srgbClr val="0000FF"/>
-                </a:solidFill>
-              </a:rPr>
-              <a:t>…</a:t>
-            </a:r>
-          </a:p>
-          <a:p>
-            <a:pPr lvl="1"/>
-            <a:endParaRPr lang="en-US" altLang="zh-CN" i="1" dirty="0">
-              <a:solidFill>
-                <a:srgbClr val="0000FF"/>
-              </a:solidFill>
-            </a:endParaRPr>
-          </a:p>
-        </p:txBody>
-      </p:sp>
-      <p:pic>
-        <p:nvPicPr>
-          <p:cNvPr id="5" name="图片 4">
-            <a:extLst>
-              <a:ext uri="{FF2B5EF4-FFF2-40B4-BE49-F238E27FC236}">
-                <a16:creationId xmlns:a16="http://schemas.microsoft.com/office/drawing/2014/main" id="{EAD76E97-1789-2C4A-ABDC-CBE79AD76727}"/>
-              </a:ext>
-            </a:extLst>
-          </p:cNvPr>
-          <p:cNvPicPr>
-            <a:picLocks noChangeAspect="1"/>
-          </p:cNvPicPr>
-          <p:nvPr/>
-        </p:nvPicPr>
-        <p:blipFill>
-          <a:blip r:embed="rId2"/>
-          <a:stretch>
-            <a:fillRect/>
-          </a:stretch>
-        </p:blipFill>
-        <p:spPr>
-          <a:xfrm>
-            <a:off x="5435600" y="3512762"/>
-            <a:ext cx="3022600" cy="830638"/>
-          </a:xfrm>
-          <a:prstGeom prst="rect">
-            <a:avLst/>
-          </a:prstGeom>
-        </p:spPr>
-      </p:pic>
+              <a:rPr lang="en-US" altLang="zh-CN" dirty="0"/>
+              <a:t>50% for assignment</a:t>
+            </a:r>
+            <a:r>
+              <a:rPr lang="zh-CN" altLang="en-US" dirty="0"/>
+              <a:t> </a:t>
+            </a:r>
+            <a:r>
+              <a:rPr lang="en-US" altLang="zh-CN" dirty="0"/>
+              <a:t>and</a:t>
+            </a:r>
+            <a:r>
+              <a:rPr lang="zh-CN" altLang="en-US" dirty="0"/>
+              <a:t> </a:t>
+            </a:r>
+            <a:r>
+              <a:rPr lang="en-US" altLang="zh-CN"/>
+              <a:t>project</a:t>
+            </a:r>
+            <a:endParaRPr lang="en-US" altLang="zh-CN" dirty="0"/>
+          </a:p>
+          <a:p>
+            <a:r>
+              <a:rPr lang="en-US" altLang="zh-CN" dirty="0"/>
+              <a:t>50% for final test</a:t>
+            </a:r>
+          </a:p>
+        </p:txBody>
+      </p:sp>
     </p:spTree>
-    <p:extLst>
-      <p:ext uri="{BB962C8B-B14F-4D97-AF65-F5344CB8AC3E}">
-        <p14:creationId xmlns:p14="http://schemas.microsoft.com/office/powerpoint/2010/main" val="48302392"/>
-      </p:ext>
-    </p:extLst>
   </p:cSld>
   <p:clrMapOvr>
     <a:masterClrMapping/>
@@ -6510,10 +6210,10 @@
       </p:grpSpPr>
       <p:sp>
         <p:nvSpPr>
-          <p:cNvPr id="92162" name="Rectangle 2">
-            <a:extLst>
-              <a:ext uri="{FF2B5EF4-FFF2-40B4-BE49-F238E27FC236}">
-                <a16:creationId xmlns:a16="http://schemas.microsoft.com/office/drawing/2014/main" id="{0A5A60BF-10C8-9D43-8EF6-A81549643A73}"/>
+          <p:cNvPr id="100354" name="Rectangle 2">
+            <a:extLst>
+              <a:ext uri="{FF2B5EF4-FFF2-40B4-BE49-F238E27FC236}">
+                <a16:creationId xmlns:a16="http://schemas.microsoft.com/office/drawing/2014/main" id="{E093C3C5-239C-9043-9F58-737DAA205DD9}"/>
               </a:ext>
             </a:extLst>
           </p:cNvPr>
@@ -6530,26 +6230,18 @@
           <a:lstStyle/>
           <a:p>
             <a:r>
-              <a:rPr lang="en-US" altLang="zh-CN" dirty="0"/>
-              <a:t>Grading</a:t>
-            </a:r>
-            <a:r>
-              <a:rPr lang="zh-CN" altLang="en-US" dirty="0"/>
-              <a:t> </a:t>
-            </a:r>
-            <a:r>
-              <a:rPr lang="en-US" altLang="zh-CN" dirty="0"/>
-              <a:t>(Tentative)</a:t>
-            </a:r>
-          </a:p>
-        </p:txBody>
-      </p:sp>
-      <p:sp>
-        <p:nvSpPr>
-          <p:cNvPr id="92163" name="Rectangle 3">
-            <a:extLst>
-              <a:ext uri="{FF2B5EF4-FFF2-40B4-BE49-F238E27FC236}">
-                <a16:creationId xmlns:a16="http://schemas.microsoft.com/office/drawing/2014/main" id="{5AA507DA-1851-2647-B0D8-1528A061BAEA}"/>
+              <a:rPr lang="en-US" altLang="zh-CN"/>
+              <a:t>Summary</a:t>
+            </a:r>
+          </a:p>
+        </p:txBody>
+      </p:sp>
+      <p:sp>
+        <p:nvSpPr>
+          <p:cNvPr id="100355" name="Rectangle 3">
+            <a:extLst>
+              <a:ext uri="{FF2B5EF4-FFF2-40B4-BE49-F238E27FC236}">
+                <a16:creationId xmlns:a16="http://schemas.microsoft.com/office/drawing/2014/main" id="{D7D785B2-94A1-C74E-AF7E-48DFC6F337EC}"/>
               </a:ext>
             </a:extLst>
           </p:cNvPr>
@@ -6567,7 +6259,84 @@
           <a:p>
             <a:r>
               <a:rPr lang="en-US" altLang="zh-CN" dirty="0"/>
-              <a:t>50% for assignment</a:t>
+              <a:t>This is a practice-oriented course</a:t>
+            </a:r>
+          </a:p>
+          <a:p>
+            <a:r>
+              <a:rPr lang="en-US" altLang="zh-CN" dirty="0"/>
+              <a:t>Have</a:t>
+            </a:r>
+            <a:r>
+              <a:rPr lang="zh-CN" altLang="en-US" dirty="0"/>
+              <a:t> </a:t>
+            </a:r>
+            <a:r>
+              <a:rPr lang="en-US" altLang="zh-CN" dirty="0"/>
+              <a:t>a</a:t>
+            </a:r>
+            <a:r>
+              <a:rPr lang="zh-CN" altLang="en-US" dirty="0"/>
+              <a:t> </a:t>
+            </a:r>
+            <a:r>
+              <a:rPr lang="en-US" altLang="zh-CN" dirty="0"/>
+              <a:t>thorough</a:t>
+            </a:r>
+            <a:r>
+              <a:rPr lang="zh-CN" altLang="en-US" dirty="0"/>
+              <a:t> </a:t>
+            </a:r>
+            <a:r>
+              <a:rPr lang="en-US" altLang="zh-CN" dirty="0"/>
+              <a:t>understanding</a:t>
+            </a:r>
+            <a:r>
+              <a:rPr lang="zh-CN" altLang="en-US" dirty="0"/>
+              <a:t> </a:t>
+            </a:r>
+            <a:r>
+              <a:rPr lang="en-US" altLang="zh-CN" dirty="0"/>
+              <a:t>of</a:t>
+            </a:r>
+            <a:r>
+              <a:rPr lang="zh-CN" altLang="en-US" dirty="0"/>
+              <a:t> </a:t>
+            </a:r>
+            <a:r>
+              <a:rPr lang="en-US" altLang="zh-CN" dirty="0"/>
+              <a:t>principles</a:t>
+            </a:r>
+            <a:r>
+              <a:rPr lang="zh-CN" altLang="en-US" dirty="0"/>
+              <a:t> </a:t>
+            </a:r>
+            <a:r>
+              <a:rPr lang="en-US" altLang="zh-CN" dirty="0"/>
+              <a:t>for</a:t>
+            </a:r>
+            <a:r>
+              <a:rPr lang="zh-CN" altLang="en-US" dirty="0"/>
+              <a:t> </a:t>
+            </a:r>
+            <a:r>
+              <a:rPr lang="en-US" altLang="zh-CN" dirty="0"/>
+              <a:t>programming</a:t>
+            </a:r>
+            <a:r>
+              <a:rPr lang="zh-CN" altLang="en-US" dirty="0"/>
+              <a:t> </a:t>
+            </a:r>
+            <a:r>
+              <a:rPr lang="en-US" altLang="zh-CN" dirty="0"/>
+              <a:t>languages for heterogeneous platforms</a:t>
+            </a:r>
+          </a:p>
+          <a:p>
+            <a:pPr lvl="1"/>
+            <a:r>
+              <a:rPr lang="en-US" altLang="zh-CN" dirty="0"/>
+              <a:t>Fun</a:t>
             </a:r>
             <a:r>
               <a:rPr lang="zh-CN" altLang="en-US" dirty="0"/>
@@ -6582,15 +6351,8 @@
               <a:t> </a:t>
             </a:r>
             <a:r>
-              <a:rPr lang="en-US" altLang="zh-CN"/>
-              <a:t>project</a:t>
-            </a:r>
-            <a:endParaRPr lang="en-US" altLang="zh-CN" dirty="0"/>
-          </a:p>
-          <a:p>
-            <a:r>
-              <a:rPr lang="en-US" altLang="zh-CN" dirty="0"/>
-              <a:t>50% for final test</a:t>
+              <a:rPr lang="en-US" altLang="zh-CN" dirty="0"/>
+              <a:t>profitable</a:t>
             </a:r>
           </a:p>
         </p:txBody>
@@ -6622,180 +6384,6 @@
       </p:grpSpPr>
       <p:sp>
         <p:nvSpPr>
-          <p:cNvPr id="100354" name="Rectangle 2">
-            <a:extLst>
-              <a:ext uri="{FF2B5EF4-FFF2-40B4-BE49-F238E27FC236}">
-                <a16:creationId xmlns:a16="http://schemas.microsoft.com/office/drawing/2014/main" id="{E093C3C5-239C-9043-9F58-737DAA205DD9}"/>
-              </a:ext>
-            </a:extLst>
-          </p:cNvPr>
-          <p:cNvSpPr>
-            <a:spLocks noGrp="1" noChangeArrowheads="1"/>
-          </p:cNvSpPr>
-          <p:nvPr>
-            <p:ph type="title"/>
-          </p:nvPr>
-        </p:nvSpPr>
-        <p:spPr/>
-        <p:txBody>
-          <a:bodyPr/>
-          <a:lstStyle/>
-          <a:p>
-            <a:r>
-              <a:rPr lang="en-US" altLang="zh-CN"/>
-              <a:t>Summary</a:t>
-            </a:r>
-          </a:p>
-        </p:txBody>
-      </p:sp>
-      <p:sp>
-        <p:nvSpPr>
-          <p:cNvPr id="100355" name="Rectangle 3">
-            <a:extLst>
-              <a:ext uri="{FF2B5EF4-FFF2-40B4-BE49-F238E27FC236}">
-                <a16:creationId xmlns:a16="http://schemas.microsoft.com/office/drawing/2014/main" id="{D7D785B2-94A1-C74E-AF7E-48DFC6F337EC}"/>
-              </a:ext>
-            </a:extLst>
-          </p:cNvPr>
-          <p:cNvSpPr>
-            <a:spLocks noGrp="1" noChangeArrowheads="1"/>
-          </p:cNvSpPr>
-          <p:nvPr>
-            <p:ph type="body" idx="1"/>
-          </p:nvPr>
-        </p:nvSpPr>
-        <p:spPr/>
-        <p:txBody>
-          <a:bodyPr/>
-          <a:lstStyle/>
-          <a:p>
-            <a:r>
-              <a:rPr lang="en-US" altLang="zh-CN" dirty="0"/>
-              <a:t>This is a practice-oriented theory course</a:t>
-            </a:r>
-          </a:p>
-          <a:p>
-            <a:r>
-              <a:rPr lang="en-US" altLang="zh-CN" dirty="0"/>
-              <a:t>Have</a:t>
-            </a:r>
-            <a:r>
-              <a:rPr lang="zh-CN" altLang="en-US" dirty="0"/>
-              <a:t> </a:t>
-            </a:r>
-            <a:r>
-              <a:rPr lang="en-US" altLang="zh-CN" dirty="0"/>
-              <a:t>a</a:t>
-            </a:r>
-            <a:r>
-              <a:rPr lang="zh-CN" altLang="en-US" dirty="0"/>
-              <a:t> </a:t>
-            </a:r>
-            <a:r>
-              <a:rPr lang="en-US" altLang="zh-CN" dirty="0"/>
-              <a:t>thorough</a:t>
-            </a:r>
-            <a:r>
-              <a:rPr lang="zh-CN" altLang="en-US" dirty="0"/>
-              <a:t> </a:t>
-            </a:r>
-            <a:r>
-              <a:rPr lang="en-US" altLang="zh-CN" dirty="0"/>
-              <a:t>understanding</a:t>
-            </a:r>
-            <a:r>
-              <a:rPr lang="zh-CN" altLang="en-US" dirty="0"/>
-              <a:t> </a:t>
-            </a:r>
-            <a:r>
-              <a:rPr lang="en-US" altLang="zh-CN" dirty="0"/>
-              <a:t>of</a:t>
-            </a:r>
-            <a:r>
-              <a:rPr lang="zh-CN" altLang="en-US" dirty="0"/>
-              <a:t> </a:t>
-            </a:r>
-            <a:r>
-              <a:rPr lang="en-US" altLang="zh-CN" dirty="0"/>
-              <a:t>principles</a:t>
-            </a:r>
-            <a:r>
-              <a:rPr lang="zh-CN" altLang="en-US" dirty="0"/>
-              <a:t> </a:t>
-            </a:r>
-            <a:r>
-              <a:rPr lang="en-US" altLang="zh-CN" dirty="0"/>
-              <a:t>for</a:t>
-            </a:r>
-            <a:r>
-              <a:rPr lang="zh-CN" altLang="en-US" dirty="0"/>
-              <a:t> </a:t>
-            </a:r>
-            <a:r>
-              <a:rPr lang="en-US" altLang="zh-CN" dirty="0"/>
-              <a:t>programming</a:t>
-            </a:r>
-            <a:r>
-              <a:rPr lang="zh-CN" altLang="en-US" dirty="0"/>
-              <a:t> </a:t>
-            </a:r>
-            <a:r>
-              <a:rPr lang="en-US" altLang="zh-CN" dirty="0"/>
-              <a:t>languages</a:t>
-            </a:r>
-          </a:p>
-          <a:p>
-            <a:pPr lvl="1"/>
-            <a:r>
-              <a:rPr lang="en-US" altLang="zh-CN" dirty="0"/>
-              <a:t>Fun</a:t>
-            </a:r>
-            <a:r>
-              <a:rPr lang="zh-CN" altLang="en-US" dirty="0"/>
-              <a:t> </a:t>
-            </a:r>
-            <a:r>
-              <a:rPr lang="en-US" altLang="zh-CN" dirty="0"/>
-              <a:t>and</a:t>
-            </a:r>
-            <a:r>
-              <a:rPr lang="zh-CN" altLang="en-US" dirty="0"/>
-              <a:t> </a:t>
-            </a:r>
-            <a:r>
-              <a:rPr lang="en-US" altLang="zh-CN" dirty="0"/>
-              <a:t>profitable</a:t>
-            </a:r>
-          </a:p>
-        </p:txBody>
-      </p:sp>
-    </p:spTree>
-  </p:cSld>
-  <p:clrMapOvr>
-    <a:masterClrMapping/>
-  </p:clrMapOvr>
-</p:sld>
-</file>
-
-<file path=ppt/slides/slide17.xml><?xml version="1.0" encoding="utf-8"?>
-<p:sld xmlns:a="http://schemas.openxmlformats.org/drawingml/2006/main" xmlns:r="http://schemas.openxmlformats.org/officeDocument/2006/relationships" xmlns:p="http://schemas.openxmlformats.org/presentationml/2006/main">
-  <p:cSld>
-    <p:spTree>
-      <p:nvGrpSpPr>
-        <p:cNvPr id="1" name=""/>
-        <p:cNvGrpSpPr/>
-        <p:nvPr/>
-      </p:nvGrpSpPr>
-      <p:grpSpPr>
-        <a:xfrm>
-          <a:off x="0" y="0"/>
-          <a:ext cx="0" cy="0"/>
-          <a:chOff x="0" y="0"/>
-          <a:chExt cx="0" cy="0"/>
-        </a:xfrm>
-      </p:grpSpPr>
-      <p:sp>
-        <p:nvSpPr>
           <p:cNvPr id="101378" name="Rectangle 2">
             <a:extLst>
               <a:ext uri="{FF2B5EF4-FFF2-40B4-BE49-F238E27FC236}">
@@ -6960,8 +6548,8 @@
           <a:lstStyle/>
           <a:p>
             <a:r>
-              <a:rPr lang="en-US" altLang="zh-CN" dirty="0"/>
-              <a:t>What’s</a:t>
+              <a:rPr lang="en-US" altLang="zh-CN"/>
+              <a:t>What is</a:t>
             </a:r>
             <a:r>
               <a:rPr lang="zh-CN" altLang="en-US" dirty="0"/>

--- a/courses/popl26/slides/lec01-overview.pptx
+++ b/courses/popl26/slides/lec01-overview.pptx
@@ -5,7 +5,7 @@
     <p:sldMasterId id="2147483649" r:id="rId1"/>
   </p:sldMasterIdLst>
   <p:handoutMasterIdLst>
-    <p:handoutMasterId r:id="rId18"/>
+    <p:handoutMasterId r:id="rId16"/>
   </p:handoutMasterIdLst>
   <p:sldIdLst>
     <p:sldId id="256" r:id="rId2"/>
@@ -13,17 +13,15 @@
     <p:sldId id="306" r:id="rId4"/>
     <p:sldId id="274" r:id="rId5"/>
     <p:sldId id="311" r:id="rId6"/>
-    <p:sldId id="308" r:id="rId7"/>
-    <p:sldId id="309" r:id="rId8"/>
-    <p:sldId id="312" r:id="rId9"/>
-    <p:sldId id="287" r:id="rId10"/>
-    <p:sldId id="313" r:id="rId11"/>
-    <p:sldId id="288" r:id="rId12"/>
-    <p:sldId id="305" r:id="rId13"/>
-    <p:sldId id="315" r:id="rId14"/>
-    <p:sldId id="295" r:id="rId15"/>
-    <p:sldId id="303" r:id="rId16"/>
-    <p:sldId id="304" r:id="rId17"/>
+    <p:sldId id="312" r:id="rId7"/>
+    <p:sldId id="287" r:id="rId8"/>
+    <p:sldId id="313" r:id="rId9"/>
+    <p:sldId id="288" r:id="rId10"/>
+    <p:sldId id="305" r:id="rId11"/>
+    <p:sldId id="315" r:id="rId12"/>
+    <p:sldId id="295" r:id="rId13"/>
+    <p:sldId id="303" r:id="rId14"/>
+    <p:sldId id="304" r:id="rId15"/>
   </p:sldIdLst>
   <p:sldSz cx="9144000" cy="6858000" type="screen4x3"/>
   <p:notesSz cx="7099300" cy="10234613"/>
@@ -5170,10 +5168,10 @@
       </p:grpSpPr>
       <p:sp>
         <p:nvSpPr>
-          <p:cNvPr id="92162" name="Rectangle 2">
-            <a:extLst>
-              <a:ext uri="{FF2B5EF4-FFF2-40B4-BE49-F238E27FC236}">
-                <a16:creationId xmlns:a16="http://schemas.microsoft.com/office/drawing/2014/main" id="{0A5A60BF-10C8-9D43-8EF6-A81549643A73}"/>
+          <p:cNvPr id="102402" name="Rectangle 2">
+            <a:extLst>
+              <a:ext uri="{FF2B5EF4-FFF2-40B4-BE49-F238E27FC236}">
+                <a16:creationId xmlns:a16="http://schemas.microsoft.com/office/drawing/2014/main" id="{42EBAEF3-449D-DB46-BDC5-0F2E79263361}"/>
               </a:ext>
             </a:extLst>
           </p:cNvPr>
@@ -5190,18 +5188,18 @@
           <a:lstStyle/>
           <a:p>
             <a:r>
-              <a:rPr lang="en-US" altLang="zh-CN" dirty="0"/>
-              <a:t>Administrivia</a:t>
-            </a:r>
-          </a:p>
-        </p:txBody>
-      </p:sp>
-      <p:sp>
-        <p:nvSpPr>
-          <p:cNvPr id="92163" name="Rectangle 3">
-            <a:extLst>
-              <a:ext uri="{FF2B5EF4-FFF2-40B4-BE49-F238E27FC236}">
-                <a16:creationId xmlns:a16="http://schemas.microsoft.com/office/drawing/2014/main" id="{5AA507DA-1851-2647-B0D8-1528A061BAEA}"/>
+              <a:rPr lang="en-US" altLang="zh-CN"/>
+              <a:t>Textbooks &amp; Reference</a:t>
+            </a:r>
+          </a:p>
+        </p:txBody>
+      </p:sp>
+      <p:sp>
+        <p:nvSpPr>
+          <p:cNvPr id="102403" name="Rectangle 3">
+            <a:extLst>
+              <a:ext uri="{FF2B5EF4-FFF2-40B4-BE49-F238E27FC236}">
+                <a16:creationId xmlns:a16="http://schemas.microsoft.com/office/drawing/2014/main" id="{4E6B8DC8-686F-3D48-960E-A0FD6399D3E3}"/>
               </a:ext>
             </a:extLst>
           </p:cNvPr>
@@ -5212,146 +5210,127 @@
             <p:ph type="body" idx="1"/>
           </p:nvPr>
         </p:nvSpPr>
-        <p:spPr/>
+        <p:spPr>
+          <a:xfrm>
+            <a:off x="1182688" y="2017713"/>
+            <a:ext cx="4075112" cy="4114800"/>
+          </a:xfrm>
+        </p:spPr>
         <p:txBody>
           <a:bodyPr/>
           <a:lstStyle/>
           <a:p>
             <a:r>
               <a:rPr lang="en-US" altLang="zh-CN" dirty="0"/>
-              <a:t>Course</a:t>
-            </a:r>
-            <a:r>
-              <a:rPr lang="zh-CN" altLang="en-US" dirty="0"/>
-              <a:t> </a:t>
-            </a:r>
-            <a:r>
-              <a:rPr lang="en-US" altLang="zh-CN" dirty="0"/>
-              <a:t>page:</a:t>
-            </a:r>
-          </a:p>
-          <a:p>
-            <a:pPr marL="0" indent="0">
-              <a:buNone/>
-            </a:pPr>
-            <a:r>
-              <a:rPr lang="en-US" altLang="zh-CN" sz="2400" dirty="0">
-                <a:hlinkClick r:id="rId2"/>
-              </a:rPr>
-              <a:t>https://csslab-ustc.github.io/courses/popl26/</a:t>
-            </a:r>
-            <a:endParaRPr lang="en-US" altLang="zh-CN" sz="2400" dirty="0"/>
-          </a:p>
-          <a:p>
-            <a:pPr marL="0" indent="0">
-              <a:buNone/>
-            </a:pPr>
-            <a:endParaRPr lang="en-US" altLang="zh-CN" sz="2400" dirty="0"/>
-          </a:p>
-          <a:p>
-            <a:pPr lvl="0">
-              <a:buClr>
-                <a:srgbClr val="3333CC"/>
-              </a:buClr>
-            </a:pPr>
-            <a:r>
-              <a:rPr lang="en-US" altLang="zh-CN" dirty="0">
+              <a:t>Key</a:t>
+            </a:r>
+            <a:r>
+              <a:rPr lang="zh-CN" altLang="en-US" dirty="0"/>
+              <a:t> </a:t>
+            </a:r>
+            <a:r>
+              <a:rPr lang="en-US" altLang="zh-CN" dirty="0"/>
+              <a:t>textbook:</a:t>
+            </a:r>
+          </a:p>
+          <a:p>
+            <a:r>
+              <a:rPr lang="en-US" altLang="zh-CN" i="1" dirty="0">
                 <a:solidFill>
-                  <a:srgbClr val="000000"/>
+                  <a:srgbClr val="0432FF"/>
                 </a:solidFill>
               </a:rPr>
-              <a:t>Schedule</a:t>
-            </a:r>
-            <a:r>
-              <a:rPr lang="zh-CN" altLang="en-US" dirty="0">
+              <a:t>Programming</a:t>
+            </a:r>
+            <a:r>
+              <a:rPr lang="zh-CN" altLang="en-US" i="1" dirty="0">
                 <a:solidFill>
-                  <a:srgbClr val="000000"/>
+                  <a:srgbClr val="0432FF"/>
                 </a:solidFill>
               </a:rPr>
               <a:t> </a:t>
             </a:r>
-            <a:endParaRPr lang="en-US" altLang="zh-CN" dirty="0">
-              <a:solidFill>
-                <a:srgbClr val="000000"/>
-              </a:solidFill>
-            </a:endParaRPr>
-          </a:p>
-          <a:p>
-            <a:pPr lvl="0">
-              <a:buClr>
-                <a:srgbClr val="3333CC"/>
-              </a:buClr>
-            </a:pPr>
-            <a:r>
-              <a:rPr lang="en-US" altLang="zh-CN" dirty="0">
+            <a:r>
+              <a:rPr lang="en-US" altLang="zh-CN" i="1" dirty="0">
                 <a:solidFill>
-                  <a:srgbClr val="000000"/>
+                  <a:srgbClr val="0432FF"/>
                 </a:solidFill>
               </a:rPr>
-              <a:t>Readings</a:t>
-            </a:r>
-          </a:p>
-          <a:p>
-            <a:pPr lvl="0">
-              <a:buClr>
-                <a:srgbClr val="3333CC"/>
-              </a:buClr>
-            </a:pPr>
-            <a:r>
-              <a:rPr lang="en-US" altLang="zh-CN" dirty="0">
+              <a:t>Massively</a:t>
+            </a:r>
+            <a:r>
+              <a:rPr lang="zh-CN" altLang="en-US" i="1" dirty="0">
                 <a:solidFill>
-                  <a:srgbClr val="000000"/>
+                  <a:srgbClr val="0432FF"/>
                 </a:solidFill>
               </a:rPr>
-              <a:t>Assignments</a:t>
-            </a:r>
-          </a:p>
-          <a:p>
-            <a:pPr lvl="0">
-              <a:buClr>
-                <a:srgbClr val="3333CC"/>
-              </a:buClr>
-            </a:pPr>
-            <a:r>
-              <a:rPr lang="en-US" altLang="zh-CN" dirty="0">
+              <a:t> </a:t>
+            </a:r>
+            <a:r>
+              <a:rPr lang="en-US" altLang="zh-CN" i="1" dirty="0">
                 <a:solidFill>
-                  <a:srgbClr val="000000"/>
+                  <a:srgbClr val="0432FF"/>
                 </a:solidFill>
               </a:rPr>
-              <a:t>…</a:t>
-            </a:r>
-          </a:p>
-          <a:p>
-            <a:pPr lvl="0">
-              <a:buClr>
-                <a:srgbClr val="3333CC"/>
-              </a:buClr>
-            </a:pPr>
-            <a:r>
-              <a:rPr lang="en-US" altLang="zh-CN" dirty="0">
+              <a:t>Parallel</a:t>
+            </a:r>
+            <a:r>
+              <a:rPr lang="zh-CN" altLang="en-US" i="1" dirty="0">
                 <a:solidFill>
-                  <a:srgbClr val="000000"/>
+                  <a:srgbClr val="0432FF"/>
                 </a:solidFill>
               </a:rPr>
-              <a:t>Check</a:t>
-            </a:r>
-            <a:r>
-              <a:rPr lang="zh-CN" altLang="en-US" dirty="0">
+              <a:t> </a:t>
+            </a:r>
+            <a:r>
+              <a:rPr lang="en-US" altLang="zh-CN" i="1" dirty="0">
                 <a:solidFill>
-                  <a:srgbClr val="000000"/>
+                  <a:srgbClr val="0432FF"/>
                 </a:solidFill>
               </a:rPr>
-              <a:t> </a:t>
-            </a:r>
-            <a:r>
-              <a:rPr lang="en-US" altLang="zh-CN" dirty="0">
-                <a:solidFill>
-                  <a:srgbClr val="000000"/>
-                </a:solidFill>
-              </a:rPr>
-              <a:t>frequently</a:t>
-            </a:r>
-            <a:endParaRPr lang="en-US" altLang="zh-CN" sz="2400" dirty="0"/>
+              <a:t>Processors</a:t>
+            </a:r>
+          </a:p>
+          <a:p>
+            <a:endParaRPr lang="en-US" altLang="zh-CN" i="1" dirty="0"/>
+          </a:p>
+          <a:p>
+            <a:r>
+              <a:rPr lang="en-US" altLang="zh-CN" dirty="0"/>
+              <a:t>Other</a:t>
+            </a:r>
+            <a:r>
+              <a:rPr lang="zh-CN" altLang="en-US" dirty="0"/>
+              <a:t> </a:t>
+            </a:r>
+            <a:r>
+              <a:rPr lang="en-US" altLang="zh-CN" dirty="0"/>
+              <a:t>references</a:t>
+            </a:r>
+            <a:r>
+              <a:rPr lang="zh-CN" altLang="en-US" dirty="0"/>
+              <a:t> </a:t>
+            </a:r>
+            <a:r>
+              <a:rPr lang="en-US" altLang="zh-CN" dirty="0"/>
+              <a:t>on</a:t>
+            </a:r>
+            <a:r>
+              <a:rPr lang="zh-CN" altLang="en-US" dirty="0"/>
+              <a:t> </a:t>
+            </a:r>
+            <a:r>
+              <a:rPr lang="en-US" altLang="zh-CN" dirty="0"/>
+              <a:t>course</a:t>
+            </a:r>
+            <a:r>
+              <a:rPr lang="zh-CN" altLang="en-US" dirty="0"/>
+              <a:t> </a:t>
+            </a:r>
+            <a:r>
+              <a:rPr lang="en-US" altLang="zh-CN" dirty="0"/>
+              <a:t>website</a:t>
+            </a:r>
           </a:p>
           <a:p>
             <a:pPr marL="0" indent="0">
@@ -5359,14 +5338,63 @@
             </a:pPr>
             <a:endParaRPr lang="en-US" altLang="zh-CN" dirty="0"/>
           </a:p>
-        </p:txBody>
-      </p:sp>
+          <a:p>
+            <a:pPr>
+              <a:buFont typeface="Wingdings" pitchFamily="2" charset="2"/>
+              <a:buNone/>
+            </a:pPr>
+            <a:endParaRPr lang="en-US" altLang="zh-CN" dirty="0"/>
+          </a:p>
+        </p:txBody>
+      </p:sp>
+      <p:pic>
+        <p:nvPicPr>
+          <p:cNvPr id="1026" name="Picture 2" descr="Programming Massively Parallel Processors, 4th Edition">
+            <a:extLst>
+              <a:ext uri="{FF2B5EF4-FFF2-40B4-BE49-F238E27FC236}">
+                <a16:creationId xmlns:a16="http://schemas.microsoft.com/office/drawing/2014/main" id="{0C8A72D9-B45F-56CE-5976-E0DC10F46EBF}"/>
+              </a:ext>
+            </a:extLst>
+          </p:cNvPr>
+          <p:cNvPicPr>
+            <a:picLocks noChangeAspect="1" noChangeArrowheads="1"/>
+          </p:cNvPicPr>
+          <p:nvPr/>
+        </p:nvPicPr>
+        <p:blipFill>
+          <a:blip r:embed="rId2">
+            <a:extLst>
+              <a:ext uri="{28A0092B-C50C-407E-A947-70E740481C1C}">
+                <a14:useLocalDpi xmlns:a14="http://schemas.microsoft.com/office/drawing/2010/main" val="0"/>
+              </a:ext>
+            </a:extLst>
+          </a:blip>
+          <a:srcRect/>
+          <a:stretch>
+            <a:fillRect/>
+          </a:stretch>
+        </p:blipFill>
+        <p:spPr bwMode="auto">
+          <a:xfrm>
+            <a:off x="5638800" y="2147824"/>
+            <a:ext cx="3352800" cy="4481576"/>
+          </a:xfrm>
+          <a:prstGeom prst="rect">
+            <a:avLst/>
+          </a:prstGeom>
+          <a:noFill/>
+          <a:extLst>
+            <a:ext uri="{909E8E84-426E-40DD-AFC4-6F175D3DCCD1}">
+              <a14:hiddenFill xmlns:a14="http://schemas.microsoft.com/office/drawing/2010/main">
+                <a:solidFill>
+                  <a:srgbClr val="FFFFFF"/>
+                </a:solidFill>
+              </a14:hiddenFill>
+            </a:ext>
+          </a:extLst>
+        </p:spPr>
+      </p:pic>
     </p:spTree>
-    <p:extLst>
-      <p:ext uri="{BB962C8B-B14F-4D97-AF65-F5344CB8AC3E}">
-        <p14:creationId xmlns:p14="http://schemas.microsoft.com/office/powerpoint/2010/main" val="402404845"/>
-      </p:ext>
-    </p:extLst>
   </p:cSld>
   <p:clrMapOvr>
     <a:masterClrMapping/>
@@ -5413,8 +5441,16 @@
           <a:lstStyle/>
           <a:p>
             <a:r>
-              <a:rPr lang="en-US" altLang="zh-CN"/>
-              <a:t>Structure of this course</a:t>
+              <a:rPr lang="en-US" altLang="zh-CN" dirty="0"/>
+              <a:t>Programming</a:t>
+            </a:r>
+            <a:r>
+              <a:rPr lang="zh-CN" altLang="en-US" dirty="0"/>
+              <a:t> </a:t>
+            </a:r>
+            <a:r>
+              <a:rPr lang="en-US" altLang="zh-CN" dirty="0"/>
+              <a:t>assignments</a:t>
             </a:r>
           </a:p>
         </p:txBody>
@@ -5441,138 +5477,104 @@
           <a:lstStyle/>
           <a:p>
             <a:r>
-              <a:rPr lang="en-US" altLang="zh-CN" i="1" dirty="0">
+              <a:rPr lang="en-US" altLang="zh-CN" dirty="0"/>
+              <a:t>Language</a:t>
+            </a:r>
+            <a:r>
+              <a:rPr lang="zh-CN" altLang="en-US" dirty="0"/>
+              <a:t> </a:t>
+            </a:r>
+            <a:r>
+              <a:rPr lang="en-US" altLang="zh-CN" dirty="0"/>
+              <a:t>used:</a:t>
+            </a:r>
+            <a:r>
+              <a:rPr lang="zh-CN" altLang="en-US" dirty="0"/>
+              <a:t> </a:t>
+            </a:r>
+            <a:r>
+              <a:rPr lang="en-US" altLang="zh-CN" dirty="0">
                 <a:solidFill>
                   <a:srgbClr val="0000FF"/>
                 </a:solidFill>
               </a:rPr>
-              <a:t>Lectures</a:t>
-            </a:r>
-          </a:p>
-          <a:p>
-            <a:pPr lvl="1"/>
-            <a:r>
-              <a:rPr lang="en-US" altLang="zh-CN" dirty="0"/>
-              <a:t>On blackboard lecture, few slides</a:t>
-            </a:r>
-          </a:p>
-          <a:p>
-            <a:r>
-              <a:rPr lang="en-US" altLang="zh-CN" i="1" dirty="0">
+              <a:t>Cuda,</a:t>
+            </a:r>
+            <a:r>
+              <a:rPr lang="zh-CN" altLang="en-US" dirty="0">
                 <a:solidFill>
                   <a:srgbClr val="0000FF"/>
                 </a:solidFill>
               </a:rPr>
-              <a:t>Programming</a:t>
-            </a:r>
-            <a:r>
-              <a:rPr lang="zh-CN" altLang="en-US" i="1" dirty="0">
+              <a:t> </a:t>
+            </a:r>
+            <a:r>
+              <a:rPr lang="en-US" altLang="zh-CN" dirty="0">
                 <a:solidFill>
                   <a:srgbClr val="0000FF"/>
                 </a:solidFill>
               </a:rPr>
-              <a:t> </a:t>
-            </a:r>
-            <a:r>
-              <a:rPr lang="en-US" altLang="zh-CN" i="1" dirty="0">
+              <a:t>Python</a:t>
+            </a:r>
+            <a:r>
+              <a:rPr lang="zh-CN" altLang="en-US" dirty="0">
                 <a:solidFill>
                   <a:srgbClr val="0000FF"/>
                 </a:solidFill>
               </a:rPr>
-              <a:t>assignments</a:t>
-            </a:r>
-          </a:p>
-          <a:p>
-            <a:pPr lvl="1"/>
-            <a:r>
-              <a:rPr lang="en-US" altLang="zh-CN" dirty="0"/>
-              <a:t>8</a:t>
-            </a:r>
-            <a:r>
-              <a:rPr lang="zh-CN" altLang="en-US" dirty="0"/>
-              <a:t> </a:t>
-            </a:r>
-            <a:r>
-              <a:rPr lang="en-US" altLang="zh-CN" dirty="0"/>
-              <a:t>PAs</a:t>
-            </a:r>
-            <a:r>
-              <a:rPr lang="zh-CN" altLang="en-US" dirty="0"/>
-              <a:t> </a:t>
-            </a:r>
-            <a:r>
-              <a:rPr lang="en-US" altLang="zh-CN" dirty="0"/>
-              <a:t>planned</a:t>
-            </a:r>
-            <a:r>
-              <a:rPr lang="zh-CN" altLang="en-US" dirty="0"/>
-              <a:t> </a:t>
-            </a:r>
-            <a:r>
-              <a:rPr lang="en-US" altLang="zh-CN" dirty="0"/>
-              <a:t>(see</a:t>
-            </a:r>
-            <a:r>
-              <a:rPr lang="zh-CN" altLang="en-US" dirty="0"/>
-              <a:t> </a:t>
-            </a:r>
-            <a:r>
-              <a:rPr lang="en-US" altLang="zh-CN" dirty="0"/>
-              <a:t>course</a:t>
-            </a:r>
-            <a:r>
-              <a:rPr lang="zh-CN" altLang="en-US" dirty="0"/>
-              <a:t> </a:t>
-            </a:r>
-            <a:r>
-              <a:rPr lang="en-US" altLang="zh-CN" dirty="0"/>
-              <a:t>website)</a:t>
-            </a:r>
-          </a:p>
-          <a:p>
-            <a:r>
-              <a:rPr lang="en-US" altLang="zh-CN" i="1" dirty="0">
+              <a:t> </a:t>
+            </a:r>
+            <a:r>
+              <a:rPr lang="en-US" altLang="zh-CN" dirty="0">
                 <a:solidFill>
                   <a:srgbClr val="0000FF"/>
                 </a:solidFill>
               </a:rPr>
-              <a:t>Test</a:t>
+              <a:t>DSL</a:t>
             </a:r>
           </a:p>
           <a:p>
             <a:pPr lvl="1"/>
-            <a:r>
-              <a:rPr lang="en-US" altLang="zh-CN" dirty="0"/>
-              <a:t>Middle</a:t>
-            </a:r>
-            <a:r>
-              <a:rPr lang="zh-CN" altLang="en-US" dirty="0"/>
-              <a:t> </a:t>
-            </a:r>
-            <a:r>
-              <a:rPr lang="en-US" altLang="zh-CN" dirty="0"/>
-              <a:t>and</a:t>
-            </a:r>
-            <a:r>
-              <a:rPr lang="zh-CN" altLang="en-US" dirty="0"/>
-              <a:t> </a:t>
-            </a:r>
-            <a:r>
-              <a:rPr lang="en-US" altLang="zh-CN" dirty="0"/>
-              <a:t>final</a:t>
-            </a:r>
-            <a:r>
-              <a:rPr lang="zh-CN" altLang="en-US" dirty="0"/>
-              <a:t> </a:t>
-            </a:r>
-            <a:r>
-              <a:rPr lang="en-US" altLang="zh-CN" dirty="0"/>
-              <a:t>(Tentative)</a:t>
-            </a:r>
+            <a:endParaRPr lang="en-US" altLang="zh-CN" dirty="0"/>
+          </a:p>
+          <a:p>
+            <a:r>
+              <a:rPr lang="en-US" altLang="zh-CN" dirty="0"/>
+              <a:t>Platform</a:t>
+            </a:r>
+          </a:p>
+          <a:p>
+            <a:pPr lvl="1"/>
+            <a:r>
+              <a:rPr lang="en-US" altLang="zh-CN" dirty="0" err="1">
+                <a:solidFill>
+                  <a:srgbClr val="0000FF"/>
+                </a:solidFill>
+              </a:rPr>
+              <a:t>leetgpu</a:t>
+            </a:r>
+            <a:endParaRPr lang="en-US" altLang="zh-CN" dirty="0">
+              <a:solidFill>
+                <a:srgbClr val="0000FF"/>
+              </a:solidFill>
+            </a:endParaRPr>
+          </a:p>
+          <a:p>
+            <a:pPr lvl="1"/>
+            <a:endParaRPr lang="en-US" altLang="zh-CN" i="1" dirty="0">
+              <a:solidFill>
+                <a:srgbClr val="0000FF"/>
+              </a:solidFill>
+            </a:endParaRPr>
           </a:p>
         </p:txBody>
       </p:sp>
     </p:spTree>
+    <p:extLst>
+      <p:ext uri="{BB962C8B-B14F-4D97-AF65-F5344CB8AC3E}">
+        <p14:creationId xmlns:p14="http://schemas.microsoft.com/office/powerpoint/2010/main" val="48302392"/>
+      </p:ext>
+    </p:extLst>
   </p:cSld>
   <p:clrMapOvr>
     <a:masterClrMapping/>
@@ -5599,10 +5601,10 @@
       </p:grpSpPr>
       <p:sp>
         <p:nvSpPr>
-          <p:cNvPr id="102402" name="Rectangle 2">
-            <a:extLst>
-              <a:ext uri="{FF2B5EF4-FFF2-40B4-BE49-F238E27FC236}">
-                <a16:creationId xmlns:a16="http://schemas.microsoft.com/office/drawing/2014/main" id="{42EBAEF3-449D-DB46-BDC5-0F2E79263361}"/>
+          <p:cNvPr id="92162" name="Rectangle 2">
+            <a:extLst>
+              <a:ext uri="{FF2B5EF4-FFF2-40B4-BE49-F238E27FC236}">
+                <a16:creationId xmlns:a16="http://schemas.microsoft.com/office/drawing/2014/main" id="{0A5A60BF-10C8-9D43-8EF6-A81549643A73}"/>
               </a:ext>
             </a:extLst>
           </p:cNvPr>
@@ -5619,18 +5621,26 @@
           <a:lstStyle/>
           <a:p>
             <a:r>
-              <a:rPr lang="en-US" altLang="zh-CN"/>
-              <a:t>Textbooks &amp; Reference</a:t>
-            </a:r>
-          </a:p>
-        </p:txBody>
-      </p:sp>
-      <p:sp>
-        <p:nvSpPr>
-          <p:cNvPr id="102403" name="Rectangle 3">
-            <a:extLst>
-              <a:ext uri="{FF2B5EF4-FFF2-40B4-BE49-F238E27FC236}">
-                <a16:creationId xmlns:a16="http://schemas.microsoft.com/office/drawing/2014/main" id="{4E6B8DC8-686F-3D48-960E-A0FD6399D3E3}"/>
+              <a:rPr lang="en-US" altLang="zh-CN" dirty="0"/>
+              <a:t>Grading</a:t>
+            </a:r>
+            <a:r>
+              <a:rPr lang="zh-CN" altLang="en-US" dirty="0"/>
+              <a:t> </a:t>
+            </a:r>
+            <a:r>
+              <a:rPr lang="en-US" altLang="zh-CN" dirty="0"/>
+              <a:t>(Tentative)</a:t>
+            </a:r>
+          </a:p>
+        </p:txBody>
+      </p:sp>
+      <p:sp>
+        <p:nvSpPr>
+          <p:cNvPr id="92163" name="Rectangle 3">
+            <a:extLst>
+              <a:ext uri="{FF2B5EF4-FFF2-40B4-BE49-F238E27FC236}">
+                <a16:creationId xmlns:a16="http://schemas.microsoft.com/office/drawing/2014/main" id="{5AA507DA-1851-2647-B0D8-1528A061BAEA}"/>
               </a:ext>
             </a:extLst>
           </p:cNvPr>
@@ -5641,162 +5651,48 @@
             <p:ph type="body" idx="1"/>
           </p:nvPr>
         </p:nvSpPr>
-        <p:spPr>
-          <a:xfrm>
-            <a:off x="1182688" y="2017713"/>
-            <a:ext cx="4075112" cy="4114800"/>
-          </a:xfrm>
-        </p:spPr>
+        <p:spPr/>
         <p:txBody>
           <a:bodyPr/>
           <a:lstStyle/>
           <a:p>
             <a:r>
               <a:rPr lang="en-US" altLang="zh-CN" dirty="0"/>
-              <a:t>Key</a:t>
-            </a:r>
-            <a:r>
-              <a:rPr lang="zh-CN" altLang="en-US" dirty="0"/>
-              <a:t> </a:t>
-            </a:r>
-            <a:r>
-              <a:rPr lang="en-US" altLang="zh-CN" dirty="0"/>
-              <a:t>textbook:</a:t>
-            </a:r>
-          </a:p>
-          <a:p>
-            <a:r>
-              <a:rPr lang="en-US" altLang="zh-CN" i="1" dirty="0"/>
-              <a:t>Types</a:t>
-            </a:r>
-            <a:r>
-              <a:rPr lang="zh-CN" altLang="en-US" i="1" dirty="0"/>
-              <a:t> </a:t>
-            </a:r>
-            <a:r>
-              <a:rPr lang="en-US" altLang="zh-CN" i="1" dirty="0"/>
+              <a:t>50% for assignment</a:t>
+            </a:r>
+            <a:r>
+              <a:rPr lang="zh-CN" altLang="en-US" dirty="0"/>
+              <a:t> </a:t>
+            </a:r>
+            <a:r>
+              <a:rPr lang="en-US" altLang="zh-CN" dirty="0"/>
               <a:t>and</a:t>
             </a:r>
             <a:r>
-              <a:rPr lang="zh-CN" altLang="en-US" i="1" dirty="0"/>
-              <a:t> </a:t>
-            </a:r>
-            <a:r>
-              <a:rPr lang="en-US" altLang="zh-CN" i="1" dirty="0"/>
-              <a:t>programming</a:t>
-            </a:r>
-            <a:r>
-              <a:rPr lang="zh-CN" altLang="en-US" i="1" dirty="0"/>
-              <a:t> </a:t>
-            </a:r>
-            <a:r>
-              <a:rPr lang="en-US" altLang="zh-CN" i="1" dirty="0"/>
-              <a:t>languages</a:t>
-            </a:r>
-          </a:p>
-          <a:p>
-            <a:endParaRPr lang="en-US" altLang="zh-CN" i="1" dirty="0"/>
-          </a:p>
-          <a:p>
-            <a:r>
-              <a:rPr lang="en-US" altLang="zh-CN" dirty="0"/>
-              <a:t>Other</a:t>
-            </a:r>
-            <a:r>
-              <a:rPr lang="zh-CN" altLang="en-US" dirty="0"/>
-              <a:t> </a:t>
-            </a:r>
-            <a:r>
-              <a:rPr lang="en-US" altLang="zh-CN" dirty="0"/>
-              <a:t>references</a:t>
-            </a:r>
-            <a:r>
-              <a:rPr lang="zh-CN" altLang="en-US" dirty="0"/>
-              <a:t> </a:t>
-            </a:r>
-            <a:r>
-              <a:rPr lang="en-US" altLang="zh-CN" dirty="0"/>
-              <a:t>on</a:t>
-            </a:r>
-            <a:r>
-              <a:rPr lang="zh-CN" altLang="en-US" dirty="0"/>
-              <a:t> </a:t>
-            </a:r>
-            <a:r>
-              <a:rPr lang="en-US" altLang="zh-CN" dirty="0"/>
-              <a:t>course</a:t>
-            </a:r>
-            <a:r>
-              <a:rPr lang="zh-CN" altLang="en-US" dirty="0"/>
-              <a:t> </a:t>
-            </a:r>
-            <a:r>
-              <a:rPr lang="en-US" altLang="zh-CN" dirty="0"/>
-              <a:t>website</a:t>
-            </a:r>
-          </a:p>
-          <a:p>
-            <a:pPr marL="0" indent="0">
-              <a:buNone/>
-            </a:pPr>
-            <a:endParaRPr lang="en-US" altLang="zh-CN" dirty="0"/>
-          </a:p>
-          <a:p>
-            <a:pPr>
-              <a:buFont typeface="Wingdings" pitchFamily="2" charset="2"/>
-              <a:buNone/>
-            </a:pPr>
-            <a:endParaRPr lang="en-US" altLang="zh-CN" dirty="0"/>
-          </a:p>
-        </p:txBody>
-      </p:sp>
-      <p:pic>
-        <p:nvPicPr>
-          <p:cNvPr id="102404" name="Picture 4">
-            <a:extLst>
-              <a:ext uri="{FF2B5EF4-FFF2-40B4-BE49-F238E27FC236}">
-                <a16:creationId xmlns:a16="http://schemas.microsoft.com/office/drawing/2014/main" id="{B8E8363C-5251-6145-BD28-6D7B7DDDF66C}"/>
-              </a:ext>
-            </a:extLst>
-          </p:cNvPr>
-          <p:cNvPicPr>
-            <a:picLocks noChangeAspect="1" noChangeArrowheads="1"/>
-          </p:cNvPicPr>
-          <p:nvPr/>
-        </p:nvPicPr>
-        <p:blipFill>
-          <a:blip r:embed="rId2">
-            <a:extLst>
-              <a:ext uri="{28A0092B-C50C-407E-A947-70E740481C1C}">
-                <a14:useLocalDpi xmlns:a14="http://schemas.microsoft.com/office/drawing/2010/main" val="0"/>
-              </a:ext>
-            </a:extLst>
-          </a:blip>
-          <a:srcRect/>
-          <a:stretch>
-            <a:fillRect/>
-          </a:stretch>
-        </p:blipFill>
-        <p:spPr bwMode="auto">
-          <a:xfrm>
-            <a:off x="5029200" y="2590800"/>
-            <a:ext cx="3779838" cy="3962400"/>
-          </a:xfrm>
-          <a:prstGeom prst="rect">
-            <a:avLst/>
-          </a:prstGeom>
-          <a:noFill/>
-          <a:extLst>
-            <a:ext uri="{909E8E84-426E-40DD-AFC4-6F175D3DCCD1}">
-              <a14:hiddenFill xmlns:a14="http://schemas.microsoft.com/office/drawing/2010/main">
-                <a:solidFill>
-                  <a:srgbClr val="FFFFFF"/>
-                </a:solidFill>
-              </a14:hiddenFill>
-            </a:ext>
-          </a:extLst>
-        </p:spPr>
-      </p:pic>
+              <a:rPr lang="zh-CN" altLang="en-US" dirty="0"/>
+              <a:t> </a:t>
+            </a:r>
+            <a:r>
+              <a:rPr lang="en-US" altLang="zh-CN" dirty="0"/>
+              <a:t>presentations</a:t>
+            </a:r>
+          </a:p>
+          <a:p>
+            <a:r>
+              <a:rPr lang="en-US" altLang="zh-CN" dirty="0"/>
+              <a:t>50% for</a:t>
+            </a:r>
+            <a:r>
+              <a:rPr lang="zh-CN" altLang="en-US" dirty="0"/>
+              <a:t> </a:t>
+            </a:r>
+            <a:r>
+              <a:rPr lang="en-US" altLang="zh-CN" dirty="0"/>
+              <a:t>test</a:t>
+            </a:r>
+          </a:p>
+        </p:txBody>
+      </p:sp>
     </p:spTree>
   </p:cSld>
   <p:clrMapOvr>
@@ -5824,10 +5720,10 @@
       </p:grpSpPr>
       <p:sp>
         <p:nvSpPr>
-          <p:cNvPr id="84994" name="Rectangle 2">
-            <a:extLst>
-              <a:ext uri="{FF2B5EF4-FFF2-40B4-BE49-F238E27FC236}">
-                <a16:creationId xmlns:a16="http://schemas.microsoft.com/office/drawing/2014/main" id="{06000299-7DAD-6742-BAB5-7AB2D780ABE4}"/>
+          <p:cNvPr id="100354" name="Rectangle 2">
+            <a:extLst>
+              <a:ext uri="{FF2B5EF4-FFF2-40B4-BE49-F238E27FC236}">
+                <a16:creationId xmlns:a16="http://schemas.microsoft.com/office/drawing/2014/main" id="{E093C3C5-239C-9043-9F58-737DAA205DD9}"/>
               </a:ext>
             </a:extLst>
           </p:cNvPr>
@@ -5844,26 +5740,18 @@
           <a:lstStyle/>
           <a:p>
             <a:r>
-              <a:rPr lang="en-US" altLang="zh-CN" dirty="0"/>
-              <a:t>Programming</a:t>
-            </a:r>
-            <a:r>
-              <a:rPr lang="zh-CN" altLang="en-US" dirty="0"/>
-              <a:t> </a:t>
-            </a:r>
-            <a:r>
-              <a:rPr lang="en-US" altLang="zh-CN" dirty="0"/>
-              <a:t>assignments</a:t>
-            </a:r>
-          </a:p>
-        </p:txBody>
-      </p:sp>
-      <p:sp>
-        <p:nvSpPr>
-          <p:cNvPr id="84995" name="Rectangle 3">
-            <a:extLst>
-              <a:ext uri="{FF2B5EF4-FFF2-40B4-BE49-F238E27FC236}">
-                <a16:creationId xmlns:a16="http://schemas.microsoft.com/office/drawing/2014/main" id="{78BA9AF9-453B-2A4E-BC9F-7A33CD04B8F3}"/>
+              <a:rPr lang="en-US" altLang="zh-CN"/>
+              <a:t>Summary</a:t>
+            </a:r>
+          </a:p>
+        </p:txBody>
+      </p:sp>
+      <p:sp>
+        <p:nvSpPr>
+          <p:cNvPr id="100355" name="Rectangle 3">
+            <a:extLst>
+              <a:ext uri="{FF2B5EF4-FFF2-40B4-BE49-F238E27FC236}">
+                <a16:creationId xmlns:a16="http://schemas.microsoft.com/office/drawing/2014/main" id="{D7D785B2-94A1-C74E-AF7E-48DFC6F337EC}"/>
               </a:ext>
             </a:extLst>
           </p:cNvPr>
@@ -5880,198 +5768,106 @@
           <a:lstStyle/>
           <a:p>
             <a:r>
-              <a:rPr lang="en-US" altLang="zh-CN" dirty="0">
-                <a:solidFill>
-                  <a:srgbClr val="0000FF"/>
-                </a:solidFill>
-              </a:rPr>
-              <a:t>Language</a:t>
-            </a:r>
-            <a:r>
-              <a:rPr lang="zh-CN" altLang="en-US" dirty="0">
-                <a:solidFill>
-                  <a:srgbClr val="0000FF"/>
-                </a:solidFill>
-              </a:rPr>
-              <a:t> </a:t>
-            </a:r>
-            <a:r>
-              <a:rPr lang="en-US" altLang="zh-CN" dirty="0">
-                <a:solidFill>
-                  <a:srgbClr val="0000FF"/>
-                </a:solidFill>
-              </a:rPr>
-              <a:t>used:</a:t>
-            </a:r>
-            <a:r>
-              <a:rPr lang="zh-CN" altLang="en-US" dirty="0">
-                <a:solidFill>
-                  <a:srgbClr val="0000FF"/>
-                </a:solidFill>
-              </a:rPr>
-              <a:t> </a:t>
-            </a:r>
-            <a:r>
-              <a:rPr lang="en-US" altLang="zh-CN" dirty="0">
-                <a:solidFill>
-                  <a:srgbClr val="0000FF"/>
-                </a:solidFill>
-              </a:rPr>
-              <a:t>Cuda</a:t>
+              <a:rPr lang="en-US" altLang="zh-CN" dirty="0"/>
+              <a:t>This is a practice-oriented course</a:t>
+            </a:r>
+          </a:p>
+          <a:p>
+            <a:r>
+              <a:rPr lang="en-US" altLang="zh-CN" dirty="0"/>
+              <a:t>Have</a:t>
+            </a:r>
+            <a:r>
+              <a:rPr lang="zh-CN" altLang="en-US" dirty="0"/>
+              <a:t> </a:t>
+            </a:r>
+            <a:r>
+              <a:rPr lang="en-US" altLang="zh-CN" dirty="0"/>
+              <a:t>a</a:t>
+            </a:r>
+            <a:r>
+              <a:rPr lang="zh-CN" altLang="en-US" dirty="0"/>
+              <a:t> </a:t>
+            </a:r>
+            <a:r>
+              <a:rPr lang="en-US" altLang="zh-CN" dirty="0"/>
+              <a:t>thorough</a:t>
+            </a:r>
+            <a:r>
+              <a:rPr lang="zh-CN" altLang="en-US" dirty="0"/>
+              <a:t> </a:t>
+            </a:r>
+            <a:r>
+              <a:rPr lang="en-US" altLang="zh-CN" dirty="0"/>
+              <a:t>understanding</a:t>
+            </a:r>
+            <a:r>
+              <a:rPr lang="zh-CN" altLang="en-US" dirty="0"/>
+              <a:t> </a:t>
+            </a:r>
+            <a:r>
+              <a:rPr lang="en-US" altLang="zh-CN" dirty="0"/>
+              <a:t>of</a:t>
+            </a:r>
+            <a:r>
+              <a:rPr lang="zh-CN" altLang="en-US" dirty="0"/>
+              <a:t> </a:t>
+            </a:r>
+            <a:r>
+              <a:rPr lang="en-US" altLang="zh-CN" dirty="0"/>
+              <a:t>principles</a:t>
+            </a:r>
+            <a:r>
+              <a:rPr lang="zh-CN" altLang="en-US" dirty="0"/>
+              <a:t> </a:t>
+            </a:r>
+            <a:r>
+              <a:rPr lang="en-US" altLang="zh-CN" dirty="0"/>
+              <a:t>for</a:t>
+            </a:r>
+            <a:r>
+              <a:rPr lang="zh-CN" altLang="en-US" dirty="0"/>
+              <a:t> </a:t>
+            </a:r>
+            <a:r>
+              <a:rPr lang="en-US" altLang="zh-CN" dirty="0"/>
+              <a:t>programming</a:t>
+            </a:r>
+            <a:r>
+              <a:rPr lang="zh-CN" altLang="en-US" dirty="0"/>
+              <a:t> </a:t>
+            </a:r>
+            <a:r>
+              <a:rPr lang="en-US" altLang="zh-CN" dirty="0"/>
+              <a:t>languages for heterogeneous platforms</a:t>
             </a:r>
           </a:p>
           <a:p>
             <a:pPr lvl="1"/>
             <a:r>
               <a:rPr lang="en-US" altLang="zh-CN" dirty="0"/>
-              <a:t>A</a:t>
-            </a:r>
-            <a:r>
-              <a:rPr lang="zh-CN" altLang="en-US" dirty="0"/>
-              <a:t> </a:t>
-            </a:r>
-            <a:r>
-              <a:rPr lang="en-US" altLang="zh-CN" dirty="0"/>
-              <a:t>production</a:t>
-            </a:r>
-            <a:r>
-              <a:rPr lang="zh-CN" altLang="en-US" dirty="0"/>
-              <a:t> </a:t>
-            </a:r>
-            <a:r>
-              <a:rPr lang="en-US" altLang="zh-CN" dirty="0"/>
-              <a:t>quality</a:t>
-            </a:r>
-            <a:r>
-              <a:rPr lang="zh-CN" altLang="en-US" dirty="0"/>
-              <a:t> </a:t>
-            </a:r>
-            <a:r>
-              <a:rPr lang="en-US" altLang="zh-CN" dirty="0"/>
-              <a:t>functional</a:t>
-            </a:r>
-            <a:r>
-              <a:rPr lang="zh-CN" altLang="en-US" dirty="0"/>
-              <a:t> </a:t>
-            </a:r>
-            <a:r>
-              <a:rPr lang="en-US" altLang="zh-CN" dirty="0"/>
-              <a:t>language</a:t>
-            </a:r>
-          </a:p>
-          <a:p>
-            <a:r>
-              <a:rPr lang="en-US" altLang="zh-CN" dirty="0">
-                <a:solidFill>
-                  <a:srgbClr val="0000FF"/>
-                </a:solidFill>
-              </a:rPr>
-              <a:t>Assignments</a:t>
-            </a:r>
-          </a:p>
-          <a:p>
-            <a:pPr lvl="1"/>
-            <a:r>
-              <a:rPr lang="en-US" altLang="zh-CN" dirty="0">
-                <a:solidFill>
-                  <a:srgbClr val="0000FF"/>
-                </a:solidFill>
-              </a:rPr>
-              <a:t>Arithmetic</a:t>
-            </a:r>
-          </a:p>
-          <a:p>
-            <a:pPr lvl="1"/>
-            <a:r>
-              <a:rPr lang="en-US" altLang="zh-CN" dirty="0">
-                <a:solidFill>
-                  <a:srgbClr val="0000FF"/>
-                </a:solidFill>
-              </a:rPr>
-              <a:t>Lambda</a:t>
-            </a:r>
-            <a:r>
-              <a:rPr lang="zh-CN" altLang="en-US" dirty="0">
-                <a:solidFill>
-                  <a:srgbClr val="0000FF"/>
-                </a:solidFill>
-              </a:rPr>
-              <a:t> </a:t>
-            </a:r>
-            <a:r>
-              <a:rPr lang="en-US" altLang="zh-CN" dirty="0">
-                <a:solidFill>
-                  <a:srgbClr val="0000FF"/>
-                </a:solidFill>
-              </a:rPr>
-              <a:t>calculus</a:t>
-            </a:r>
-          </a:p>
-          <a:p>
-            <a:pPr lvl="1"/>
-            <a:r>
-              <a:rPr lang="en-US" altLang="zh-CN" dirty="0">
-                <a:solidFill>
-                  <a:srgbClr val="0000FF"/>
-                </a:solidFill>
-              </a:rPr>
-              <a:t>Polymorphism</a:t>
-            </a:r>
-          </a:p>
-          <a:p>
-            <a:pPr lvl="1"/>
-            <a:r>
-              <a:rPr lang="en-US" altLang="zh-CN" dirty="0">
-                <a:solidFill>
-                  <a:srgbClr val="0000FF"/>
-                </a:solidFill>
-              </a:rPr>
-              <a:t>Type</a:t>
-            </a:r>
-            <a:r>
-              <a:rPr lang="zh-CN" altLang="en-US" dirty="0">
-                <a:solidFill>
-                  <a:srgbClr val="0000FF"/>
-                </a:solidFill>
-              </a:rPr>
-              <a:t> </a:t>
-            </a:r>
-            <a:r>
-              <a:rPr lang="en-US" altLang="zh-CN" dirty="0">
-                <a:solidFill>
-                  <a:srgbClr val="0000FF"/>
-                </a:solidFill>
-              </a:rPr>
-              <a:t>inference</a:t>
-            </a:r>
-          </a:p>
-          <a:p>
-            <a:pPr lvl="1"/>
-            <a:r>
-              <a:rPr lang="en-US" altLang="zh-CN" dirty="0">
-                <a:solidFill>
-                  <a:srgbClr val="0000FF"/>
-                </a:solidFill>
-              </a:rPr>
-              <a:t>…</a:t>
-            </a:r>
-          </a:p>
-          <a:p>
-            <a:pPr lvl="1"/>
-            <a:endParaRPr lang="en-US" altLang="zh-CN" i="1" dirty="0">
-              <a:solidFill>
-                <a:srgbClr val="0000FF"/>
-              </a:solidFill>
-            </a:endParaRPr>
+              <a:t>Fun</a:t>
+            </a:r>
+            <a:r>
+              <a:rPr lang="zh-CN" altLang="en-US" dirty="0"/>
+              <a:t> </a:t>
+            </a:r>
+            <a:r>
+              <a:rPr lang="en-US" altLang="zh-CN" dirty="0"/>
+              <a:t>and</a:t>
+            </a:r>
+            <a:r>
+              <a:rPr lang="zh-CN" altLang="en-US" dirty="0"/>
+              <a:t> </a:t>
+            </a:r>
+            <a:r>
+              <a:rPr lang="en-US" altLang="zh-CN" dirty="0"/>
+              <a:t>profitable</a:t>
+            </a:r>
           </a:p>
         </p:txBody>
       </p:sp>
     </p:spTree>
-    <p:extLst>
-      <p:ext uri="{BB962C8B-B14F-4D97-AF65-F5344CB8AC3E}">
-        <p14:creationId xmlns:p14="http://schemas.microsoft.com/office/powerpoint/2010/main" val="48302392"/>
-      </p:ext>
-    </p:extLst>
   </p:cSld>
   <p:clrMapOvr>
     <a:masterClrMapping/>
@@ -6098,10 +5894,10 @@
       </p:grpSpPr>
       <p:sp>
         <p:nvSpPr>
-          <p:cNvPr id="92162" name="Rectangle 2">
-            <a:extLst>
-              <a:ext uri="{FF2B5EF4-FFF2-40B4-BE49-F238E27FC236}">
-                <a16:creationId xmlns:a16="http://schemas.microsoft.com/office/drawing/2014/main" id="{0A5A60BF-10C8-9D43-8EF6-A81549643A73}"/>
+          <p:cNvPr id="101378" name="Rectangle 2">
+            <a:extLst>
+              <a:ext uri="{FF2B5EF4-FFF2-40B4-BE49-F238E27FC236}">
+                <a16:creationId xmlns:a16="http://schemas.microsoft.com/office/drawing/2014/main" id="{E6820052-551B-9841-9B1D-73DAFAA98FB6}"/>
               </a:ext>
             </a:extLst>
           </p:cNvPr>
@@ -6118,26 +5914,18 @@
           <a:lstStyle/>
           <a:p>
             <a:r>
-              <a:rPr lang="en-US" altLang="zh-CN" dirty="0"/>
-              <a:t>Grading</a:t>
-            </a:r>
-            <a:r>
-              <a:rPr lang="zh-CN" altLang="en-US" dirty="0"/>
-              <a:t> </a:t>
-            </a:r>
-            <a:r>
-              <a:rPr lang="en-US" altLang="zh-CN" dirty="0"/>
-              <a:t>(Tentative)</a:t>
-            </a:r>
-          </a:p>
-        </p:txBody>
-      </p:sp>
-      <p:sp>
-        <p:nvSpPr>
-          <p:cNvPr id="92163" name="Rectangle 3">
-            <a:extLst>
-              <a:ext uri="{FF2B5EF4-FFF2-40B4-BE49-F238E27FC236}">
-                <a16:creationId xmlns:a16="http://schemas.microsoft.com/office/drawing/2014/main" id="{5AA507DA-1851-2647-B0D8-1528A061BAEA}"/>
+              <a:rPr lang="en-US" altLang="zh-CN"/>
+              <a:t>Last Thing</a:t>
+            </a:r>
+          </a:p>
+        </p:txBody>
+      </p:sp>
+      <p:sp>
+        <p:nvSpPr>
+          <p:cNvPr id="101379" name="Rectangle 3">
+            <a:extLst>
+              <a:ext uri="{FF2B5EF4-FFF2-40B4-BE49-F238E27FC236}">
+                <a16:creationId xmlns:a16="http://schemas.microsoft.com/office/drawing/2014/main" id="{FF055EF3-8773-A448-B1C8-6424352A3B0E}"/>
               </a:ext>
             </a:extLst>
           </p:cNvPr>
@@ -6155,291 +5943,13 @@
           <a:p>
             <a:r>
               <a:rPr lang="en-US" altLang="zh-CN" dirty="0"/>
-              <a:t>50% for assignment</a:t>
-            </a:r>
-            <a:r>
-              <a:rPr lang="zh-CN" altLang="en-US" dirty="0"/>
-              <a:t> </a:t>
-            </a:r>
-            <a:r>
-              <a:rPr lang="en-US" altLang="zh-CN" dirty="0"/>
-              <a:t>and</a:t>
-            </a:r>
-            <a:r>
-              <a:rPr lang="zh-CN" altLang="en-US" dirty="0"/>
-              <a:t> </a:t>
-            </a:r>
-            <a:r>
-              <a:rPr lang="en-US" altLang="zh-CN"/>
-              <a:t>project</a:t>
-            </a:r>
-            <a:endParaRPr lang="en-US" altLang="zh-CN" dirty="0"/>
-          </a:p>
-          <a:p>
-            <a:r>
-              <a:rPr lang="en-US" altLang="zh-CN" dirty="0"/>
-              <a:t>50% for final test</a:t>
-            </a:r>
-          </a:p>
-        </p:txBody>
-      </p:sp>
-    </p:spTree>
-  </p:cSld>
-  <p:clrMapOvr>
-    <a:masterClrMapping/>
-  </p:clrMapOvr>
-</p:sld>
-</file>
-
-<file path=ppt/slides/slide15.xml><?xml version="1.0" encoding="utf-8"?>
-<p:sld xmlns:a="http://schemas.openxmlformats.org/drawingml/2006/main" xmlns:r="http://schemas.openxmlformats.org/officeDocument/2006/relationships" xmlns:p="http://schemas.openxmlformats.org/presentationml/2006/main">
-  <p:cSld>
-    <p:spTree>
-      <p:nvGrpSpPr>
-        <p:cNvPr id="1" name=""/>
-        <p:cNvGrpSpPr/>
-        <p:nvPr/>
-      </p:nvGrpSpPr>
-      <p:grpSpPr>
-        <a:xfrm>
-          <a:off x="0" y="0"/>
-          <a:ext cx="0" cy="0"/>
-          <a:chOff x="0" y="0"/>
-          <a:chExt cx="0" cy="0"/>
-        </a:xfrm>
-      </p:grpSpPr>
-      <p:sp>
-        <p:nvSpPr>
-          <p:cNvPr id="100354" name="Rectangle 2">
-            <a:extLst>
-              <a:ext uri="{FF2B5EF4-FFF2-40B4-BE49-F238E27FC236}">
-                <a16:creationId xmlns:a16="http://schemas.microsoft.com/office/drawing/2014/main" id="{E093C3C5-239C-9043-9F58-737DAA205DD9}"/>
-              </a:ext>
-            </a:extLst>
-          </p:cNvPr>
-          <p:cNvSpPr>
-            <a:spLocks noGrp="1" noChangeArrowheads="1"/>
-          </p:cNvSpPr>
-          <p:nvPr>
-            <p:ph type="title"/>
-          </p:nvPr>
-        </p:nvSpPr>
-        <p:spPr/>
-        <p:txBody>
-          <a:bodyPr/>
-          <a:lstStyle/>
-          <a:p>
-            <a:r>
-              <a:rPr lang="en-US" altLang="zh-CN"/>
-              <a:t>Summary</a:t>
-            </a:r>
-          </a:p>
-        </p:txBody>
-      </p:sp>
-      <p:sp>
-        <p:nvSpPr>
-          <p:cNvPr id="100355" name="Rectangle 3">
-            <a:extLst>
-              <a:ext uri="{FF2B5EF4-FFF2-40B4-BE49-F238E27FC236}">
-                <a16:creationId xmlns:a16="http://schemas.microsoft.com/office/drawing/2014/main" id="{D7D785B2-94A1-C74E-AF7E-48DFC6F337EC}"/>
-              </a:ext>
-            </a:extLst>
-          </p:cNvPr>
-          <p:cNvSpPr>
-            <a:spLocks noGrp="1" noChangeArrowheads="1"/>
-          </p:cNvSpPr>
-          <p:nvPr>
-            <p:ph type="body" idx="1"/>
-          </p:nvPr>
-        </p:nvSpPr>
-        <p:spPr/>
-        <p:txBody>
-          <a:bodyPr/>
-          <a:lstStyle/>
-          <a:p>
-            <a:r>
-              <a:rPr lang="en-US" altLang="zh-CN" dirty="0"/>
-              <a:t>This is a practice-oriented course</a:t>
-            </a:r>
-          </a:p>
-          <a:p>
-            <a:r>
-              <a:rPr lang="en-US" altLang="zh-CN" dirty="0"/>
-              <a:t>Have</a:t>
-            </a:r>
-            <a:r>
-              <a:rPr lang="zh-CN" altLang="en-US" dirty="0"/>
-              <a:t> </a:t>
-            </a:r>
-            <a:r>
-              <a:rPr lang="en-US" altLang="zh-CN" dirty="0"/>
-              <a:t>a</a:t>
-            </a:r>
-            <a:r>
-              <a:rPr lang="zh-CN" altLang="en-US" dirty="0"/>
-              <a:t> </a:t>
-            </a:r>
-            <a:r>
-              <a:rPr lang="en-US" altLang="zh-CN" dirty="0"/>
-              <a:t>thorough</a:t>
-            </a:r>
-            <a:r>
-              <a:rPr lang="zh-CN" altLang="en-US" dirty="0"/>
-              <a:t> </a:t>
-            </a:r>
-            <a:r>
-              <a:rPr lang="en-US" altLang="zh-CN" dirty="0"/>
-              <a:t>understanding</a:t>
-            </a:r>
-            <a:r>
-              <a:rPr lang="zh-CN" altLang="en-US" dirty="0"/>
-              <a:t> </a:t>
-            </a:r>
-            <a:r>
-              <a:rPr lang="en-US" altLang="zh-CN" dirty="0"/>
-              <a:t>of</a:t>
-            </a:r>
-            <a:r>
-              <a:rPr lang="zh-CN" altLang="en-US" dirty="0"/>
-              <a:t> </a:t>
-            </a:r>
-            <a:r>
-              <a:rPr lang="en-US" altLang="zh-CN" dirty="0"/>
-              <a:t>principles</a:t>
-            </a:r>
-            <a:r>
-              <a:rPr lang="zh-CN" altLang="en-US" dirty="0"/>
-              <a:t> </a:t>
-            </a:r>
-            <a:r>
-              <a:rPr lang="en-US" altLang="zh-CN" dirty="0"/>
-              <a:t>for</a:t>
-            </a:r>
-            <a:r>
-              <a:rPr lang="zh-CN" altLang="en-US" dirty="0"/>
-              <a:t> </a:t>
-            </a:r>
-            <a:r>
-              <a:rPr lang="en-US" altLang="zh-CN" dirty="0"/>
-              <a:t>programming</a:t>
-            </a:r>
-            <a:r>
-              <a:rPr lang="zh-CN" altLang="en-US" dirty="0"/>
-              <a:t> </a:t>
-            </a:r>
-            <a:r>
-              <a:rPr lang="en-US" altLang="zh-CN" dirty="0"/>
-              <a:t>languages for heterogeneous platforms</a:t>
+              <a:t>Read the textbook</a:t>
             </a:r>
           </a:p>
           <a:p>
             <a:pPr lvl="1"/>
             <a:r>
               <a:rPr lang="en-US" altLang="zh-CN" dirty="0"/>
-              <a:t>Fun</a:t>
-            </a:r>
-            <a:r>
-              <a:rPr lang="zh-CN" altLang="en-US" dirty="0"/>
-              <a:t> </a:t>
-            </a:r>
-            <a:r>
-              <a:rPr lang="en-US" altLang="zh-CN" dirty="0"/>
-              <a:t>and</a:t>
-            </a:r>
-            <a:r>
-              <a:rPr lang="zh-CN" altLang="en-US" dirty="0"/>
-              <a:t> </a:t>
-            </a:r>
-            <a:r>
-              <a:rPr lang="en-US" altLang="zh-CN" dirty="0"/>
-              <a:t>profitable</a:t>
-            </a:r>
-          </a:p>
-        </p:txBody>
-      </p:sp>
-    </p:spTree>
-  </p:cSld>
-  <p:clrMapOvr>
-    <a:masterClrMapping/>
-  </p:clrMapOvr>
-</p:sld>
-</file>
-
-<file path=ppt/slides/slide16.xml><?xml version="1.0" encoding="utf-8"?>
-<p:sld xmlns:a="http://schemas.openxmlformats.org/drawingml/2006/main" xmlns:r="http://schemas.openxmlformats.org/officeDocument/2006/relationships" xmlns:p="http://schemas.openxmlformats.org/presentationml/2006/main">
-  <p:cSld>
-    <p:spTree>
-      <p:nvGrpSpPr>
-        <p:cNvPr id="1" name=""/>
-        <p:cNvGrpSpPr/>
-        <p:nvPr/>
-      </p:nvGrpSpPr>
-      <p:grpSpPr>
-        <a:xfrm>
-          <a:off x="0" y="0"/>
-          <a:ext cx="0" cy="0"/>
-          <a:chOff x="0" y="0"/>
-          <a:chExt cx="0" cy="0"/>
-        </a:xfrm>
-      </p:grpSpPr>
-      <p:sp>
-        <p:nvSpPr>
-          <p:cNvPr id="101378" name="Rectangle 2">
-            <a:extLst>
-              <a:ext uri="{FF2B5EF4-FFF2-40B4-BE49-F238E27FC236}">
-                <a16:creationId xmlns:a16="http://schemas.microsoft.com/office/drawing/2014/main" id="{E6820052-551B-9841-9B1D-73DAFAA98FB6}"/>
-              </a:ext>
-            </a:extLst>
-          </p:cNvPr>
-          <p:cNvSpPr>
-            <a:spLocks noGrp="1" noChangeArrowheads="1"/>
-          </p:cNvSpPr>
-          <p:nvPr>
-            <p:ph type="title"/>
-          </p:nvPr>
-        </p:nvSpPr>
-        <p:spPr/>
-        <p:txBody>
-          <a:bodyPr/>
-          <a:lstStyle/>
-          <a:p>
-            <a:r>
-              <a:rPr lang="en-US" altLang="zh-CN"/>
-              <a:t>Last Thing</a:t>
-            </a:r>
-          </a:p>
-        </p:txBody>
-      </p:sp>
-      <p:sp>
-        <p:nvSpPr>
-          <p:cNvPr id="101379" name="Rectangle 3">
-            <a:extLst>
-              <a:ext uri="{FF2B5EF4-FFF2-40B4-BE49-F238E27FC236}">
-                <a16:creationId xmlns:a16="http://schemas.microsoft.com/office/drawing/2014/main" id="{FF055EF3-8773-A448-B1C8-6424352A3B0E}"/>
-              </a:ext>
-            </a:extLst>
-          </p:cNvPr>
-          <p:cNvSpPr>
-            <a:spLocks noGrp="1" noChangeArrowheads="1"/>
-          </p:cNvSpPr>
-          <p:nvPr>
-            <p:ph type="body" idx="1"/>
-          </p:nvPr>
-        </p:nvSpPr>
-        <p:spPr/>
-        <p:txBody>
-          <a:bodyPr/>
-          <a:lstStyle/>
-          <a:p>
-            <a:r>
-              <a:rPr lang="en-US" altLang="zh-CN" dirty="0"/>
-              <a:t>Read the textbook</a:t>
-            </a:r>
-          </a:p>
-          <a:p>
-            <a:pPr lvl="1"/>
-            <a:r>
-              <a:rPr lang="en-US" altLang="zh-CN" dirty="0"/>
               <a:t>Chap</a:t>
             </a:r>
             <a:r>
@@ -6454,22 +5964,15 @@
           <a:p>
             <a:r>
               <a:rPr lang="en-US" altLang="zh-CN" dirty="0"/>
-              <a:t>Install the software</a:t>
-            </a:r>
-          </a:p>
-          <a:p>
-            <a:pPr lvl="1"/>
-            <a:r>
-              <a:rPr lang="en-US" altLang="zh-CN" dirty="0"/>
-              <a:t>By</a:t>
-            </a:r>
-            <a:r>
-              <a:rPr lang="zh-CN" altLang="en-US" dirty="0"/>
-              <a:t> </a:t>
-            </a:r>
-            <a:r>
-              <a:rPr lang="en-US" altLang="zh-CN" dirty="0"/>
-              <a:t>finishing</a:t>
+              <a:t>Start</a:t>
+            </a:r>
+            <a:r>
+              <a:rPr lang="zh-CN" altLang="en-US" dirty="0"/>
+              <a:t> </a:t>
+            </a:r>
+            <a:r>
+              <a:rPr lang="en-US" altLang="zh-CN" dirty="0"/>
+              <a:t>with</a:t>
             </a:r>
             <a:r>
               <a:rPr lang="zh-CN" altLang="en-US" dirty="0"/>
@@ -6548,32 +6051,24 @@
           <a:lstStyle/>
           <a:p>
             <a:r>
-              <a:rPr lang="en-US" altLang="zh-CN"/>
-              <a:t>What is</a:t>
-            </a:r>
-            <a:r>
-              <a:rPr lang="zh-CN" altLang="en-US" dirty="0"/>
-              <a:t> </a:t>
-            </a:r>
-            <a:r>
-              <a:rPr lang="en-US" altLang="zh-CN" dirty="0"/>
-              <a:t>this</a:t>
-            </a:r>
-            <a:r>
-              <a:rPr lang="zh-CN" altLang="en-US" dirty="0"/>
-              <a:t> </a:t>
-            </a:r>
-            <a:r>
-              <a:rPr lang="en-US" altLang="zh-CN" dirty="0"/>
-              <a:t>course</a:t>
-            </a:r>
-            <a:r>
-              <a:rPr lang="zh-CN" altLang="en-US" dirty="0"/>
-              <a:t> </a:t>
-            </a:r>
-            <a:r>
-              <a:rPr lang="en-US" altLang="zh-CN" dirty="0"/>
-              <a:t>about?</a:t>
+              <a:rPr lang="en-US" altLang="zh-CN" dirty="0"/>
+              <a:t>What are</a:t>
+            </a:r>
+            <a:r>
+              <a:rPr lang="zh-CN" altLang="en-US" dirty="0"/>
+              <a:t> </a:t>
+            </a:r>
+            <a:r>
+              <a:rPr lang="en-US" altLang="zh-CN" dirty="0"/>
+              <a:t>programming</a:t>
+            </a:r>
+            <a:r>
+              <a:rPr lang="zh-CN" altLang="en-US" dirty="0"/>
+              <a:t> </a:t>
+            </a:r>
+            <a:r>
+              <a:rPr lang="en-US" altLang="zh-CN" dirty="0"/>
+              <a:t>languages?</a:t>
             </a:r>
           </a:p>
         </p:txBody>
@@ -6601,35 +6096,178 @@
           <a:p>
             <a:r>
               <a:rPr lang="en-US" altLang="zh-CN" dirty="0"/>
-              <a:t>The</a:t>
-            </a:r>
-            <a:r>
-              <a:rPr lang="zh-CN" altLang="en-US" dirty="0"/>
-              <a:t> </a:t>
-            </a:r>
-            <a:r>
-              <a:rPr lang="en-US" altLang="zh-CN" dirty="0">
-                <a:solidFill>
-                  <a:srgbClr val="0432FF"/>
-                </a:solidFill>
-              </a:rPr>
-              <a:t>semantics</a:t>
-            </a:r>
-            <a:r>
-              <a:rPr lang="zh-CN" altLang="en-US" dirty="0"/>
-              <a:t> </a:t>
-            </a:r>
-            <a:r>
-              <a:rPr lang="en-US" altLang="zh-CN" dirty="0"/>
-              <a:t>of</a:t>
-            </a:r>
-            <a:r>
-              <a:rPr lang="zh-CN" altLang="en-US" dirty="0"/>
-              <a:t> </a:t>
-            </a:r>
-            <a:r>
-              <a:rPr lang="en-US" altLang="zh-CN" dirty="0"/>
-              <a:t>programming</a:t>
+              <a:t>Very</a:t>
+            </a:r>
+            <a:r>
+              <a:rPr lang="zh-CN" altLang="en-US" dirty="0"/>
+              <a:t> </a:t>
+            </a:r>
+            <a:r>
+              <a:rPr lang="en-US" altLang="zh-CN" dirty="0"/>
+              <a:t>important</a:t>
+            </a:r>
+            <a:r>
+              <a:rPr lang="zh-CN" altLang="en-US" dirty="0"/>
+              <a:t> </a:t>
+            </a:r>
+            <a:r>
+              <a:rPr lang="en-US" altLang="zh-CN" dirty="0"/>
+              <a:t>fields,</a:t>
+            </a:r>
+            <a:r>
+              <a:rPr lang="zh-CN" altLang="en-US" dirty="0"/>
+              <a:t> </a:t>
+            </a:r>
+            <a:r>
+              <a:rPr lang="en-US" altLang="zh-CN" dirty="0"/>
+              <a:t>communication</a:t>
+            </a:r>
+            <a:r>
+              <a:rPr lang="zh-CN" altLang="en-US" dirty="0"/>
+              <a:t> </a:t>
+            </a:r>
+            <a:r>
+              <a:rPr lang="en-US" altLang="zh-CN" dirty="0"/>
+              <a:t>between</a:t>
+            </a:r>
+            <a:r>
+              <a:rPr lang="zh-CN" altLang="en-US" dirty="0"/>
+              <a:t> </a:t>
+            </a:r>
+            <a:r>
+              <a:rPr lang="en-US" altLang="zh-CN" dirty="0"/>
+              <a:t>programmers</a:t>
+            </a:r>
+            <a:r>
+              <a:rPr lang="zh-CN" altLang="en-US" dirty="0"/>
+              <a:t> </a:t>
+            </a:r>
+            <a:r>
+              <a:rPr lang="en-US" altLang="zh-CN" dirty="0"/>
+              <a:t>and</a:t>
+            </a:r>
+            <a:r>
+              <a:rPr lang="zh-CN" altLang="en-US" dirty="0"/>
+              <a:t> </a:t>
+            </a:r>
+            <a:r>
+              <a:rPr lang="en-US" altLang="zh-CN" dirty="0"/>
+              <a:t>HW</a:t>
+            </a:r>
+          </a:p>
+          <a:p>
+            <a:pPr lvl="1"/>
+            <a:r>
+              <a:rPr lang="en-US" altLang="zh-CN" dirty="0"/>
+              <a:t>model</a:t>
+            </a:r>
+            <a:r>
+              <a:rPr lang="zh-CN" altLang="en-US" dirty="0"/>
+              <a:t> </a:t>
+            </a:r>
+            <a:r>
+              <a:rPr lang="en-US" altLang="zh-CN" dirty="0"/>
+              <a:t>the</a:t>
+            </a:r>
+            <a:r>
+              <a:rPr lang="zh-CN" altLang="en-US" dirty="0"/>
+              <a:t> </a:t>
+            </a:r>
+            <a:r>
+              <a:rPr lang="en-US" altLang="zh-CN" dirty="0"/>
+              <a:t>HW</a:t>
+            </a:r>
+          </a:p>
+          <a:p>
+            <a:pPr lvl="1"/>
+            <a:r>
+              <a:rPr lang="en-US" altLang="zh-CN" dirty="0"/>
+              <a:t>express</a:t>
+            </a:r>
+            <a:r>
+              <a:rPr lang="zh-CN" altLang="en-US" dirty="0"/>
+              <a:t> </a:t>
+            </a:r>
+            <a:r>
+              <a:rPr lang="en-US" altLang="zh-CN" dirty="0"/>
+              <a:t>the</a:t>
+            </a:r>
+            <a:r>
+              <a:rPr lang="zh-CN" altLang="en-US" dirty="0"/>
+              <a:t> </a:t>
+            </a:r>
+            <a:r>
+              <a:rPr lang="en-US" altLang="zh-CN" dirty="0"/>
+              <a:t>abstraction</a:t>
+            </a:r>
+          </a:p>
+          <a:p>
+            <a:r>
+              <a:rPr lang="en-US" altLang="zh-CN" dirty="0"/>
+              <a:t>Very</a:t>
+            </a:r>
+            <a:r>
+              <a:rPr lang="zh-CN" altLang="en-US" dirty="0"/>
+              <a:t> </a:t>
+            </a:r>
+            <a:r>
+              <a:rPr lang="en-US" altLang="zh-CN" dirty="0"/>
+              <a:t>active</a:t>
+            </a:r>
+            <a:r>
+              <a:rPr lang="zh-CN" altLang="en-US" dirty="0"/>
+              <a:t> </a:t>
+            </a:r>
+            <a:r>
+              <a:rPr lang="en-US" altLang="zh-CN" dirty="0"/>
+              <a:t>fields,</a:t>
+            </a:r>
+            <a:r>
+              <a:rPr lang="zh-CN" altLang="en-US" dirty="0"/>
+              <a:t> </a:t>
+            </a:r>
+            <a:r>
+              <a:rPr lang="en-US" altLang="zh-CN" dirty="0"/>
+              <a:t>both</a:t>
+            </a:r>
+            <a:r>
+              <a:rPr lang="zh-CN" altLang="en-US" dirty="0"/>
+              <a:t> </a:t>
+            </a:r>
+            <a:r>
+              <a:rPr lang="en-US" altLang="zh-CN" dirty="0"/>
+              <a:t>in</a:t>
+            </a:r>
+            <a:r>
+              <a:rPr lang="zh-CN" altLang="en-US" dirty="0"/>
+              <a:t> </a:t>
+            </a:r>
+            <a:r>
+              <a:rPr lang="en-US" altLang="zh-CN" dirty="0"/>
+              <a:t>academia</a:t>
+            </a:r>
+            <a:r>
+              <a:rPr lang="zh-CN" altLang="en-US" dirty="0"/>
+              <a:t> </a:t>
+            </a:r>
+            <a:r>
+              <a:rPr lang="en-US" altLang="zh-CN" dirty="0"/>
+              <a:t>and</a:t>
+            </a:r>
+            <a:r>
+              <a:rPr lang="zh-CN" altLang="en-US" dirty="0"/>
+              <a:t> </a:t>
+            </a:r>
+            <a:r>
+              <a:rPr lang="en-US" altLang="zh-CN" dirty="0"/>
+              <a:t>industry</a:t>
+            </a:r>
+          </a:p>
+          <a:p>
+            <a:pPr lvl="1"/>
+            <a:r>
+              <a:rPr lang="en-US" altLang="zh-CN" dirty="0"/>
+              <a:t>new</a:t>
             </a:r>
             <a:r>
               <a:rPr lang="zh-CN" altLang="en-US" dirty="0"/>
@@ -6639,171 +6277,29 @@
               <a:rPr lang="en-US" altLang="zh-CN" dirty="0"/>
               <a:t>languages</a:t>
             </a:r>
-          </a:p>
-          <a:p>
-            <a:pPr lvl="1"/>
-            <a:r>
-              <a:rPr lang="en-US" altLang="zh-CN" dirty="0"/>
-              <a:t>Operational</a:t>
-            </a:r>
-            <a:r>
-              <a:rPr lang="zh-CN" altLang="en-US" dirty="0"/>
-              <a:t> </a:t>
-            </a:r>
-            <a:r>
-              <a:rPr lang="en-US" altLang="zh-CN" dirty="0"/>
-              <a:t>semantics</a:t>
-            </a:r>
-          </a:p>
-          <a:p>
-            <a:r>
-              <a:rPr lang="en-US" altLang="zh-CN" dirty="0"/>
-              <a:t>The</a:t>
-            </a:r>
-            <a:r>
-              <a:rPr lang="zh-CN" altLang="en-US" dirty="0"/>
-              <a:t> </a:t>
-            </a:r>
-            <a:r>
-              <a:rPr lang="en-US" altLang="zh-CN" dirty="0"/>
-              <a:t>basic</a:t>
-            </a:r>
-            <a:r>
-              <a:rPr lang="zh-CN" altLang="en-US" dirty="0"/>
-              <a:t> </a:t>
-            </a:r>
-            <a:r>
-              <a:rPr lang="en-US" altLang="zh-CN" dirty="0"/>
-              <a:t>and</a:t>
-            </a:r>
-            <a:r>
-              <a:rPr lang="zh-CN" altLang="en-US" dirty="0"/>
-              <a:t> </a:t>
-            </a:r>
-            <a:r>
-              <a:rPr lang="en-US" altLang="zh-CN" dirty="0">
-                <a:solidFill>
-                  <a:srgbClr val="0432FF"/>
-                </a:solidFill>
-              </a:rPr>
-              <a:t>formal</a:t>
-            </a:r>
-            <a:r>
-              <a:rPr lang="zh-CN" altLang="en-US" dirty="0"/>
-              <a:t> </a:t>
-            </a:r>
-            <a:r>
-              <a:rPr lang="en-US" altLang="zh-CN" dirty="0">
-                <a:solidFill>
-                  <a:srgbClr val="0432FF"/>
-                </a:solidFill>
-              </a:rPr>
-              <a:t>principles</a:t>
-            </a:r>
-            <a:r>
-              <a:rPr lang="zh-CN" altLang="en-US" dirty="0"/>
-              <a:t> </a:t>
-            </a:r>
-            <a:r>
-              <a:rPr lang="en-US" altLang="zh-CN" dirty="0"/>
-              <a:t>to</a:t>
-            </a:r>
-            <a:r>
-              <a:rPr lang="zh-CN" altLang="en-US" dirty="0"/>
-              <a:t> </a:t>
-            </a:r>
-            <a:r>
-              <a:rPr lang="en-US" altLang="zh-CN" dirty="0"/>
-              <a:t>describe</a:t>
-            </a:r>
-            <a:r>
-              <a:rPr lang="zh-CN" altLang="en-US" dirty="0"/>
-              <a:t> </a:t>
-            </a:r>
-            <a:r>
-              <a:rPr lang="en-US" altLang="zh-CN" dirty="0"/>
-              <a:t>program</a:t>
-            </a:r>
-            <a:r>
-              <a:rPr lang="zh-CN" altLang="en-US" dirty="0"/>
-              <a:t> </a:t>
-            </a:r>
-            <a:r>
-              <a:rPr lang="en-US" altLang="zh-CN" dirty="0"/>
-              <a:t>behaviors</a:t>
-            </a:r>
-          </a:p>
-          <a:p>
-            <a:pPr lvl="1"/>
-            <a:r>
-              <a:rPr lang="en-US" altLang="zh-CN" dirty="0"/>
-              <a:t>Type</a:t>
-            </a:r>
-            <a:r>
-              <a:rPr lang="zh-CN" altLang="en-US" dirty="0"/>
-              <a:t> </a:t>
-            </a:r>
-            <a:r>
-              <a:rPr lang="en-US" altLang="zh-CN" dirty="0"/>
-              <a:t>theory</a:t>
-            </a:r>
-          </a:p>
-          <a:p>
-            <a:r>
-              <a:rPr lang="en-US" altLang="zh-CN" dirty="0"/>
-              <a:t>The</a:t>
-            </a:r>
-            <a:r>
-              <a:rPr lang="zh-CN" altLang="en-US" dirty="0"/>
-              <a:t> </a:t>
-            </a:r>
-            <a:r>
-              <a:rPr lang="en-US" altLang="zh-CN" dirty="0"/>
-              <a:t>guiding</a:t>
-            </a:r>
-            <a:r>
-              <a:rPr lang="zh-CN" altLang="en-US" dirty="0"/>
-              <a:t> </a:t>
-            </a:r>
-            <a:r>
-              <a:rPr lang="en-US" altLang="zh-CN" dirty="0"/>
-              <a:t>line</a:t>
-            </a:r>
-            <a:r>
-              <a:rPr lang="zh-CN" altLang="en-US" dirty="0"/>
-              <a:t> </a:t>
-            </a:r>
-            <a:r>
-              <a:rPr lang="en-US" altLang="zh-CN" dirty="0"/>
-              <a:t>for</a:t>
-            </a:r>
-            <a:r>
-              <a:rPr lang="zh-CN" altLang="en-US" dirty="0"/>
-              <a:t> </a:t>
-            </a:r>
-            <a:r>
-              <a:rPr lang="en-US" altLang="zh-CN" dirty="0"/>
-              <a:t>new</a:t>
-            </a:r>
-            <a:r>
-              <a:rPr lang="zh-CN" altLang="en-US" dirty="0"/>
-              <a:t> </a:t>
-            </a:r>
-            <a:r>
-              <a:rPr lang="en-US" altLang="zh-CN" dirty="0"/>
-              <a:t>language</a:t>
-            </a:r>
-            <a:r>
-              <a:rPr lang="zh-CN" altLang="en-US" dirty="0"/>
-              <a:t> </a:t>
-            </a:r>
-            <a:r>
-              <a:rPr lang="en-US" altLang="zh-CN" dirty="0">
-                <a:solidFill>
-                  <a:srgbClr val="0432FF"/>
-                </a:solidFill>
-              </a:rPr>
-              <a:t>design</a:t>
+            <a:r>
+              <a:rPr lang="zh-CN" altLang="en-US" dirty="0"/>
+              <a:t> </a:t>
+            </a:r>
+            <a:r>
+              <a:rPr lang="en-US" altLang="zh-CN" dirty="0"/>
+              <a:t>are</a:t>
+            </a:r>
+            <a:r>
+              <a:rPr lang="zh-CN" altLang="en-US" dirty="0"/>
+              <a:t> </a:t>
+            </a:r>
+            <a:r>
+              <a:rPr lang="en-US" altLang="zh-CN" dirty="0"/>
+              <a:t>routinely</a:t>
+            </a:r>
+            <a:r>
+              <a:rPr lang="zh-CN" altLang="en-US" dirty="0"/>
+              <a:t> </a:t>
+            </a:r>
+            <a:r>
+              <a:rPr lang="en-US" altLang="zh-CN" dirty="0"/>
+              <a:t>developed</a:t>
             </a:r>
           </a:p>
         </p:txBody>
@@ -6861,7 +6357,15 @@
           <a:p>
             <a:r>
               <a:rPr lang="en-US" altLang="zh-CN" dirty="0"/>
-              <a:t>What’s</a:t>
+              <a:t>What</a:t>
+            </a:r>
+            <a:r>
+              <a:rPr lang="zh-CN" altLang="en-US" dirty="0"/>
+              <a:t> </a:t>
+            </a:r>
+            <a:r>
+              <a:rPr lang="en-US" altLang="zh-CN" dirty="0"/>
+              <a:t>is</a:t>
             </a:r>
             <a:r>
               <a:rPr lang="zh-CN" altLang="en-US" dirty="0"/>
@@ -6913,7 +6417,219 @@
           <a:p>
             <a:r>
               <a:rPr lang="en-US" altLang="zh-CN" dirty="0"/>
-              <a:t>We’ll</a:t>
+              <a:t>This</a:t>
+            </a:r>
+            <a:r>
+              <a:rPr lang="zh-CN" altLang="en-US" dirty="0"/>
+              <a:t> </a:t>
+            </a:r>
+            <a:r>
+              <a:rPr lang="en-US" altLang="zh-CN" dirty="0"/>
+              <a:t>year,</a:t>
+            </a:r>
+            <a:r>
+              <a:rPr lang="zh-CN" altLang="en-US" dirty="0"/>
+              <a:t> </a:t>
+            </a:r>
+            <a:r>
+              <a:rPr lang="en-US" altLang="zh-CN" dirty="0"/>
+              <a:t>we</a:t>
+            </a:r>
+            <a:r>
+              <a:rPr lang="zh-CN" altLang="en-US" dirty="0"/>
+              <a:t> </a:t>
+            </a:r>
+            <a:r>
+              <a:rPr lang="en-US" altLang="zh-CN" dirty="0"/>
+              <a:t>will</a:t>
+            </a:r>
+            <a:r>
+              <a:rPr lang="zh-CN" altLang="en-US" dirty="0"/>
+              <a:t> </a:t>
+            </a:r>
+            <a:r>
+              <a:rPr lang="en-US" altLang="zh-CN" dirty="0"/>
+              <a:t>discuss</a:t>
+            </a:r>
+            <a:r>
+              <a:rPr lang="zh-CN" altLang="en-US" dirty="0"/>
+              <a:t> </a:t>
+            </a:r>
+            <a:r>
+              <a:rPr lang="en-US" altLang="zh-CN" dirty="0"/>
+              <a:t>languages</a:t>
+            </a:r>
+            <a:r>
+              <a:rPr lang="zh-CN" altLang="en-US" dirty="0"/>
+              <a:t> </a:t>
+            </a:r>
+            <a:r>
+              <a:rPr lang="en-US" altLang="zh-CN" dirty="0"/>
+              <a:t>and</a:t>
+            </a:r>
+            <a:r>
+              <a:rPr lang="zh-CN" altLang="en-US" dirty="0"/>
+              <a:t> </a:t>
+            </a:r>
+            <a:r>
+              <a:rPr lang="en-US" altLang="zh-CN" dirty="0"/>
+              <a:t>systems</a:t>
+            </a:r>
+            <a:r>
+              <a:rPr lang="zh-CN" altLang="en-US" dirty="0"/>
+              <a:t> </a:t>
+            </a:r>
+            <a:r>
+              <a:rPr lang="en-US" altLang="zh-CN" dirty="0"/>
+              <a:t>for</a:t>
+            </a:r>
+            <a:r>
+              <a:rPr lang="zh-CN" altLang="en-US" dirty="0"/>
+              <a:t> </a:t>
+            </a:r>
+            <a:r>
+              <a:rPr lang="en-US" altLang="zh-CN" dirty="0"/>
+              <a:t>heterogeneous</a:t>
+            </a:r>
+            <a:r>
+              <a:rPr lang="zh-CN" altLang="en-US" dirty="0"/>
+              <a:t> </a:t>
+            </a:r>
+            <a:r>
+              <a:rPr lang="en-US" altLang="zh-CN" dirty="0"/>
+              <a:t>platforms</a:t>
+            </a:r>
+          </a:p>
+          <a:p>
+            <a:pPr lvl="1"/>
+            <a:r>
+              <a:rPr lang="en-US" altLang="zh-CN" dirty="0"/>
+              <a:t>GPU,</a:t>
+            </a:r>
+            <a:r>
+              <a:rPr lang="zh-CN" altLang="en-US" dirty="0"/>
+              <a:t> </a:t>
+            </a:r>
+            <a:r>
+              <a:rPr lang="en-US" altLang="zh-CN" dirty="0"/>
+              <a:t>NPU,</a:t>
+            </a:r>
+            <a:r>
+              <a:rPr lang="zh-CN" altLang="en-US" dirty="0"/>
+              <a:t> </a:t>
+            </a:r>
+            <a:r>
+              <a:rPr lang="en-US" altLang="zh-CN" dirty="0"/>
+              <a:t>TPU,</a:t>
+            </a:r>
+            <a:r>
+              <a:rPr lang="zh-CN" altLang="en-US" dirty="0"/>
+              <a:t> </a:t>
+            </a:r>
+            <a:r>
+              <a:rPr lang="en-US" altLang="zh-CN" dirty="0"/>
+              <a:t>ASIC,</a:t>
+            </a:r>
+            <a:r>
+              <a:rPr lang="zh-CN" altLang="en-US" dirty="0"/>
+              <a:t> </a:t>
+            </a:r>
+            <a:r>
+              <a:rPr lang="en-US" altLang="zh-CN" dirty="0"/>
+              <a:t>etc.</a:t>
+            </a:r>
+          </a:p>
+          <a:p>
+            <a:r>
+              <a:rPr lang="en-US" altLang="zh-CN" dirty="0"/>
+              <a:t>With</a:t>
+            </a:r>
+            <a:r>
+              <a:rPr lang="zh-CN" altLang="en-US" dirty="0"/>
+              <a:t> </a:t>
+            </a:r>
+            <a:r>
+              <a:rPr lang="en-US" altLang="zh-CN" dirty="0"/>
+              <a:t>a</a:t>
+            </a:r>
+            <a:r>
+              <a:rPr lang="zh-CN" altLang="en-US" dirty="0"/>
+              <a:t> </a:t>
+            </a:r>
+            <a:r>
+              <a:rPr lang="en-US" altLang="zh-CN" dirty="0"/>
+              <a:t>focus</a:t>
+            </a:r>
+            <a:r>
+              <a:rPr lang="zh-CN" altLang="en-US" dirty="0"/>
+              <a:t> </a:t>
+            </a:r>
+            <a:r>
+              <a:rPr lang="en-US" altLang="zh-CN" dirty="0"/>
+              <a:t>on</a:t>
+            </a:r>
+            <a:r>
+              <a:rPr lang="zh-CN" altLang="en-US" dirty="0"/>
+              <a:t> </a:t>
+            </a:r>
+            <a:r>
+              <a:rPr lang="en-US" altLang="zh-CN" dirty="0"/>
+              <a:t>languages</a:t>
+            </a:r>
+            <a:r>
+              <a:rPr lang="zh-CN" altLang="en-US" dirty="0"/>
+              <a:t> </a:t>
+            </a:r>
+            <a:r>
+              <a:rPr lang="en-US" altLang="zh-CN" dirty="0"/>
+              <a:t>and</a:t>
+            </a:r>
+            <a:r>
+              <a:rPr lang="zh-CN" altLang="en-US" dirty="0"/>
+              <a:t> </a:t>
+            </a:r>
+            <a:r>
+              <a:rPr lang="en-US" altLang="zh-CN" dirty="0"/>
+              <a:t>abstractions</a:t>
+            </a:r>
+            <a:r>
+              <a:rPr lang="zh-CN" altLang="en-US" dirty="0"/>
+              <a:t> </a:t>
+            </a:r>
+            <a:r>
+              <a:rPr lang="en-US" altLang="zh-CN" dirty="0"/>
+              <a:t>for</a:t>
+            </a:r>
+            <a:r>
+              <a:rPr lang="zh-CN" altLang="en-US" dirty="0"/>
+              <a:t> </a:t>
+            </a:r>
+            <a:r>
+              <a:rPr lang="en-US" altLang="zh-CN" dirty="0"/>
+              <a:t>GPUs</a:t>
+            </a:r>
+          </a:p>
+          <a:p>
+            <a:pPr lvl="1"/>
+            <a:r>
+              <a:rPr lang="en-US" altLang="zh-CN" dirty="0"/>
+              <a:t>which</a:t>
+            </a:r>
+            <a:r>
+              <a:rPr lang="zh-CN" altLang="en-US" dirty="0"/>
+              <a:t> </a:t>
+            </a:r>
+            <a:r>
+              <a:rPr lang="en-US" altLang="zh-CN" dirty="0"/>
+              <a:t>is</a:t>
+            </a:r>
+            <a:r>
+              <a:rPr lang="zh-CN" altLang="en-US" dirty="0"/>
+              <a:t> </a:t>
+            </a:r>
+            <a:r>
+              <a:rPr lang="en-US" altLang="zh-CN" dirty="0"/>
+              <a:t>arguably</a:t>
             </a:r>
             <a:r>
               <a:rPr lang="zh-CN" altLang="en-US" dirty="0"/>
@@ -6929,178 +6645,23 @@
             </a:r>
             <a:r>
               <a:rPr lang="en-US" altLang="zh-CN" dirty="0"/>
-              <a:t>techniques</a:t>
-            </a:r>
-            <a:r>
-              <a:rPr lang="zh-CN" altLang="en-US" dirty="0"/>
-              <a:t> </a:t>
-            </a:r>
-            <a:r>
-              <a:rPr lang="en-US" altLang="zh-CN" dirty="0"/>
-              <a:t>to</a:t>
-            </a:r>
-            <a:r>
-              <a:rPr lang="zh-CN" altLang="en-US" dirty="0"/>
-              <a:t> </a:t>
-            </a:r>
-            <a:r>
-              <a:rPr lang="en-US" altLang="zh-CN" dirty="0"/>
-              <a:t>reason</a:t>
-            </a:r>
-            <a:r>
-              <a:rPr lang="zh-CN" altLang="en-US" dirty="0"/>
-              <a:t> </a:t>
-            </a:r>
-            <a:r>
-              <a:rPr lang="en-US" altLang="zh-CN" dirty="0"/>
-              <a:t>about</a:t>
-            </a:r>
-            <a:r>
-              <a:rPr lang="zh-CN" altLang="en-US" dirty="0"/>
-              <a:t> </a:t>
-            </a:r>
-            <a:r>
-              <a:rPr lang="en-US" altLang="zh-CN" dirty="0"/>
-              <a:t>program</a:t>
-            </a:r>
-            <a:r>
-              <a:rPr lang="zh-CN" altLang="en-US" dirty="0"/>
-              <a:t> </a:t>
-            </a:r>
-            <a:r>
-              <a:rPr lang="en-US" altLang="zh-CN" dirty="0"/>
-              <a:t>rigorously</a:t>
-            </a:r>
-          </a:p>
-          <a:p>
-            <a:pPr lvl="1"/>
-            <a:r>
-              <a:rPr lang="en-US" altLang="zh-CN" dirty="0"/>
-              <a:t>Using</a:t>
-            </a:r>
-            <a:r>
-              <a:rPr lang="zh-CN" altLang="en-US" dirty="0"/>
-              <a:t> </a:t>
-            </a:r>
-            <a:r>
-              <a:rPr lang="en-US" altLang="zh-CN" dirty="0"/>
-              <a:t>mathematics</a:t>
-            </a:r>
-          </a:p>
-          <a:p>
-            <a:r>
-              <a:rPr lang="en-US" altLang="zh-CN" dirty="0"/>
-              <a:t>&amp;</a:t>
-            </a:r>
-            <a:r>
-              <a:rPr lang="zh-CN" altLang="en-US" dirty="0"/>
-              <a:t> </a:t>
-            </a:r>
-            <a:r>
-              <a:rPr lang="en-US" altLang="zh-CN" dirty="0"/>
-              <a:t>abstractly</a:t>
-            </a:r>
-          </a:p>
-          <a:p>
-            <a:pPr lvl="1"/>
-            <a:r>
-              <a:rPr lang="en-US" altLang="zh-CN" dirty="0"/>
-              <a:t>So</a:t>
-            </a:r>
-            <a:r>
-              <a:rPr lang="zh-CN" altLang="en-US" dirty="0"/>
-              <a:t> </a:t>
-            </a:r>
-            <a:r>
-              <a:rPr lang="en-US" altLang="zh-CN" dirty="0"/>
-              <a:t>the</a:t>
-            </a:r>
-            <a:r>
-              <a:rPr lang="zh-CN" altLang="en-US" dirty="0"/>
-              <a:t> </a:t>
-            </a:r>
-            <a:r>
-              <a:rPr lang="en-US" altLang="zh-CN" dirty="0"/>
-              <a:t>principles</a:t>
-            </a:r>
-            <a:r>
-              <a:rPr lang="zh-CN" altLang="en-US" dirty="0"/>
-              <a:t> </a:t>
-            </a:r>
-            <a:r>
-              <a:rPr lang="en-US" altLang="zh-CN" dirty="0"/>
-              <a:t>can</a:t>
-            </a:r>
-            <a:r>
-              <a:rPr lang="zh-CN" altLang="en-US" dirty="0"/>
-              <a:t> </a:t>
-            </a:r>
-            <a:r>
-              <a:rPr lang="en-US" altLang="zh-CN" dirty="0"/>
-              <a:t>apply</a:t>
-            </a:r>
-            <a:r>
-              <a:rPr lang="zh-CN" altLang="en-US" dirty="0"/>
-              <a:t> </a:t>
-            </a:r>
-            <a:r>
-              <a:rPr lang="en-US" altLang="zh-CN" dirty="0"/>
-              <a:t>to</a:t>
-            </a:r>
-            <a:r>
-              <a:rPr lang="zh-CN" altLang="en-US" dirty="0"/>
-              <a:t> </a:t>
-            </a:r>
-            <a:r>
-              <a:rPr lang="en-US" altLang="zh-CN" dirty="0"/>
-              <a:t>many</a:t>
-            </a:r>
-            <a:r>
-              <a:rPr lang="zh-CN" altLang="en-US" dirty="0"/>
-              <a:t> </a:t>
-            </a:r>
-            <a:r>
-              <a:rPr lang="en-US" altLang="zh-CN" dirty="0"/>
-              <a:t>languages</a:t>
-            </a:r>
-          </a:p>
-          <a:p>
-            <a:pPr lvl="1"/>
-            <a:r>
-              <a:rPr lang="en-US" altLang="zh-CN" dirty="0"/>
-              <a:t>Even</a:t>
-            </a:r>
-            <a:r>
-              <a:rPr lang="zh-CN" altLang="en-US" dirty="0"/>
-              <a:t> </a:t>
-            </a:r>
-            <a:r>
-              <a:rPr lang="en-US" altLang="zh-CN" dirty="0"/>
-              <a:t>to</a:t>
-            </a:r>
-            <a:r>
-              <a:rPr lang="zh-CN" altLang="en-US" dirty="0"/>
-              <a:t> </a:t>
-            </a:r>
-            <a:r>
-              <a:rPr lang="en-US" altLang="zh-CN" dirty="0"/>
-              <a:t>languages</a:t>
-            </a:r>
-            <a:r>
-              <a:rPr lang="zh-CN" altLang="en-US" dirty="0"/>
-              <a:t> </a:t>
-            </a:r>
-            <a:r>
-              <a:rPr lang="en-US" altLang="zh-CN" dirty="0"/>
-              <a:t>of</a:t>
-            </a:r>
-            <a:r>
-              <a:rPr lang="zh-CN" altLang="en-US" dirty="0"/>
-              <a:t> </a:t>
-            </a:r>
-            <a:r>
-              <a:rPr lang="en-US" altLang="zh-CN" dirty="0"/>
-              <a:t>tomorrow</a:t>
+              <a:t>most</a:t>
+            </a:r>
+            <a:r>
+              <a:rPr lang="zh-CN" altLang="en-US" dirty="0"/>
+              <a:t> </a:t>
+            </a:r>
+            <a:r>
+              <a:rPr lang="en-US" altLang="zh-CN" dirty="0"/>
+              <a:t>popular</a:t>
+            </a:r>
+            <a:r>
+              <a:rPr lang="zh-CN" altLang="en-US" dirty="0"/>
+              <a:t> </a:t>
+            </a:r>
+            <a:r>
+              <a:rPr lang="en-US" altLang="zh-CN" dirty="0"/>
+              <a:t>one</a:t>
             </a:r>
           </a:p>
         </p:txBody>
@@ -7223,44 +6784,41 @@
             </a:pPr>
             <a:r>
               <a:rPr lang="en-US" altLang="zh-CN" dirty="0"/>
-              <a:t>Programming</a:t>
-            </a:r>
-            <a:r>
-              <a:rPr lang="zh-CN" altLang="en-US" dirty="0"/>
-              <a:t> </a:t>
-            </a:r>
-            <a:r>
-              <a:rPr lang="en-US" altLang="zh-CN" dirty="0"/>
-              <a:t>language</a:t>
-            </a:r>
-            <a:r>
-              <a:rPr lang="zh-CN" altLang="en-US" dirty="0"/>
-              <a:t> </a:t>
-            </a:r>
-            <a:r>
-              <a:rPr lang="en-US" altLang="zh-CN" dirty="0"/>
-              <a:t>design</a:t>
-            </a:r>
-            <a:r>
-              <a:rPr lang="zh-CN" altLang="en-US" dirty="0"/>
-              <a:t> </a:t>
-            </a:r>
-            <a:r>
-              <a:rPr lang="en-US" altLang="zh-CN" dirty="0"/>
-              <a:t>is</a:t>
-            </a:r>
-            <a:r>
-              <a:rPr lang="zh-CN" altLang="en-US" dirty="0"/>
-              <a:t> </a:t>
-            </a:r>
-            <a:r>
-              <a:rPr lang="en-US" altLang="zh-CN" dirty="0">
-                <a:solidFill>
-                  <a:srgbClr val="0432FF"/>
-                </a:solidFill>
-              </a:rPr>
-              <a:t>art</a:t>
-            </a:r>
+              <a:t>Heterogeneous</a:t>
+            </a:r>
+            <a:r>
+              <a:rPr lang="zh-CN" altLang="en-US" dirty="0"/>
+              <a:t> </a:t>
+            </a:r>
+            <a:r>
+              <a:rPr lang="en-US" altLang="zh-CN" dirty="0"/>
+              <a:t>platforms</a:t>
+            </a:r>
+            <a:r>
+              <a:rPr lang="zh-CN" altLang="en-US" dirty="0"/>
+              <a:t> </a:t>
+            </a:r>
+            <a:r>
+              <a:rPr lang="en-US" altLang="zh-CN" dirty="0"/>
+              <a:t>are</a:t>
+            </a:r>
+            <a:r>
+              <a:rPr lang="zh-CN" altLang="en-US" dirty="0"/>
+              <a:t> </a:t>
+            </a:r>
+            <a:r>
+              <a:rPr lang="en-US" altLang="zh-CN" dirty="0"/>
+              <a:t>ubiquitous</a:t>
+            </a:r>
+            <a:r>
+              <a:rPr lang="zh-CN" altLang="en-US" dirty="0"/>
+              <a:t> </a:t>
+            </a:r>
+            <a:endParaRPr lang="en-US" altLang="zh-CN" dirty="0">
+              <a:solidFill>
+                <a:srgbClr val="0432FF"/>
+              </a:solidFill>
+            </a:endParaRPr>
           </a:p>
           <a:p>
             <a:pPr lvl="1">
@@ -7270,23 +6828,55 @@
             </a:pPr>
             <a:r>
               <a:rPr lang="en-US" altLang="zh-CN" dirty="0"/>
-              <a:t>The</a:t>
-            </a:r>
-            <a:r>
-              <a:rPr lang="zh-CN" altLang="en-US" dirty="0"/>
-              <a:t> </a:t>
-            </a:r>
-            <a:r>
-              <a:rPr lang="en-US" altLang="zh-CN" dirty="0"/>
-              <a:t>basic</a:t>
-            </a:r>
-            <a:r>
-              <a:rPr lang="zh-CN" altLang="en-US" dirty="0"/>
-              <a:t> </a:t>
-            </a:r>
-            <a:r>
-              <a:rPr lang="en-US" altLang="zh-CN" dirty="0"/>
-              <a:t>principle</a:t>
+              <a:t>mobile</a:t>
+            </a:r>
+            <a:r>
+              <a:rPr lang="zh-CN" altLang="en-US" dirty="0"/>
+              <a:t> </a:t>
+            </a:r>
+            <a:r>
+              <a:rPr lang="en-US" altLang="zh-CN" dirty="0"/>
+              <a:t>devices,</a:t>
+            </a:r>
+            <a:r>
+              <a:rPr lang="zh-CN" altLang="en-US" dirty="0"/>
+              <a:t> </a:t>
+            </a:r>
+            <a:r>
+              <a:rPr lang="en-US" altLang="zh-CN" dirty="0"/>
+              <a:t>laptops,</a:t>
+            </a:r>
+            <a:r>
+              <a:rPr lang="zh-CN" altLang="en-US" dirty="0"/>
+              <a:t> </a:t>
+            </a:r>
+            <a:r>
+              <a:rPr lang="en-US" altLang="zh-CN" dirty="0"/>
+              <a:t>edge</a:t>
+            </a:r>
+            <a:r>
+              <a:rPr lang="zh-CN" altLang="en-US" dirty="0"/>
+              <a:t> </a:t>
+            </a:r>
+            <a:r>
+              <a:rPr lang="en-US" altLang="zh-CN" dirty="0"/>
+              <a:t>devices,</a:t>
+            </a:r>
+            <a:r>
+              <a:rPr lang="zh-CN" altLang="en-US" dirty="0"/>
+              <a:t> </a:t>
+            </a:r>
+            <a:r>
+              <a:rPr lang="en-US" altLang="zh-CN" dirty="0"/>
+              <a:t>clouds,</a:t>
+            </a:r>
+            <a:r>
+              <a:rPr lang="zh-CN" altLang="en-US" dirty="0"/>
+              <a:t> </a:t>
+            </a:r>
+            <a:r>
+              <a:rPr lang="en-US" altLang="zh-CN" dirty="0"/>
+              <a:t>…</a:t>
             </a:r>
           </a:p>
           <a:p>
@@ -7297,23 +6887,31 @@
             </a:pPr>
             <a:r>
               <a:rPr lang="en-US" altLang="zh-CN" dirty="0"/>
-              <a:t>Languages</a:t>
-            </a:r>
-            <a:r>
-              <a:rPr lang="zh-CN" altLang="en-US" dirty="0"/>
-              <a:t> </a:t>
-            </a:r>
-            <a:r>
-              <a:rPr lang="en-US" altLang="zh-CN" dirty="0"/>
-              <a:t>are</a:t>
-            </a:r>
-            <a:r>
-              <a:rPr lang="zh-CN" altLang="en-US" dirty="0"/>
-              <a:t> </a:t>
-            </a:r>
-            <a:r>
-              <a:rPr lang="en-US" altLang="zh-CN" dirty="0"/>
-              <a:t>tricky:</a:t>
+              <a:t>The</a:t>
+            </a:r>
+            <a:r>
+              <a:rPr lang="zh-CN" altLang="en-US" dirty="0"/>
+              <a:t> </a:t>
+            </a:r>
+            <a:r>
+              <a:rPr lang="en-US" altLang="zh-CN" dirty="0"/>
+              <a:t>push</a:t>
+            </a:r>
+            <a:r>
+              <a:rPr lang="zh-CN" altLang="en-US" dirty="0"/>
+              <a:t> </a:t>
+            </a:r>
+            <a:r>
+              <a:rPr lang="en-US" altLang="zh-CN" dirty="0"/>
+              <a:t>from</a:t>
+            </a:r>
+            <a:r>
+              <a:rPr lang="zh-CN" altLang="en-US" dirty="0"/>
+              <a:t> </a:t>
+            </a:r>
+            <a:r>
+              <a:rPr lang="en-US" altLang="zh-CN" dirty="0"/>
+              <a:t>AI</a:t>
             </a:r>
           </a:p>
           <a:p>
@@ -7324,209 +6922,96 @@
             </a:pPr>
             <a:r>
               <a:rPr lang="en-US" altLang="zh-CN" dirty="0"/>
-              <a:t>A</a:t>
-            </a:r>
-            <a:r>
-              <a:rPr lang="zh-CN" altLang="en-US" dirty="0"/>
-              <a:t> </a:t>
-            </a:r>
-            <a:r>
-              <a:rPr lang="en-US" altLang="zh-CN" dirty="0"/>
-              <a:t>deeper</a:t>
-            </a:r>
-            <a:r>
-              <a:rPr lang="zh-CN" altLang="en-US" dirty="0"/>
-              <a:t> </a:t>
-            </a:r>
-            <a:r>
-              <a:rPr lang="en-US" altLang="zh-CN" dirty="0"/>
-              <a:t>understanding</a:t>
-            </a:r>
-            <a:r>
-              <a:rPr lang="zh-CN" altLang="en-US" dirty="0"/>
-              <a:t> </a:t>
-            </a:r>
-            <a:r>
-              <a:rPr lang="en-US" altLang="zh-CN" dirty="0"/>
-              <a:t>of</a:t>
-            </a:r>
-            <a:r>
-              <a:rPr lang="zh-CN" altLang="en-US" dirty="0"/>
-              <a:t> </a:t>
-            </a:r>
-            <a:r>
-              <a:rPr lang="en-US" altLang="zh-CN" dirty="0"/>
-              <a:t>their</a:t>
-            </a:r>
-            <a:r>
-              <a:rPr lang="zh-CN" altLang="en-US" dirty="0"/>
-              <a:t> </a:t>
-            </a:r>
-            <a:r>
-              <a:rPr lang="en-US" altLang="zh-CN" dirty="0"/>
-              <a:t>strength</a:t>
-            </a:r>
-            <a:r>
-              <a:rPr lang="zh-CN" altLang="en-US" dirty="0"/>
-              <a:t> </a:t>
-            </a:r>
-            <a:r>
-              <a:rPr lang="en-US" altLang="zh-CN" dirty="0"/>
-              <a:t>and</a:t>
-            </a:r>
-            <a:r>
-              <a:rPr lang="zh-CN" altLang="en-US" dirty="0"/>
-              <a:t> </a:t>
-            </a:r>
-            <a:r>
-              <a:rPr lang="en-US" altLang="zh-CN" dirty="0"/>
-              <a:t>weakness</a:t>
-            </a:r>
-          </a:p>
-          <a:p>
-            <a:pPr lvl="2">
+              <a:t>computing</a:t>
+            </a:r>
+            <a:r>
+              <a:rPr lang="zh-CN" altLang="en-US" dirty="0"/>
+              <a:t> </a:t>
+            </a:r>
+            <a:r>
+              <a:rPr lang="en-US" altLang="zh-CN" dirty="0"/>
+              <a:t>power</a:t>
+            </a:r>
+            <a:r>
+              <a:rPr lang="zh-CN" altLang="en-US" dirty="0"/>
+              <a:t> </a:t>
+            </a:r>
+            <a:r>
+              <a:rPr lang="en-US" altLang="zh-CN" dirty="0"/>
+              <a:t>takes</a:t>
+            </a:r>
+            <a:r>
+              <a:rPr lang="zh-CN" altLang="en-US" dirty="0"/>
+              <a:t> </a:t>
+            </a:r>
+            <a:r>
+              <a:rPr lang="en-US" altLang="zh-CN" dirty="0"/>
+              <a:t>priority</a:t>
+            </a:r>
+          </a:p>
+          <a:p>
+            <a:pPr>
               <a:lnSpc>
                 <a:spcPct val="90000"/>
               </a:lnSpc>
             </a:pPr>
             <a:r>
               <a:rPr lang="en-US" altLang="zh-CN" dirty="0"/>
-              <a:t>E.g.:</a:t>
-            </a:r>
-            <a:r>
-              <a:rPr lang="zh-CN" altLang="en-US" dirty="0"/>
-              <a:t> </a:t>
-            </a:r>
-            <a:r>
-              <a:rPr lang="en-US" altLang="zh-CN" dirty="0"/>
-              <a:t>why</a:t>
-            </a:r>
-            <a:r>
-              <a:rPr lang="zh-CN" altLang="en-US" dirty="0"/>
-              <a:t> </a:t>
-            </a:r>
-            <a:r>
-              <a:rPr lang="en-US" altLang="zh-CN" dirty="0"/>
-              <a:t>arrays</a:t>
-            </a:r>
-            <a:r>
-              <a:rPr lang="zh-CN" altLang="en-US" dirty="0"/>
-              <a:t> </a:t>
-            </a:r>
-            <a:r>
-              <a:rPr lang="en-US" altLang="zh-CN" dirty="0"/>
-              <a:t>in</a:t>
-            </a:r>
-            <a:r>
-              <a:rPr lang="zh-CN" altLang="en-US" dirty="0"/>
-              <a:t> </a:t>
-            </a:r>
-            <a:r>
-              <a:rPr lang="en-US" altLang="zh-CN" dirty="0"/>
-              <a:t>Java</a:t>
-            </a:r>
-            <a:r>
-              <a:rPr lang="zh-CN" altLang="en-US" dirty="0"/>
-              <a:t> </a:t>
-            </a:r>
-            <a:r>
-              <a:rPr lang="en-US" altLang="zh-CN" dirty="0"/>
-              <a:t>is</a:t>
-            </a:r>
-            <a:r>
-              <a:rPr lang="zh-CN" altLang="en-US" dirty="0"/>
-              <a:t> </a:t>
-            </a:r>
-            <a:r>
-              <a:rPr lang="en-US" altLang="zh-CN" dirty="0"/>
-              <a:t>a</a:t>
-            </a:r>
-            <a:r>
-              <a:rPr lang="zh-CN" altLang="en-US" dirty="0"/>
-              <a:t> </a:t>
-            </a:r>
-            <a:r>
-              <a:rPr lang="en-US" altLang="zh-CN" dirty="0"/>
-              <a:t>mistake?</a:t>
-            </a:r>
-          </a:p>
-          <a:p>
-            <a:pPr lvl="2">
-              <a:lnSpc>
-                <a:spcPct val="90000"/>
-              </a:lnSpc>
-            </a:pPr>
-            <a:r>
-              <a:rPr lang="en-US" altLang="zh-CN" dirty="0"/>
-              <a:t>E.g.:</a:t>
-            </a:r>
-            <a:r>
-              <a:rPr lang="zh-CN" altLang="en-US" dirty="0"/>
-              <a:t> </a:t>
-            </a:r>
-            <a:r>
-              <a:rPr lang="en-US" altLang="zh-CN" dirty="0"/>
-              <a:t>why</a:t>
-            </a:r>
-            <a:r>
-              <a:rPr lang="zh-CN" altLang="en-US" dirty="0"/>
-              <a:t> </a:t>
-            </a:r>
-            <a:r>
-              <a:rPr lang="en-US" altLang="zh-CN" dirty="0"/>
-              <a:t>multiple-inheritance</a:t>
-            </a:r>
-            <a:r>
-              <a:rPr lang="zh-CN" altLang="en-US" dirty="0"/>
-              <a:t> </a:t>
-            </a:r>
-            <a:r>
-              <a:rPr lang="en-US" altLang="zh-CN" dirty="0"/>
-              <a:t>in</a:t>
-            </a:r>
-            <a:r>
-              <a:rPr lang="zh-CN" altLang="en-US" dirty="0"/>
-              <a:t> </a:t>
-            </a:r>
-            <a:r>
-              <a:rPr lang="en-US" altLang="zh-CN" dirty="0"/>
-              <a:t>C++</a:t>
-            </a:r>
-            <a:r>
-              <a:rPr lang="zh-CN" altLang="en-US" dirty="0"/>
-              <a:t> </a:t>
-            </a:r>
-            <a:r>
-              <a:rPr lang="en-US" altLang="zh-CN" dirty="0"/>
-              <a:t>is</a:t>
-            </a:r>
-            <a:r>
-              <a:rPr lang="zh-CN" altLang="en-US" dirty="0"/>
-              <a:t> </a:t>
-            </a:r>
-            <a:r>
-              <a:rPr lang="en-US" altLang="zh-CN" dirty="0"/>
-              <a:t>problematic?</a:t>
-            </a:r>
-          </a:p>
-          <a:p>
-            <a:pPr lvl="1">
-              <a:lnSpc>
-                <a:spcPct val="90000"/>
-              </a:lnSpc>
-            </a:pPr>
-            <a:r>
-              <a:rPr lang="en-US" altLang="zh-CN" dirty="0"/>
-              <a:t>Common</a:t>
-            </a:r>
-            <a:r>
-              <a:rPr lang="zh-CN" altLang="en-US" dirty="0"/>
-              <a:t> </a:t>
-            </a:r>
-            <a:r>
-              <a:rPr lang="en-US" altLang="zh-CN" dirty="0"/>
-              <a:t>pitfalls</a:t>
-            </a:r>
+              <a:t>Heterogeneous</a:t>
+            </a:r>
+            <a:r>
+              <a:rPr lang="zh-CN" altLang="en-US" dirty="0"/>
+              <a:t> </a:t>
+            </a:r>
+            <a:r>
+              <a:rPr lang="en-US" altLang="zh-CN" dirty="0"/>
+              <a:t>programming</a:t>
+            </a:r>
+            <a:r>
+              <a:rPr lang="zh-CN" altLang="en-US" dirty="0"/>
+              <a:t> </a:t>
+            </a:r>
+            <a:r>
+              <a:rPr lang="en-US" altLang="zh-CN" dirty="0"/>
+              <a:t>thinking</a:t>
+            </a:r>
+            <a:r>
+              <a:rPr lang="zh-CN" altLang="en-US" dirty="0"/>
+              <a:t> </a:t>
+            </a:r>
+            <a:r>
+              <a:rPr lang="en-US" altLang="zh-CN" dirty="0"/>
+              <a:t>and</a:t>
+            </a:r>
+            <a:r>
+              <a:rPr lang="zh-CN" altLang="en-US" dirty="0"/>
+              <a:t> </a:t>
+            </a:r>
+            <a:r>
+              <a:rPr lang="en-US" altLang="zh-CN" dirty="0"/>
+              <a:t>skills</a:t>
+            </a:r>
+            <a:r>
+              <a:rPr lang="zh-CN" altLang="en-US" dirty="0"/>
+              <a:t> </a:t>
+            </a:r>
+            <a:r>
+              <a:rPr lang="en-US" altLang="zh-CN" dirty="0"/>
+              <a:t>are</a:t>
+            </a:r>
+            <a:r>
+              <a:rPr lang="zh-CN" altLang="en-US" dirty="0"/>
+              <a:t> </a:t>
+            </a:r>
+            <a:r>
+              <a:rPr lang="en-US" altLang="zh-CN" dirty="0"/>
+              <a:t>critical</a:t>
+            </a:r>
+            <a:endParaRPr lang="en-US" altLang="zh-CN" dirty="0">
+              <a:solidFill>
+                <a:srgbClr val="0432FF"/>
+              </a:solidFill>
+            </a:endParaRPr>
           </a:p>
         </p:txBody>
       </p:sp>
@@ -7727,42 +7212,58 @@
             </a:r>
             <a:r>
               <a:rPr lang="en-US" altLang="zh-CN" dirty="0"/>
-              <a:t>languages</a:t>
-            </a:r>
-            <a:r>
-              <a:rPr lang="zh-CN" altLang="en-US" dirty="0"/>
-              <a:t> </a:t>
-            </a:r>
-            <a:r>
-              <a:rPr lang="en-US" altLang="zh-CN" dirty="0"/>
-              <a:t>and</a:t>
-            </a:r>
-            <a:r>
-              <a:rPr lang="zh-CN" altLang="en-US" dirty="0"/>
-              <a:t> </a:t>
-            </a:r>
-            <a:r>
-              <a:rPr lang="en-US" altLang="zh-CN" dirty="0"/>
-              <a:t>programming</a:t>
-            </a:r>
-            <a:r>
-              <a:rPr lang="zh-CN" altLang="en-US" dirty="0"/>
-              <a:t> </a:t>
-            </a:r>
-            <a:r>
-              <a:rPr lang="en-US" altLang="zh-CN" dirty="0"/>
-              <a:t>practice</a:t>
-            </a:r>
-          </a:p>
-          <a:p>
-            <a:pPr lvl="1">
+              <a:t>heterogeneous</a:t>
+            </a:r>
+            <a:r>
+              <a:rPr lang="zh-CN" altLang="en-US" dirty="0"/>
+              <a:t> </a:t>
+            </a:r>
+            <a:r>
+              <a:rPr lang="en-US" altLang="zh-CN" dirty="0"/>
+              <a:t>systems</a:t>
+            </a:r>
+          </a:p>
+          <a:p>
+            <a:pPr>
               <a:lnSpc>
                 <a:spcPct val="90000"/>
               </a:lnSpc>
             </a:pPr>
             <a:r>
               <a:rPr lang="en-US" altLang="zh-CN" dirty="0"/>
-              <a:t>Formal</a:t>
+              <a:t>A</a:t>
+            </a:r>
+            <a:r>
+              <a:rPr lang="zh-CN" altLang="en-US" dirty="0"/>
+              <a:t> </a:t>
+            </a:r>
+            <a:r>
+              <a:rPr lang="en-US" altLang="zh-CN" dirty="0"/>
+              <a:t>deep</a:t>
+            </a:r>
+            <a:r>
+              <a:rPr lang="zh-CN" altLang="en-US" dirty="0"/>
+              <a:t> </a:t>
+            </a:r>
+            <a:r>
+              <a:rPr lang="en-US" altLang="zh-CN" dirty="0"/>
+              <a:t>understanding</a:t>
+            </a:r>
+            <a:r>
+              <a:rPr lang="zh-CN" altLang="en-US" dirty="0"/>
+              <a:t> </a:t>
+            </a:r>
+            <a:r>
+              <a:rPr lang="en-US" altLang="zh-CN" dirty="0"/>
+              <a:t>of</a:t>
+            </a:r>
+            <a:r>
+              <a:rPr lang="zh-CN" altLang="en-US" dirty="0"/>
+              <a:t> </a:t>
+            </a:r>
+            <a:r>
+              <a:rPr lang="en-US" altLang="zh-CN" dirty="0"/>
+              <a:t>languages</a:t>
             </a:r>
             <a:r>
               <a:rPr lang="zh-CN" altLang="en-US" dirty="0"/>
@@ -7778,8 +7279,21 @@
             </a:r>
             <a:r>
               <a:rPr lang="en-US" altLang="zh-CN" dirty="0"/>
-              <a:t>rigorous</a:t>
-            </a:r>
+              <a:t>programming</a:t>
+            </a:r>
+            <a:r>
+              <a:rPr lang="zh-CN" altLang="en-US" dirty="0"/>
+              <a:t> </a:t>
+            </a:r>
+            <a:r>
+              <a:rPr lang="en-US" altLang="zh-CN" dirty="0"/>
+              <a:t>skills</a:t>
+            </a:r>
+            <a:r>
+              <a:rPr lang="zh-CN" altLang="en-US" dirty="0"/>
+              <a:t> </a:t>
+            </a:r>
+            <a:endParaRPr lang="en-US" altLang="zh-CN" dirty="0"/>
           </a:p>
           <a:p>
             <a:pPr>
@@ -7817,7 +7331,7 @@
             </a:r>
             <a:r>
               <a:rPr lang="en-US" altLang="zh-CN" dirty="0"/>
-              <a:t>language</a:t>
+              <a:t>program</a:t>
             </a:r>
             <a:r>
               <a:rPr lang="zh-CN" altLang="en-US" dirty="0"/>
@@ -7889,10 +7403,10 @@
       </p:grpSpPr>
       <p:sp>
         <p:nvSpPr>
-          <p:cNvPr id="105474" name="Rectangle 2">
-            <a:extLst>
-              <a:ext uri="{FF2B5EF4-FFF2-40B4-BE49-F238E27FC236}">
-                <a16:creationId xmlns:a16="http://schemas.microsoft.com/office/drawing/2014/main" id="{C2515557-1500-0D49-8A86-DE896A433F25}"/>
+          <p:cNvPr id="108546" name="Rectangle 2">
+            <a:extLst>
+              <a:ext uri="{FF2B5EF4-FFF2-40B4-BE49-F238E27FC236}">
+                <a16:creationId xmlns:a16="http://schemas.microsoft.com/office/drawing/2014/main" id="{5A8C102A-9748-F147-8F37-9BDAD8BE6E8E}"/>
               </a:ext>
             </a:extLst>
           </p:cNvPr>
@@ -7909,18 +7423,42 @@
           <a:lstStyle/>
           <a:p>
             <a:r>
-              <a:rPr lang="en-US" altLang="zh-CN"/>
-              <a:t>History and perspective</a:t>
-            </a:r>
-          </a:p>
-        </p:txBody>
-      </p:sp>
-      <p:sp>
-        <p:nvSpPr>
-          <p:cNvPr id="105475" name="Rectangle 3">
-            <a:extLst>
-              <a:ext uri="{FF2B5EF4-FFF2-40B4-BE49-F238E27FC236}">
-                <a16:creationId xmlns:a16="http://schemas.microsoft.com/office/drawing/2014/main" id="{7FCA5A8C-22BF-344F-B6EB-C0039EC27D0E}"/>
+              <a:rPr lang="en-US" altLang="zh-CN" dirty="0"/>
+              <a:t>What</a:t>
+            </a:r>
+            <a:r>
+              <a:rPr lang="zh-CN" altLang="en-US" dirty="0"/>
+              <a:t> </a:t>
+            </a:r>
+            <a:r>
+              <a:rPr lang="en-US" altLang="zh-CN" dirty="0"/>
+              <a:t>background</a:t>
+            </a:r>
+            <a:r>
+              <a:rPr lang="zh-CN" altLang="en-US" dirty="0"/>
+              <a:t> </a:t>
+            </a:r>
+            <a:r>
+              <a:rPr lang="en-US" altLang="zh-CN" dirty="0"/>
+              <a:t>is</a:t>
+            </a:r>
+            <a:r>
+              <a:rPr lang="zh-CN" altLang="en-US" dirty="0"/>
+              <a:t> </a:t>
+            </a:r>
+            <a:r>
+              <a:rPr lang="en-US" altLang="zh-CN" dirty="0"/>
+              <a:t>needed?</a:t>
+            </a:r>
+          </a:p>
+        </p:txBody>
+      </p:sp>
+      <p:sp>
+        <p:nvSpPr>
+          <p:cNvPr id="108547" name="Rectangle 3">
+            <a:extLst>
+              <a:ext uri="{FF2B5EF4-FFF2-40B4-BE49-F238E27FC236}">
+                <a16:creationId xmlns:a16="http://schemas.microsoft.com/office/drawing/2014/main" id="{6AE8DBDA-DA32-4347-BDB9-6444B21B679E}"/>
               </a:ext>
             </a:extLst>
           </p:cNvPr>
@@ -7938,42 +7476,106 @@
           <a:p>
             <a:r>
               <a:rPr lang="en-US" altLang="zh-CN" dirty="0"/>
-              <a:t>Most fruitful</a:t>
+              <a:t>Basic</a:t>
+            </a:r>
+            <a:r>
+              <a:rPr lang="zh-CN" altLang="en-US" dirty="0"/>
+              <a:t> </a:t>
+            </a:r>
+            <a:r>
+              <a:rPr lang="en-US" altLang="zh-CN" dirty="0"/>
+              <a:t>knowledge</a:t>
+            </a:r>
+            <a:r>
+              <a:rPr lang="zh-CN" altLang="en-US" dirty="0"/>
+              <a:t> </a:t>
+            </a:r>
+            <a:r>
+              <a:rPr lang="en-US" altLang="zh-CN" dirty="0"/>
+              <a:t>of</a:t>
+            </a:r>
+            <a:r>
+              <a:rPr lang="zh-CN" altLang="en-US" dirty="0"/>
+              <a:t> </a:t>
+            </a:r>
+            <a:r>
+              <a:rPr lang="en-US" altLang="zh-CN" dirty="0"/>
+              <a:t>computer</a:t>
+            </a:r>
+            <a:r>
+              <a:rPr lang="zh-CN" altLang="en-US" dirty="0"/>
+              <a:t> </a:t>
+            </a:r>
+            <a:r>
+              <a:rPr lang="en-US" altLang="zh-CN" dirty="0"/>
+              <a:t>architectures</a:t>
+            </a:r>
+          </a:p>
+          <a:p>
+            <a:r>
+              <a:rPr lang="en-US" altLang="zh-CN" dirty="0"/>
+              <a:t>Basic</a:t>
+            </a:r>
+            <a:r>
+              <a:rPr lang="zh-CN" altLang="en-US" dirty="0"/>
+              <a:t> </a:t>
+            </a:r>
+            <a:r>
+              <a:rPr lang="en-US" altLang="zh-CN" dirty="0"/>
+              <a:t>programming</a:t>
+            </a:r>
+            <a:r>
+              <a:rPr lang="zh-CN" altLang="en-US" dirty="0"/>
+              <a:t> </a:t>
+            </a:r>
+            <a:r>
+              <a:rPr lang="en-US" altLang="zh-CN" dirty="0"/>
+              <a:t>skills </a:t>
             </a:r>
           </a:p>
           <a:p>
             <a:pPr lvl="1"/>
             <a:r>
               <a:rPr lang="en-US" altLang="zh-CN" dirty="0"/>
-              <a:t>(Nearly)</a:t>
-            </a:r>
-            <a:r>
-              <a:rPr lang="zh-CN" altLang="en-US" dirty="0"/>
-              <a:t> </a:t>
-            </a:r>
-            <a:r>
-              <a:rPr lang="en-US" altLang="zh-CN" dirty="0"/>
-              <a:t>every</a:t>
-            </a:r>
-            <a:r>
-              <a:rPr lang="zh-CN" altLang="en-US" dirty="0"/>
-              <a:t> </a:t>
-            </a:r>
-            <a:r>
-              <a:rPr lang="en-US" altLang="zh-CN" dirty="0">
-                <a:solidFill>
-                  <a:srgbClr val="0432FF"/>
-                </a:solidFill>
-              </a:rPr>
-              <a:t>new</a:t>
-            </a:r>
-            <a:r>
-              <a:rPr lang="zh-CN" altLang="en-US" dirty="0"/>
-              <a:t> </a:t>
-            </a:r>
-            <a:r>
-              <a:rPr lang="en-US" altLang="zh-CN" dirty="0"/>
-              <a:t>language/paradigm</a:t>
+              <a:t>especially,</a:t>
+            </a:r>
+            <a:r>
+              <a:rPr lang="zh-CN" altLang="en-US" dirty="0"/>
+              <a:t> </a:t>
+            </a:r>
+            <a:r>
+              <a:rPr lang="en-US" altLang="zh-CN" dirty="0"/>
+              <a:t>C</a:t>
+            </a:r>
+            <a:r>
+              <a:rPr lang="zh-CN" altLang="en-US" dirty="0"/>
+              <a:t> </a:t>
+            </a:r>
+            <a:r>
+              <a:rPr lang="en-US" altLang="zh-CN" dirty="0"/>
+              <a:t>and</a:t>
+            </a:r>
+            <a:r>
+              <a:rPr lang="zh-CN" altLang="en-US" dirty="0"/>
+              <a:t> </a:t>
+            </a:r>
+            <a:r>
+              <a:rPr lang="en-US" altLang="zh-CN" dirty="0"/>
+              <a:t>Python</a:t>
+            </a:r>
+          </a:p>
+          <a:p>
+            <a:r>
+              <a:rPr lang="en-US" altLang="zh-CN" dirty="0"/>
+              <a:t>Deep</a:t>
+            </a:r>
+            <a:r>
+              <a:rPr lang="zh-CN" altLang="en-US" dirty="0"/>
+              <a:t> </a:t>
+            </a:r>
+            <a:r>
+              <a:rPr lang="en-US" altLang="zh-CN" dirty="0"/>
+              <a:t>learning</a:t>
             </a:r>
             <a:r>
               <a:rPr lang="zh-CN" altLang="en-US" dirty="0"/>
@@ -7997,719 +7599,7 @@
             </a:r>
             <a:r>
               <a:rPr lang="en-US" altLang="zh-CN" dirty="0"/>
-              <a:t>Turing</a:t>
-            </a:r>
-            <a:r>
-              <a:rPr lang="zh-CN" altLang="en-US" dirty="0"/>
-              <a:t> </a:t>
-            </a:r>
-            <a:r>
-              <a:rPr lang="en-US" altLang="zh-CN" dirty="0"/>
-              <a:t>award</a:t>
-            </a:r>
-          </a:p>
-          <a:p>
-            <a:pPr lvl="2"/>
-            <a:r>
-              <a:rPr lang="en-US" altLang="zh-CN" dirty="0"/>
-              <a:t>Fortran:</a:t>
-            </a:r>
-            <a:r>
-              <a:rPr lang="zh-CN" altLang="en-US" dirty="0"/>
-              <a:t> </a:t>
-            </a:r>
-            <a:r>
-              <a:rPr lang="en-US" altLang="zh-CN" dirty="0"/>
-              <a:t>Backus</a:t>
-            </a:r>
-          </a:p>
-          <a:p>
-            <a:pPr lvl="2"/>
-            <a:r>
-              <a:rPr lang="en-US" altLang="zh-CN" dirty="0"/>
-              <a:t>Lisp:</a:t>
-            </a:r>
-            <a:r>
-              <a:rPr lang="zh-CN" altLang="en-US" dirty="0"/>
-              <a:t> </a:t>
-            </a:r>
-            <a:r>
-              <a:rPr lang="en-US" altLang="zh-CN" dirty="0"/>
-              <a:t>McCarthy</a:t>
-            </a:r>
-          </a:p>
-          <a:p>
-            <a:pPr lvl="2"/>
-            <a:r>
-              <a:rPr lang="en-US" altLang="zh-CN" dirty="0"/>
-              <a:t>Pascal:</a:t>
-            </a:r>
-            <a:r>
-              <a:rPr lang="zh-CN" altLang="en-US" dirty="0"/>
-              <a:t> </a:t>
-            </a:r>
-            <a:r>
-              <a:rPr lang="en-US" altLang="zh-CN" dirty="0"/>
-              <a:t>Wirth</a:t>
-            </a:r>
-          </a:p>
-          <a:p>
-            <a:pPr lvl="2"/>
-            <a:r>
-              <a:rPr lang="en-US" altLang="zh-CN" dirty="0"/>
-              <a:t>C:</a:t>
-            </a:r>
-            <a:r>
-              <a:rPr lang="zh-CN" altLang="en-US" dirty="0"/>
-              <a:t> </a:t>
-            </a:r>
-            <a:r>
-              <a:rPr lang="en-US" altLang="zh-CN" dirty="0"/>
-              <a:t>Kernighan</a:t>
-            </a:r>
-          </a:p>
-          <a:p>
-            <a:pPr lvl="2"/>
-            <a:r>
-              <a:rPr lang="en-US" altLang="zh-CN" dirty="0"/>
-              <a:t>ML:</a:t>
-            </a:r>
-            <a:r>
-              <a:rPr lang="zh-CN" altLang="en-US" dirty="0"/>
-              <a:t> </a:t>
-            </a:r>
-            <a:r>
-              <a:rPr lang="en-US" altLang="zh-CN" dirty="0"/>
-              <a:t>Milner</a:t>
-            </a:r>
-          </a:p>
-          <a:p>
-            <a:pPr lvl="2"/>
-            <a:r>
-              <a:rPr lang="en-US" altLang="zh-CN" dirty="0" err="1"/>
-              <a:t>TeX</a:t>
-            </a:r>
-            <a:r>
-              <a:rPr lang="en-US" altLang="zh-CN" dirty="0"/>
-              <a:t>:</a:t>
-            </a:r>
-            <a:r>
-              <a:rPr lang="zh-CN" altLang="en-US" dirty="0"/>
-              <a:t> </a:t>
-            </a:r>
-            <a:r>
-              <a:rPr lang="en-US" altLang="zh-CN" dirty="0"/>
-              <a:t>Knuth</a:t>
-            </a:r>
-          </a:p>
-          <a:p>
-            <a:pPr lvl="2"/>
-            <a:r>
-              <a:rPr lang="en-US" altLang="zh-CN" dirty="0"/>
-              <a:t>CLU:</a:t>
-            </a:r>
-            <a:r>
-              <a:rPr lang="zh-CN" altLang="en-US" dirty="0"/>
-              <a:t> </a:t>
-            </a:r>
-            <a:r>
-              <a:rPr lang="en-US" altLang="zh-CN" dirty="0" err="1"/>
-              <a:t>Liscov</a:t>
-            </a:r>
-            <a:endParaRPr lang="en-US" altLang="zh-CN" dirty="0"/>
-          </a:p>
-          <a:p>
-            <a:pPr lvl="2"/>
-            <a:r>
-              <a:rPr lang="en-US" altLang="zh-CN" dirty="0"/>
-              <a:t>…</a:t>
-            </a:r>
-          </a:p>
-        </p:txBody>
-      </p:sp>
-    </p:spTree>
-  </p:cSld>
-  <p:clrMapOvr>
-    <a:masterClrMapping/>
-  </p:clrMapOvr>
-</p:sld>
-</file>
-
-<file path=ppt/slides/slide7.xml><?xml version="1.0" encoding="utf-8"?>
-<p:sld xmlns:a="http://schemas.openxmlformats.org/drawingml/2006/main" xmlns:r="http://schemas.openxmlformats.org/officeDocument/2006/relationships" xmlns:p="http://schemas.openxmlformats.org/presentationml/2006/main">
-  <p:cSld>
-    <p:spTree>
-      <p:nvGrpSpPr>
-        <p:cNvPr id="1" name=""/>
-        <p:cNvGrpSpPr/>
-        <p:nvPr/>
-      </p:nvGrpSpPr>
-      <p:grpSpPr>
-        <a:xfrm>
-          <a:off x="0" y="0"/>
-          <a:ext cx="0" cy="0"/>
-          <a:chOff x="0" y="0"/>
-          <a:chExt cx="0" cy="0"/>
-        </a:xfrm>
-      </p:grpSpPr>
-      <p:sp>
-        <p:nvSpPr>
-          <p:cNvPr id="108546" name="Rectangle 2">
-            <a:extLst>
-              <a:ext uri="{FF2B5EF4-FFF2-40B4-BE49-F238E27FC236}">
-                <a16:creationId xmlns:a16="http://schemas.microsoft.com/office/drawing/2014/main" id="{5A8C102A-9748-F147-8F37-9BDAD8BE6E8E}"/>
-              </a:ext>
-            </a:extLst>
-          </p:cNvPr>
-          <p:cNvSpPr>
-            <a:spLocks noGrp="1" noChangeArrowheads="1"/>
-          </p:cNvSpPr>
-          <p:nvPr>
-            <p:ph type="title"/>
-          </p:nvPr>
-        </p:nvSpPr>
-        <p:spPr/>
-        <p:txBody>
-          <a:bodyPr/>
-          <a:lstStyle/>
-          <a:p>
-            <a:r>
-              <a:rPr lang="en-US" altLang="zh-CN" dirty="0"/>
-              <a:t>This</a:t>
-            </a:r>
-            <a:r>
-              <a:rPr lang="zh-CN" altLang="en-US" dirty="0"/>
-              <a:t> </a:t>
-            </a:r>
-            <a:r>
-              <a:rPr lang="en-US" altLang="zh-CN" dirty="0"/>
-              <a:t>course</a:t>
-            </a:r>
-            <a:r>
-              <a:rPr lang="zh-CN" altLang="en-US" dirty="0"/>
-              <a:t> </a:t>
-            </a:r>
-            <a:r>
-              <a:rPr lang="en-US" altLang="zh-CN" dirty="0"/>
-              <a:t>is</a:t>
-            </a:r>
-            <a:r>
-              <a:rPr lang="zh-CN" altLang="en-US" dirty="0"/>
-              <a:t> </a:t>
-            </a:r>
-            <a:r>
-              <a:rPr lang="en-US" altLang="zh-CN" dirty="0"/>
-              <a:t>not</a:t>
-            </a:r>
-            <a:r>
-              <a:rPr lang="zh-CN" altLang="en-US" dirty="0"/>
-              <a:t> </a:t>
-            </a:r>
-            <a:r>
-              <a:rPr lang="en-US" altLang="zh-CN" dirty="0"/>
-              <a:t>about</a:t>
-            </a:r>
-          </a:p>
-        </p:txBody>
-      </p:sp>
-      <p:sp>
-        <p:nvSpPr>
-          <p:cNvPr id="108547" name="Rectangle 3">
-            <a:extLst>
-              <a:ext uri="{FF2B5EF4-FFF2-40B4-BE49-F238E27FC236}">
-                <a16:creationId xmlns:a16="http://schemas.microsoft.com/office/drawing/2014/main" id="{6AE8DBDA-DA32-4347-BDB9-6444B21B679E}"/>
-              </a:ext>
-            </a:extLst>
-          </p:cNvPr>
-          <p:cNvSpPr>
-            <a:spLocks noGrp="1" noChangeArrowheads="1"/>
-          </p:cNvSpPr>
-          <p:nvPr>
-            <p:ph type="body" idx="1"/>
-          </p:nvPr>
-        </p:nvSpPr>
-        <p:spPr/>
-        <p:txBody>
-          <a:bodyPr/>
-          <a:lstStyle/>
-          <a:p>
-            <a:r>
-              <a:rPr lang="en-US" altLang="zh-CN" dirty="0"/>
-              <a:t>Programming</a:t>
-            </a:r>
-            <a:r>
-              <a:rPr lang="zh-CN" altLang="en-US" dirty="0"/>
-              <a:t> </a:t>
-            </a:r>
-            <a:r>
-              <a:rPr lang="en-US" altLang="zh-CN" dirty="0"/>
-              <a:t>techniques</a:t>
-            </a:r>
-            <a:r>
-              <a:rPr lang="zh-CN" altLang="en-US" dirty="0"/>
-              <a:t> </a:t>
-            </a:r>
-            <a:r>
-              <a:rPr lang="en-US" altLang="zh-CN" dirty="0"/>
-              <a:t>in</a:t>
-            </a:r>
-            <a:r>
-              <a:rPr lang="zh-CN" altLang="en-US" dirty="0"/>
-              <a:t> </a:t>
-            </a:r>
-            <a:r>
-              <a:rPr lang="en-US" altLang="zh-CN" dirty="0"/>
-              <a:t>various</a:t>
-            </a:r>
-            <a:r>
-              <a:rPr lang="zh-CN" altLang="en-US" dirty="0"/>
-              <a:t> </a:t>
-            </a:r>
-            <a:r>
-              <a:rPr lang="en-US" altLang="zh-CN" dirty="0"/>
-              <a:t>languages:</a:t>
-            </a:r>
-          </a:p>
-          <a:p>
-            <a:pPr lvl="1"/>
-            <a:r>
-              <a:rPr lang="en-US" altLang="zh-CN" dirty="0"/>
-              <a:t>C/C++,</a:t>
-            </a:r>
-            <a:r>
-              <a:rPr lang="zh-CN" altLang="en-US" dirty="0"/>
-              <a:t> </a:t>
-            </a:r>
-            <a:r>
-              <a:rPr lang="en-US" altLang="zh-CN" dirty="0"/>
-              <a:t>Java,</a:t>
-            </a:r>
-            <a:r>
-              <a:rPr lang="zh-CN" altLang="en-US" dirty="0"/>
-              <a:t> </a:t>
-            </a:r>
-            <a:r>
-              <a:rPr lang="en-US" altLang="zh-CN" dirty="0"/>
-              <a:t>Python,</a:t>
-            </a:r>
-            <a:r>
-              <a:rPr lang="zh-CN" altLang="en-US" dirty="0"/>
-              <a:t> </a:t>
-            </a:r>
-            <a:r>
-              <a:rPr lang="en-US" altLang="zh-CN" dirty="0"/>
-              <a:t>JavaScript,</a:t>
-            </a:r>
-            <a:r>
-              <a:rPr lang="zh-CN" altLang="en-US" dirty="0"/>
-              <a:t> </a:t>
-            </a:r>
-            <a:r>
-              <a:rPr lang="en-US" altLang="zh-CN" dirty="0"/>
-              <a:t>…</a:t>
-            </a:r>
-          </a:p>
-          <a:p>
-            <a:r>
-              <a:rPr lang="en-US" altLang="zh-CN" dirty="0"/>
-              <a:t>Compiler</a:t>
-            </a:r>
-            <a:r>
-              <a:rPr lang="zh-CN" altLang="en-US" dirty="0"/>
-              <a:t> </a:t>
-            </a:r>
-            <a:r>
-              <a:rPr lang="en-US" altLang="zh-CN" dirty="0"/>
-              <a:t>design</a:t>
-            </a:r>
-          </a:p>
-          <a:p>
-            <a:r>
-              <a:rPr lang="en-US" altLang="zh-CN" dirty="0"/>
-              <a:t>Functional</a:t>
-            </a:r>
-            <a:r>
-              <a:rPr lang="zh-CN" altLang="en-US" dirty="0"/>
-              <a:t> </a:t>
-            </a:r>
-            <a:r>
-              <a:rPr lang="en-US" altLang="zh-CN" dirty="0"/>
-              <a:t>programming</a:t>
-            </a:r>
-          </a:p>
-          <a:p>
-            <a:r>
-              <a:rPr lang="en-US" altLang="zh-CN" dirty="0"/>
-              <a:t>Program</a:t>
-            </a:r>
-            <a:r>
-              <a:rPr lang="zh-CN" altLang="en-US" dirty="0"/>
-              <a:t> </a:t>
-            </a:r>
-            <a:r>
-              <a:rPr lang="en-US" altLang="zh-CN" dirty="0"/>
-              <a:t>design</a:t>
-            </a:r>
-          </a:p>
-          <a:p>
-            <a:pPr lvl="1"/>
-            <a:r>
-              <a:rPr lang="en-US" altLang="zh-CN" dirty="0"/>
-              <a:t>Data</a:t>
-            </a:r>
-            <a:r>
-              <a:rPr lang="zh-CN" altLang="en-US" dirty="0"/>
-              <a:t> </a:t>
-            </a:r>
-            <a:r>
-              <a:rPr lang="en-US" altLang="zh-CN" dirty="0"/>
-              <a:t>structures</a:t>
-            </a:r>
-            <a:r>
-              <a:rPr lang="zh-CN" altLang="en-US" dirty="0"/>
-              <a:t> </a:t>
-            </a:r>
-            <a:r>
-              <a:rPr lang="en-US" altLang="zh-CN" dirty="0"/>
-              <a:t>&amp;</a:t>
-            </a:r>
-            <a:r>
-              <a:rPr lang="zh-CN" altLang="en-US" dirty="0"/>
-              <a:t> </a:t>
-            </a:r>
-            <a:r>
-              <a:rPr lang="en-US" altLang="zh-CN" dirty="0"/>
-              <a:t>algorithms</a:t>
-            </a:r>
-          </a:p>
-          <a:p>
-            <a:pPr marL="457200" lvl="1" indent="0">
-              <a:buNone/>
-            </a:pPr>
-            <a:endParaRPr lang="en-US" altLang="zh-CN" dirty="0"/>
-          </a:p>
-          <a:p>
-            <a:r>
-              <a:rPr lang="en-US" altLang="zh-CN" dirty="0"/>
-              <a:t>Although</a:t>
-            </a:r>
-            <a:r>
-              <a:rPr lang="zh-CN" altLang="en-US" dirty="0"/>
-              <a:t> </a:t>
-            </a:r>
-            <a:r>
-              <a:rPr lang="en-US" altLang="zh-CN" dirty="0"/>
-              <a:t>these</a:t>
-            </a:r>
-            <a:r>
-              <a:rPr lang="zh-CN" altLang="en-US" dirty="0"/>
-              <a:t> </a:t>
-            </a:r>
-            <a:r>
-              <a:rPr lang="en-US" altLang="zh-CN" dirty="0"/>
-              <a:t>background</a:t>
-            </a:r>
-            <a:r>
-              <a:rPr lang="zh-CN" altLang="en-US" dirty="0"/>
-              <a:t> </a:t>
-            </a:r>
-            <a:r>
-              <a:rPr lang="en-US" altLang="zh-CN" dirty="0"/>
-              <a:t>are</a:t>
-            </a:r>
-            <a:r>
-              <a:rPr lang="zh-CN" altLang="en-US" dirty="0"/>
-              <a:t> </a:t>
-            </a:r>
-            <a:r>
-              <a:rPr lang="en-US" altLang="zh-CN" dirty="0"/>
-              <a:t>helpful</a:t>
-            </a:r>
-          </a:p>
-        </p:txBody>
-      </p:sp>
-    </p:spTree>
-  </p:cSld>
-  <p:clrMapOvr>
-    <a:masterClrMapping/>
-  </p:clrMapOvr>
-</p:sld>
-</file>
-
-<file path=ppt/slides/slide8.xml><?xml version="1.0" encoding="utf-8"?>
-<p:sld xmlns:a="http://schemas.openxmlformats.org/drawingml/2006/main" xmlns:r="http://schemas.openxmlformats.org/officeDocument/2006/relationships" xmlns:p="http://schemas.openxmlformats.org/presentationml/2006/main">
-  <p:cSld>
-    <p:spTree>
-      <p:nvGrpSpPr>
-        <p:cNvPr id="1" name=""/>
-        <p:cNvGrpSpPr/>
-        <p:nvPr/>
-      </p:nvGrpSpPr>
-      <p:grpSpPr>
-        <a:xfrm>
-          <a:off x="0" y="0"/>
-          <a:ext cx="0" cy="0"/>
-          <a:chOff x="0" y="0"/>
-          <a:chExt cx="0" cy="0"/>
-        </a:xfrm>
-      </p:grpSpPr>
-      <p:sp>
-        <p:nvSpPr>
-          <p:cNvPr id="108546" name="Rectangle 2">
-            <a:extLst>
-              <a:ext uri="{FF2B5EF4-FFF2-40B4-BE49-F238E27FC236}">
-                <a16:creationId xmlns:a16="http://schemas.microsoft.com/office/drawing/2014/main" id="{5A8C102A-9748-F147-8F37-9BDAD8BE6E8E}"/>
-              </a:ext>
-            </a:extLst>
-          </p:cNvPr>
-          <p:cNvSpPr>
-            <a:spLocks noGrp="1" noChangeArrowheads="1"/>
-          </p:cNvSpPr>
-          <p:nvPr>
-            <p:ph type="title"/>
-          </p:nvPr>
-        </p:nvSpPr>
-        <p:spPr/>
-        <p:txBody>
-          <a:bodyPr/>
-          <a:lstStyle/>
-          <a:p>
-            <a:r>
-              <a:rPr lang="en-US" altLang="zh-CN" dirty="0"/>
-              <a:t>What</a:t>
-            </a:r>
-            <a:r>
-              <a:rPr lang="zh-CN" altLang="en-US" dirty="0"/>
-              <a:t> </a:t>
-            </a:r>
-            <a:r>
-              <a:rPr lang="en-US" altLang="zh-CN" dirty="0"/>
-              <a:t>background</a:t>
-            </a:r>
-            <a:r>
-              <a:rPr lang="zh-CN" altLang="en-US" dirty="0"/>
-              <a:t> </a:t>
-            </a:r>
-            <a:r>
-              <a:rPr lang="en-US" altLang="zh-CN" dirty="0"/>
-              <a:t>is</a:t>
-            </a:r>
-            <a:r>
-              <a:rPr lang="zh-CN" altLang="en-US" dirty="0"/>
-              <a:t> </a:t>
-            </a:r>
-            <a:r>
-              <a:rPr lang="en-US" altLang="zh-CN" dirty="0"/>
-              <a:t>needed?</a:t>
-            </a:r>
-          </a:p>
-        </p:txBody>
-      </p:sp>
-      <p:sp>
-        <p:nvSpPr>
-          <p:cNvPr id="108547" name="Rectangle 3">
-            <a:extLst>
-              <a:ext uri="{FF2B5EF4-FFF2-40B4-BE49-F238E27FC236}">
-                <a16:creationId xmlns:a16="http://schemas.microsoft.com/office/drawing/2014/main" id="{6AE8DBDA-DA32-4347-BDB9-6444B21B679E}"/>
-              </a:ext>
-            </a:extLst>
-          </p:cNvPr>
-          <p:cNvSpPr>
-            <a:spLocks noGrp="1" noChangeArrowheads="1"/>
-          </p:cNvSpPr>
-          <p:nvPr>
-            <p:ph type="body" idx="1"/>
-          </p:nvPr>
-        </p:nvSpPr>
-        <p:spPr/>
-        <p:txBody>
-          <a:bodyPr/>
-          <a:lstStyle/>
-          <a:p>
-            <a:r>
-              <a:rPr lang="en-US" altLang="zh-CN" dirty="0"/>
-              <a:t>Basic</a:t>
-            </a:r>
-            <a:r>
-              <a:rPr lang="zh-CN" altLang="en-US" dirty="0"/>
-              <a:t> </a:t>
-            </a:r>
-            <a:r>
-              <a:rPr lang="en-US" altLang="zh-CN" dirty="0"/>
-              <a:t>mathematics:</a:t>
-            </a:r>
-          </a:p>
-          <a:p>
-            <a:pPr lvl="1"/>
-            <a:r>
-              <a:rPr lang="en-US" altLang="zh-CN" dirty="0"/>
-              <a:t>Set,</a:t>
-            </a:r>
-            <a:r>
-              <a:rPr lang="zh-CN" altLang="en-US" dirty="0"/>
-              <a:t> </a:t>
-            </a:r>
-            <a:r>
-              <a:rPr lang="en-US" altLang="zh-CN" dirty="0"/>
-              <a:t>relations,</a:t>
-            </a:r>
-            <a:r>
-              <a:rPr lang="zh-CN" altLang="en-US" dirty="0"/>
-              <a:t> </a:t>
-            </a:r>
-            <a:r>
-              <a:rPr lang="en-US" altLang="zh-CN" dirty="0"/>
-              <a:t>inductions,</a:t>
-            </a:r>
-            <a:r>
-              <a:rPr lang="zh-CN" altLang="en-US" dirty="0"/>
-              <a:t> </a:t>
-            </a:r>
-            <a:endParaRPr lang="en-US" altLang="zh-CN" dirty="0"/>
-          </a:p>
-          <a:p>
-            <a:r>
-              <a:rPr lang="en-US" altLang="zh-CN" dirty="0"/>
-              <a:t>Basic</a:t>
-            </a:r>
-            <a:r>
-              <a:rPr lang="zh-CN" altLang="en-US" dirty="0"/>
-              <a:t> </a:t>
-            </a:r>
-            <a:r>
-              <a:rPr lang="en-US" altLang="zh-CN" dirty="0"/>
-              <a:t>knowledge</a:t>
-            </a:r>
-            <a:r>
-              <a:rPr lang="zh-CN" altLang="en-US" dirty="0"/>
-              <a:t> </a:t>
-            </a:r>
-            <a:r>
-              <a:rPr lang="en-US" altLang="zh-CN" dirty="0"/>
-              <a:t>of</a:t>
-            </a:r>
-            <a:r>
-              <a:rPr lang="zh-CN" altLang="en-US" dirty="0"/>
-              <a:t> </a:t>
-            </a:r>
-            <a:r>
-              <a:rPr lang="en-US" altLang="zh-CN" dirty="0"/>
-              <a:t>compilers</a:t>
-            </a:r>
-          </a:p>
-          <a:p>
-            <a:pPr lvl="1"/>
-            <a:r>
-              <a:rPr lang="en-US" altLang="zh-CN" dirty="0"/>
-              <a:t>Abstract</a:t>
-            </a:r>
-            <a:r>
-              <a:rPr lang="zh-CN" altLang="en-US" dirty="0"/>
-              <a:t> </a:t>
-            </a:r>
-            <a:r>
-              <a:rPr lang="en-US" altLang="zh-CN" dirty="0"/>
-              <a:t>syntax</a:t>
-            </a:r>
-            <a:r>
-              <a:rPr lang="zh-CN" altLang="en-US" dirty="0"/>
-              <a:t> </a:t>
-            </a:r>
-            <a:r>
-              <a:rPr lang="en-US" altLang="zh-CN" dirty="0"/>
-              <a:t>trees,</a:t>
-            </a:r>
-            <a:r>
-              <a:rPr lang="zh-CN" altLang="en-US" dirty="0"/>
-              <a:t> </a:t>
-            </a:r>
-            <a:r>
-              <a:rPr lang="en-US" altLang="zh-CN" dirty="0"/>
-              <a:t>interpreters</a:t>
-            </a:r>
-          </a:p>
-          <a:p>
-            <a:r>
-              <a:rPr lang="en-US" altLang="zh-CN" dirty="0"/>
-              <a:t>Basic</a:t>
-            </a:r>
-            <a:r>
-              <a:rPr lang="zh-CN" altLang="en-US" dirty="0"/>
-              <a:t> </a:t>
-            </a:r>
-            <a:r>
-              <a:rPr lang="en-US" altLang="zh-CN" dirty="0"/>
-              <a:t>knowledge</a:t>
-            </a:r>
-            <a:r>
-              <a:rPr lang="zh-CN" altLang="en-US" dirty="0"/>
-              <a:t> </a:t>
-            </a:r>
-            <a:r>
-              <a:rPr lang="en-US" altLang="zh-CN" dirty="0"/>
-              <a:t>of</a:t>
-            </a:r>
-            <a:r>
-              <a:rPr lang="zh-CN" altLang="en-US" dirty="0"/>
-              <a:t> </a:t>
-            </a:r>
-            <a:r>
-              <a:rPr lang="en-US" altLang="zh-CN" dirty="0"/>
-              <a:t>algorithms</a:t>
-            </a:r>
-          </a:p>
-          <a:p>
-            <a:r>
-              <a:rPr lang="en-US" altLang="zh-CN" dirty="0"/>
-              <a:t>Knowing</a:t>
-            </a:r>
-            <a:r>
-              <a:rPr lang="zh-CN" altLang="en-US" dirty="0"/>
-              <a:t> </a:t>
-            </a:r>
-            <a:r>
-              <a:rPr lang="en-US" altLang="zh-CN" dirty="0"/>
-              <a:t>functional</a:t>
-            </a:r>
-            <a:r>
-              <a:rPr lang="zh-CN" altLang="en-US" dirty="0"/>
-              <a:t> </a:t>
-            </a:r>
-            <a:r>
-              <a:rPr lang="en-US" altLang="zh-CN" dirty="0"/>
-              <a:t>programming</a:t>
-            </a:r>
-            <a:r>
-              <a:rPr lang="zh-CN" altLang="en-US" dirty="0"/>
-              <a:t> </a:t>
-            </a:r>
-            <a:r>
-              <a:rPr lang="en-US" altLang="zh-CN" dirty="0"/>
-              <a:t>and</a:t>
-            </a:r>
-            <a:r>
-              <a:rPr lang="zh-CN" altLang="en-US" dirty="0"/>
-              <a:t> </a:t>
-            </a:r>
-            <a:r>
-              <a:rPr lang="en-US" altLang="zh-CN" dirty="0"/>
-              <a:t>logic</a:t>
-            </a:r>
-            <a:r>
-              <a:rPr lang="zh-CN" altLang="en-US" dirty="0"/>
-              <a:t> </a:t>
-            </a:r>
-            <a:r>
-              <a:rPr lang="en-US" altLang="zh-CN" dirty="0"/>
-              <a:t>is</a:t>
-            </a:r>
-            <a:r>
-              <a:rPr lang="zh-CN" altLang="en-US" dirty="0"/>
-              <a:t> </a:t>
-            </a:r>
-            <a:r>
-              <a:rPr lang="en-US" altLang="zh-CN" dirty="0"/>
-              <a:t>better,</a:t>
+              <a:t>bonus,</a:t>
             </a:r>
             <a:r>
               <a:rPr lang="zh-CN" altLang="en-US" dirty="0"/>
@@ -8751,7 +7641,7 @@
 </p:sld>
 </file>
 
-<file path=ppt/slides/slide9.xml><?xml version="1.0" encoding="utf-8"?>
+<file path=ppt/slides/slide7.xml><?xml version="1.0" encoding="utf-8"?>
 <p:sld xmlns:a="http://schemas.openxmlformats.org/drawingml/2006/main" xmlns:r="http://schemas.openxmlformats.org/officeDocument/2006/relationships" xmlns:p="http://schemas.openxmlformats.org/presentationml/2006/main">
   <p:cSld>
     <p:spTree>
@@ -8902,6 +7792,441 @@
                 </a:solidFill>
               </a:rPr>
               <a:t>How This Course Works</a:t>
+            </a:r>
+          </a:p>
+        </p:txBody>
+      </p:sp>
+    </p:spTree>
+  </p:cSld>
+  <p:clrMapOvr>
+    <a:masterClrMapping/>
+  </p:clrMapOvr>
+</p:sld>
+</file>
+
+<file path=ppt/slides/slide8.xml><?xml version="1.0" encoding="utf-8"?>
+<p:sld xmlns:a="http://schemas.openxmlformats.org/drawingml/2006/main" xmlns:r="http://schemas.openxmlformats.org/officeDocument/2006/relationships" xmlns:p="http://schemas.openxmlformats.org/presentationml/2006/main">
+  <p:cSld>
+    <p:spTree>
+      <p:nvGrpSpPr>
+        <p:cNvPr id="1" name=""/>
+        <p:cNvGrpSpPr/>
+        <p:nvPr/>
+      </p:nvGrpSpPr>
+      <p:grpSpPr>
+        <a:xfrm>
+          <a:off x="0" y="0"/>
+          <a:ext cx="0" cy="0"/>
+          <a:chOff x="0" y="0"/>
+          <a:chExt cx="0" cy="0"/>
+        </a:xfrm>
+      </p:grpSpPr>
+      <p:sp>
+        <p:nvSpPr>
+          <p:cNvPr id="92162" name="Rectangle 2">
+            <a:extLst>
+              <a:ext uri="{FF2B5EF4-FFF2-40B4-BE49-F238E27FC236}">
+                <a16:creationId xmlns:a16="http://schemas.microsoft.com/office/drawing/2014/main" id="{0A5A60BF-10C8-9D43-8EF6-A81549643A73}"/>
+              </a:ext>
+            </a:extLst>
+          </p:cNvPr>
+          <p:cNvSpPr>
+            <a:spLocks noGrp="1" noChangeArrowheads="1"/>
+          </p:cNvSpPr>
+          <p:nvPr>
+            <p:ph type="title"/>
+          </p:nvPr>
+        </p:nvSpPr>
+        <p:spPr/>
+        <p:txBody>
+          <a:bodyPr/>
+          <a:lstStyle/>
+          <a:p>
+            <a:r>
+              <a:rPr lang="en-US" altLang="zh-CN" dirty="0"/>
+              <a:t>Administrivia</a:t>
+            </a:r>
+          </a:p>
+        </p:txBody>
+      </p:sp>
+      <p:sp>
+        <p:nvSpPr>
+          <p:cNvPr id="92163" name="Rectangle 3">
+            <a:extLst>
+              <a:ext uri="{FF2B5EF4-FFF2-40B4-BE49-F238E27FC236}">
+                <a16:creationId xmlns:a16="http://schemas.microsoft.com/office/drawing/2014/main" id="{5AA507DA-1851-2647-B0D8-1528A061BAEA}"/>
+              </a:ext>
+            </a:extLst>
+          </p:cNvPr>
+          <p:cNvSpPr>
+            <a:spLocks noGrp="1" noChangeArrowheads="1"/>
+          </p:cNvSpPr>
+          <p:nvPr>
+            <p:ph type="body" idx="1"/>
+          </p:nvPr>
+        </p:nvSpPr>
+        <p:spPr/>
+        <p:txBody>
+          <a:bodyPr/>
+          <a:lstStyle/>
+          <a:p>
+            <a:r>
+              <a:rPr lang="en-US" altLang="zh-CN" dirty="0"/>
+              <a:t>Course</a:t>
+            </a:r>
+            <a:r>
+              <a:rPr lang="zh-CN" altLang="en-US" dirty="0"/>
+              <a:t> </a:t>
+            </a:r>
+            <a:r>
+              <a:rPr lang="en-US" altLang="zh-CN" dirty="0"/>
+              <a:t>page:</a:t>
+            </a:r>
+          </a:p>
+          <a:p>
+            <a:pPr marL="0" indent="0">
+              <a:buNone/>
+            </a:pPr>
+            <a:r>
+              <a:rPr lang="en-US" altLang="zh-CN" sz="2400" dirty="0">
+                <a:hlinkClick r:id="rId2"/>
+              </a:rPr>
+              <a:t>https://csslab-ustc.github.io/courses/popl26/</a:t>
+            </a:r>
+            <a:endParaRPr lang="en-US" altLang="zh-CN" sz="2400" dirty="0"/>
+          </a:p>
+          <a:p>
+            <a:pPr marL="0" indent="0">
+              <a:buNone/>
+            </a:pPr>
+            <a:endParaRPr lang="en-US" altLang="zh-CN" sz="2400" dirty="0"/>
+          </a:p>
+          <a:p>
+            <a:pPr lvl="0">
+              <a:buClr>
+                <a:srgbClr val="3333CC"/>
+              </a:buClr>
+            </a:pPr>
+            <a:r>
+              <a:rPr lang="en-US" altLang="zh-CN" dirty="0">
+                <a:solidFill>
+                  <a:srgbClr val="000000"/>
+                </a:solidFill>
+              </a:rPr>
+              <a:t>Schedule</a:t>
+            </a:r>
+            <a:r>
+              <a:rPr lang="zh-CN" altLang="en-US" dirty="0">
+                <a:solidFill>
+                  <a:srgbClr val="000000"/>
+                </a:solidFill>
+              </a:rPr>
+              <a:t> </a:t>
+            </a:r>
+            <a:endParaRPr lang="en-US" altLang="zh-CN" dirty="0">
+              <a:solidFill>
+                <a:srgbClr val="000000"/>
+              </a:solidFill>
+            </a:endParaRPr>
+          </a:p>
+          <a:p>
+            <a:pPr lvl="0">
+              <a:buClr>
+                <a:srgbClr val="3333CC"/>
+              </a:buClr>
+            </a:pPr>
+            <a:r>
+              <a:rPr lang="en-US" altLang="zh-CN" dirty="0">
+                <a:solidFill>
+                  <a:srgbClr val="000000"/>
+                </a:solidFill>
+              </a:rPr>
+              <a:t>Readings</a:t>
+            </a:r>
+          </a:p>
+          <a:p>
+            <a:pPr lvl="0">
+              <a:buClr>
+                <a:srgbClr val="3333CC"/>
+              </a:buClr>
+            </a:pPr>
+            <a:r>
+              <a:rPr lang="en-US" altLang="zh-CN" dirty="0">
+                <a:solidFill>
+                  <a:srgbClr val="000000"/>
+                </a:solidFill>
+              </a:rPr>
+              <a:t>Assignments</a:t>
+            </a:r>
+          </a:p>
+          <a:p>
+            <a:pPr lvl="0">
+              <a:buClr>
+                <a:srgbClr val="3333CC"/>
+              </a:buClr>
+            </a:pPr>
+            <a:r>
+              <a:rPr lang="en-US" altLang="zh-CN" dirty="0">
+                <a:solidFill>
+                  <a:srgbClr val="000000"/>
+                </a:solidFill>
+              </a:rPr>
+              <a:t>…</a:t>
+            </a:r>
+          </a:p>
+          <a:p>
+            <a:pPr lvl="0">
+              <a:buClr>
+                <a:srgbClr val="3333CC"/>
+              </a:buClr>
+            </a:pPr>
+            <a:r>
+              <a:rPr lang="en-US" altLang="zh-CN" dirty="0">
+                <a:solidFill>
+                  <a:srgbClr val="000000"/>
+                </a:solidFill>
+              </a:rPr>
+              <a:t>Check</a:t>
+            </a:r>
+            <a:r>
+              <a:rPr lang="zh-CN" altLang="en-US" dirty="0">
+                <a:solidFill>
+                  <a:srgbClr val="000000"/>
+                </a:solidFill>
+              </a:rPr>
+              <a:t> </a:t>
+            </a:r>
+            <a:r>
+              <a:rPr lang="en-US" altLang="zh-CN" dirty="0">
+                <a:solidFill>
+                  <a:srgbClr val="000000"/>
+                </a:solidFill>
+              </a:rPr>
+              <a:t>frequently</a:t>
+            </a:r>
+            <a:endParaRPr lang="en-US" altLang="zh-CN" sz="2400" dirty="0"/>
+          </a:p>
+          <a:p>
+            <a:pPr marL="0" indent="0">
+              <a:buNone/>
+            </a:pPr>
+            <a:endParaRPr lang="en-US" altLang="zh-CN" dirty="0"/>
+          </a:p>
+        </p:txBody>
+      </p:sp>
+    </p:spTree>
+    <p:extLst>
+      <p:ext uri="{BB962C8B-B14F-4D97-AF65-F5344CB8AC3E}">
+        <p14:creationId xmlns:p14="http://schemas.microsoft.com/office/powerpoint/2010/main" val="402404845"/>
+      </p:ext>
+    </p:extLst>
+  </p:cSld>
+  <p:clrMapOvr>
+    <a:masterClrMapping/>
+  </p:clrMapOvr>
+</p:sld>
+</file>
+
+<file path=ppt/slides/slide9.xml><?xml version="1.0" encoding="utf-8"?>
+<p:sld xmlns:a="http://schemas.openxmlformats.org/drawingml/2006/main" xmlns:r="http://schemas.openxmlformats.org/officeDocument/2006/relationships" xmlns:p="http://schemas.openxmlformats.org/presentationml/2006/main">
+  <p:cSld>
+    <p:spTree>
+      <p:nvGrpSpPr>
+        <p:cNvPr id="1" name=""/>
+        <p:cNvGrpSpPr/>
+        <p:nvPr/>
+      </p:nvGrpSpPr>
+      <p:grpSpPr>
+        <a:xfrm>
+          <a:off x="0" y="0"/>
+          <a:ext cx="0" cy="0"/>
+          <a:chOff x="0" y="0"/>
+          <a:chExt cx="0" cy="0"/>
+        </a:xfrm>
+      </p:grpSpPr>
+      <p:sp>
+        <p:nvSpPr>
+          <p:cNvPr id="84994" name="Rectangle 2">
+            <a:extLst>
+              <a:ext uri="{FF2B5EF4-FFF2-40B4-BE49-F238E27FC236}">
+                <a16:creationId xmlns:a16="http://schemas.microsoft.com/office/drawing/2014/main" id="{06000299-7DAD-6742-BAB5-7AB2D780ABE4}"/>
+              </a:ext>
+            </a:extLst>
+          </p:cNvPr>
+          <p:cNvSpPr>
+            <a:spLocks noGrp="1" noChangeArrowheads="1"/>
+          </p:cNvSpPr>
+          <p:nvPr>
+            <p:ph type="title"/>
+          </p:nvPr>
+        </p:nvSpPr>
+        <p:spPr/>
+        <p:txBody>
+          <a:bodyPr/>
+          <a:lstStyle/>
+          <a:p>
+            <a:r>
+              <a:rPr lang="en-US" altLang="zh-CN"/>
+              <a:t>Structure of this course</a:t>
+            </a:r>
+          </a:p>
+        </p:txBody>
+      </p:sp>
+      <p:sp>
+        <p:nvSpPr>
+          <p:cNvPr id="84995" name="Rectangle 3">
+            <a:extLst>
+              <a:ext uri="{FF2B5EF4-FFF2-40B4-BE49-F238E27FC236}">
+                <a16:creationId xmlns:a16="http://schemas.microsoft.com/office/drawing/2014/main" id="{78BA9AF9-453B-2A4E-BC9F-7A33CD04B8F3}"/>
+              </a:ext>
+            </a:extLst>
+          </p:cNvPr>
+          <p:cNvSpPr>
+            <a:spLocks noGrp="1" noChangeArrowheads="1"/>
+          </p:cNvSpPr>
+          <p:nvPr>
+            <p:ph type="body" idx="1"/>
+          </p:nvPr>
+        </p:nvSpPr>
+        <p:spPr/>
+        <p:txBody>
+          <a:bodyPr/>
+          <a:lstStyle/>
+          <a:p>
+            <a:r>
+              <a:rPr lang="en-US" altLang="zh-CN" i="1" dirty="0">
+                <a:solidFill>
+                  <a:srgbClr val="0000FF"/>
+                </a:solidFill>
+              </a:rPr>
+              <a:t>Lectures</a:t>
+            </a:r>
+          </a:p>
+          <a:p>
+            <a:pPr lvl="1"/>
+            <a:r>
+              <a:rPr lang="en-US" altLang="zh-CN" dirty="0"/>
+              <a:t>Friday,</a:t>
+            </a:r>
+            <a:r>
+              <a:rPr lang="zh-CN" altLang="en-US" dirty="0"/>
+              <a:t> </a:t>
+            </a:r>
+            <a:r>
+              <a:rPr lang="en-US" altLang="zh-CN" dirty="0"/>
+              <a:t>8am</a:t>
+            </a:r>
+          </a:p>
+          <a:p>
+            <a:r>
+              <a:rPr lang="en-US" altLang="zh-CN" i="1" dirty="0">
+                <a:solidFill>
+                  <a:srgbClr val="0000FF"/>
+                </a:solidFill>
+              </a:rPr>
+              <a:t>Programming</a:t>
+            </a:r>
+            <a:r>
+              <a:rPr lang="zh-CN" altLang="en-US" i="1" dirty="0">
+                <a:solidFill>
+                  <a:srgbClr val="0000FF"/>
+                </a:solidFill>
+              </a:rPr>
+              <a:t> </a:t>
+            </a:r>
+            <a:r>
+              <a:rPr lang="en-US" altLang="zh-CN" i="1" dirty="0">
+                <a:solidFill>
+                  <a:srgbClr val="0000FF"/>
+                </a:solidFill>
+              </a:rPr>
+              <a:t>assignments</a:t>
+            </a:r>
+          </a:p>
+          <a:p>
+            <a:pPr lvl="1"/>
+            <a:r>
+              <a:rPr lang="en-US" altLang="zh-CN" dirty="0"/>
+              <a:t>8</a:t>
+            </a:r>
+            <a:r>
+              <a:rPr lang="zh-CN" altLang="en-US" dirty="0"/>
+              <a:t> </a:t>
+            </a:r>
+            <a:r>
+              <a:rPr lang="en-US" altLang="zh-CN" dirty="0"/>
+              <a:t>PAs</a:t>
+            </a:r>
+            <a:r>
+              <a:rPr lang="zh-CN" altLang="en-US" dirty="0"/>
+              <a:t> </a:t>
+            </a:r>
+            <a:r>
+              <a:rPr lang="en-US" altLang="zh-CN" dirty="0"/>
+              <a:t>planned</a:t>
+            </a:r>
+            <a:r>
+              <a:rPr lang="zh-CN" altLang="en-US" dirty="0"/>
+              <a:t> </a:t>
+            </a:r>
+            <a:r>
+              <a:rPr lang="en-US" altLang="zh-CN" dirty="0"/>
+              <a:t>(see</a:t>
+            </a:r>
+            <a:r>
+              <a:rPr lang="zh-CN" altLang="en-US" dirty="0"/>
+              <a:t> </a:t>
+            </a:r>
+            <a:r>
+              <a:rPr lang="en-US" altLang="zh-CN" dirty="0"/>
+              <a:t>course</a:t>
+            </a:r>
+            <a:r>
+              <a:rPr lang="zh-CN" altLang="en-US" dirty="0"/>
+              <a:t> </a:t>
+            </a:r>
+            <a:r>
+              <a:rPr lang="en-US" altLang="zh-CN" dirty="0"/>
+              <a:t>website)</a:t>
+            </a:r>
+          </a:p>
+          <a:p>
+            <a:r>
+              <a:rPr lang="en-US" altLang="zh-CN" i="1" dirty="0">
+                <a:solidFill>
+                  <a:srgbClr val="0000FF"/>
+                </a:solidFill>
+              </a:rPr>
+              <a:t>Presentation?</a:t>
+            </a:r>
+          </a:p>
+          <a:p>
+            <a:pPr lvl="1"/>
+            <a:r>
+              <a:rPr lang="en-US" altLang="zh-CN" i="1" dirty="0">
+                <a:solidFill>
+                  <a:srgbClr val="0000FF"/>
+                </a:solidFill>
+              </a:rPr>
+              <a:t>TBA</a:t>
+            </a:r>
+            <a:endParaRPr lang="en-US" altLang="zh-CN" dirty="0"/>
+          </a:p>
+          <a:p>
+            <a:r>
+              <a:rPr lang="en-US" altLang="zh-CN" i="1" dirty="0">
+                <a:solidFill>
+                  <a:srgbClr val="0000FF"/>
+                </a:solidFill>
+              </a:rPr>
+              <a:t>Test</a:t>
+            </a:r>
+          </a:p>
+          <a:p>
+            <a:pPr lvl="1"/>
+            <a:r>
+              <a:rPr lang="en-US" altLang="zh-CN" dirty="0"/>
+              <a:t>final</a:t>
             </a:r>
           </a:p>
         </p:txBody>
